--- a/fake-news-classifier.pptx
+++ b/fake-news-classifier.pptx
@@ -17,7 +17,16 @@
     <p:sldId id="262" r:id="rId11"/>
     <p:sldId id="263" r:id="rId12"/>
     <p:sldId id="264" r:id="rId13"/>
-    <p:sldId id="265" r:id="rId14"/>
+    <p:sldId id="269" r:id="rId14"/>
+    <p:sldId id="270" r:id="rId15"/>
+    <p:sldId id="272" r:id="rId16"/>
+    <p:sldId id="271" r:id="rId17"/>
+    <p:sldId id="273" r:id="rId18"/>
+    <p:sldId id="274" r:id="rId19"/>
+    <p:sldId id="275" r:id="rId20"/>
+    <p:sldId id="276" r:id="rId21"/>
+    <p:sldId id="277" r:id="rId22"/>
+    <p:sldId id="265" r:id="rId23"/>
   </p:sldIdLst>
   <p:sldSz cx="9144000" cy="6858000" type="screen4x3"/>
   <p:notesSz cx="6858000" cy="9144000"/>
@@ -314,7 +323,7 @@
           <a:p>
             <a:fld id="{5BCAD085-E8A6-8845-BD4E-CB4CCA059FC4}" type="datetimeFigureOut">
               <a:rPr lang="en-US" smtClean="0"/>
-              <a:t>1/19/2026</a:t>
+              <a:t>1/20/2026</a:t>
             </a:fld>
             <a:endParaRPr lang="en-US"/>
           </a:p>
@@ -356,7 +365,7 @@
           <a:p>
             <a:fld id="{C1FF6DA9-008F-8B48-92A6-B652298478BF}" type="slidenum">
               <a:rPr lang="en-US" smtClean="0"/>
-              <a:t>‹Nr.›</a:t>
+              <a:t>‹Nº›</a:t>
             </a:fld>
             <a:endParaRPr lang="en-US"/>
           </a:p>
@@ -482,7 +491,7 @@
           <a:p>
             <a:fld id="{5BCAD085-E8A6-8845-BD4E-CB4CCA059FC4}" type="datetimeFigureOut">
               <a:rPr lang="en-US" smtClean="0"/>
-              <a:t>1/19/2026</a:t>
+              <a:t>1/20/2026</a:t>
             </a:fld>
             <a:endParaRPr lang="en-US"/>
           </a:p>
@@ -524,7 +533,7 @@
           <a:p>
             <a:fld id="{C1FF6DA9-008F-8B48-92A6-B652298478BF}" type="slidenum">
               <a:rPr lang="en-US" smtClean="0"/>
-              <a:t>‹Nr.›</a:t>
+              <a:t>‹Nº›</a:t>
             </a:fld>
             <a:endParaRPr lang="en-US"/>
           </a:p>
@@ -660,7 +669,7 @@
           <a:p>
             <a:fld id="{5BCAD085-E8A6-8845-BD4E-CB4CCA059FC4}" type="datetimeFigureOut">
               <a:rPr lang="en-US" smtClean="0"/>
-              <a:t>1/19/2026</a:t>
+              <a:t>1/20/2026</a:t>
             </a:fld>
             <a:endParaRPr lang="en-US"/>
           </a:p>
@@ -702,7 +711,7 @@
           <a:p>
             <a:fld id="{C1FF6DA9-008F-8B48-92A6-B652298478BF}" type="slidenum">
               <a:rPr lang="en-US" smtClean="0"/>
-              <a:t>‹Nr.›</a:t>
+              <a:t>‹Nº›</a:t>
             </a:fld>
             <a:endParaRPr lang="en-US"/>
           </a:p>
@@ -828,7 +837,7 @@
           <a:p>
             <a:fld id="{5BCAD085-E8A6-8845-BD4E-CB4CCA059FC4}" type="datetimeFigureOut">
               <a:rPr lang="en-US" smtClean="0"/>
-              <a:t>1/19/2026</a:t>
+              <a:t>1/20/2026</a:t>
             </a:fld>
             <a:endParaRPr lang="en-US"/>
           </a:p>
@@ -870,7 +879,7 @@
           <a:p>
             <a:fld id="{C1FF6DA9-008F-8B48-92A6-B652298478BF}" type="slidenum">
               <a:rPr lang="en-US" smtClean="0"/>
-              <a:t>‹Nr.›</a:t>
+              <a:t>‹Nº›</a:t>
             </a:fld>
             <a:endParaRPr lang="en-US"/>
           </a:p>
@@ -1073,7 +1082,7 @@
           <a:p>
             <a:fld id="{5BCAD085-E8A6-8845-BD4E-CB4CCA059FC4}" type="datetimeFigureOut">
               <a:rPr lang="en-US" smtClean="0"/>
-              <a:t>1/19/2026</a:t>
+              <a:t>1/20/2026</a:t>
             </a:fld>
             <a:endParaRPr lang="en-US"/>
           </a:p>
@@ -1115,7 +1124,7 @@
           <a:p>
             <a:fld id="{C1FF6DA9-008F-8B48-92A6-B652298478BF}" type="slidenum">
               <a:rPr lang="en-US" smtClean="0"/>
-              <a:t>‹Nr.›</a:t>
+              <a:t>‹Nº›</a:t>
             </a:fld>
             <a:endParaRPr lang="en-US"/>
           </a:p>
@@ -1358,7 +1367,7 @@
           <a:p>
             <a:fld id="{5BCAD085-E8A6-8845-BD4E-CB4CCA059FC4}" type="datetimeFigureOut">
               <a:rPr lang="en-US" smtClean="0"/>
-              <a:t>1/19/2026</a:t>
+              <a:t>1/20/2026</a:t>
             </a:fld>
             <a:endParaRPr lang="en-US"/>
           </a:p>
@@ -1400,7 +1409,7 @@
           <a:p>
             <a:fld id="{C1FF6DA9-008F-8B48-92A6-B652298478BF}" type="slidenum">
               <a:rPr lang="en-US" smtClean="0"/>
-              <a:t>‹Nr.›</a:t>
+              <a:t>‹Nº›</a:t>
             </a:fld>
             <a:endParaRPr lang="en-US"/>
           </a:p>
@@ -1777,7 +1786,7 @@
           <a:p>
             <a:fld id="{5BCAD085-E8A6-8845-BD4E-CB4CCA059FC4}" type="datetimeFigureOut">
               <a:rPr lang="en-US" smtClean="0"/>
-              <a:t>1/19/2026</a:t>
+              <a:t>1/20/2026</a:t>
             </a:fld>
             <a:endParaRPr lang="en-US"/>
           </a:p>
@@ -1819,7 +1828,7 @@
           <a:p>
             <a:fld id="{C1FF6DA9-008F-8B48-92A6-B652298478BF}" type="slidenum">
               <a:rPr lang="en-US" smtClean="0"/>
-              <a:t>‹Nr.›</a:t>
+              <a:t>‹Nº›</a:t>
             </a:fld>
             <a:endParaRPr lang="en-US"/>
           </a:p>
@@ -1894,7 +1903,7 @@
           <a:p>
             <a:fld id="{5BCAD085-E8A6-8845-BD4E-CB4CCA059FC4}" type="datetimeFigureOut">
               <a:rPr lang="en-US" smtClean="0"/>
-              <a:t>1/19/2026</a:t>
+              <a:t>1/20/2026</a:t>
             </a:fld>
             <a:endParaRPr lang="en-US"/>
           </a:p>
@@ -1936,7 +1945,7 @@
           <a:p>
             <a:fld id="{C1FF6DA9-008F-8B48-92A6-B652298478BF}" type="slidenum">
               <a:rPr lang="en-US" smtClean="0"/>
-              <a:t>‹Nr.›</a:t>
+              <a:t>‹Nº›</a:t>
             </a:fld>
             <a:endParaRPr lang="en-US"/>
           </a:p>
@@ -1989,7 +1998,7 @@
           <a:p>
             <a:fld id="{5BCAD085-E8A6-8845-BD4E-CB4CCA059FC4}" type="datetimeFigureOut">
               <a:rPr lang="en-US" smtClean="0"/>
-              <a:t>1/19/2026</a:t>
+              <a:t>1/20/2026</a:t>
             </a:fld>
             <a:endParaRPr lang="en-US"/>
           </a:p>
@@ -2031,7 +2040,7 @@
           <a:p>
             <a:fld id="{C1FF6DA9-008F-8B48-92A6-B652298478BF}" type="slidenum">
               <a:rPr lang="en-US" smtClean="0"/>
-              <a:t>‹Nr.›</a:t>
+              <a:t>‹Nº›</a:t>
             </a:fld>
             <a:endParaRPr lang="en-US"/>
           </a:p>
@@ -2264,7 +2273,7 @@
           <a:p>
             <a:fld id="{5BCAD085-E8A6-8845-BD4E-CB4CCA059FC4}" type="datetimeFigureOut">
               <a:rPr lang="en-US" smtClean="0"/>
-              <a:t>1/19/2026</a:t>
+              <a:t>1/20/2026</a:t>
             </a:fld>
             <a:endParaRPr lang="en-US"/>
           </a:p>
@@ -2306,7 +2315,7 @@
           <a:p>
             <a:fld id="{C1FF6DA9-008F-8B48-92A6-B652298478BF}" type="slidenum">
               <a:rPr lang="en-US" smtClean="0"/>
-              <a:t>‹Nr.›</a:t>
+              <a:t>‹Nº›</a:t>
             </a:fld>
             <a:endParaRPr lang="en-US"/>
           </a:p>
@@ -2516,7 +2525,7 @@
           <a:p>
             <a:fld id="{5BCAD085-E8A6-8845-BD4E-CB4CCA059FC4}" type="datetimeFigureOut">
               <a:rPr lang="en-US" smtClean="0"/>
-              <a:t>1/19/2026</a:t>
+              <a:t>1/20/2026</a:t>
             </a:fld>
             <a:endParaRPr lang="en-US"/>
           </a:p>
@@ -2558,7 +2567,7 @@
           <a:p>
             <a:fld id="{C1FF6DA9-008F-8B48-92A6-B652298478BF}" type="slidenum">
               <a:rPr lang="en-US" smtClean="0"/>
-              <a:t>‹Nr.›</a:t>
+              <a:t>‹Nº›</a:t>
             </a:fld>
             <a:endParaRPr lang="en-US"/>
           </a:p>
@@ -2727,7 +2736,7 @@
           <a:p>
             <a:fld id="{5BCAD085-E8A6-8845-BD4E-CB4CCA059FC4}" type="datetimeFigureOut">
               <a:rPr lang="en-US" smtClean="0"/>
-              <a:t>1/19/2026</a:t>
+              <a:t>1/20/2026</a:t>
             </a:fld>
             <a:endParaRPr lang="en-US"/>
           </a:p>
@@ -2805,7 +2814,7 @@
           <a:p>
             <a:fld id="{C1FF6DA9-008F-8B48-92A6-B652298478BF}" type="slidenum">
               <a:rPr lang="en-US" smtClean="0"/>
-              <a:t>‹Nr.›</a:t>
+              <a:t>‹Nº›</a:t>
             </a:fld>
             <a:endParaRPr lang="en-US"/>
           </a:p>
@@ -3309,21 +3318,33 @@
           <a:lstStyle/>
           <a:p>
             <a:r>
+              <a:rPr dirty="0"/>
               <a:t>is_fake1 is weak: single-token heuristic</a:t>
             </a:r>
           </a:p>
           <a:p>
             <a:r>
+              <a:rPr dirty="0"/>
               <a:t>is_fake2 is surprisingly strong, likely due to dataset bias</a:t>
             </a:r>
           </a:p>
           <a:p>
             <a:r>
-              <a:t>Linear/LogReg perform very well on TF-IDF features</a:t>
-            </a:r>
-          </a:p>
-          <a:p>
-            <a:r>
+              <a:rPr dirty="0"/>
+              <a:t>Linear/</a:t>
+            </a:r>
+            <a:r>
+              <a:rPr dirty="0" err="1"/>
+              <a:t>LogReg</a:t>
+            </a:r>
+            <a:r>
+              <a:rPr dirty="0"/>
+              <a:t> perform very well on TF-IDF features</a:t>
+            </a:r>
+          </a:p>
+          <a:p>
+            <a:r>
+              <a:rPr dirty="0"/>
               <a:t>High scores suggest strong stylistic or source signals</a:t>
             </a:r>
           </a:p>
@@ -3473,21 +3494,25 @@
           <a:lstStyle/>
           <a:p>
             <a:r>
+              <a:rPr dirty="0"/>
               <a:t>Dataset-specific signals dominate</a:t>
             </a:r>
           </a:p>
           <a:p>
             <a:r>
+              <a:rPr dirty="0"/>
               <a:t>Publisher/subject bias in labels</a:t>
             </a:r>
           </a:p>
           <a:p>
             <a:r>
+              <a:rPr dirty="0"/>
               <a:t>Stylistic cues (wording, formatting) captured by TF-IDF</a:t>
             </a:r>
           </a:p>
           <a:p>
             <a:r>
+              <a:rPr dirty="0"/>
               <a:t>Potential source leakage (e.g., consistent tokens)</a:t>
             </a:r>
           </a:p>
@@ -3502,7 +3527,7 @@
 </file>
 
 <file path=ppt/slides/slide13.xml><?xml version="1.0" encoding="utf-8"?>
-<p:sld xmlns:a="http://schemas.openxmlformats.org/drawingml/2006/main" xmlns:r="http://schemas.openxmlformats.org/officeDocument/2006/relationships" xmlns:p="http://schemas.openxmlformats.org/presentationml/2006/main" show="0">
+<p:sld xmlns:a="http://schemas.openxmlformats.org/drawingml/2006/main" xmlns:r="http://schemas.openxmlformats.org/officeDocument/2006/relationships" xmlns:p="http://schemas.openxmlformats.org/presentationml/2006/main">
   <p:cSld>
     <p:spTree>
       <p:nvGrpSpPr>
@@ -3520,7 +3545,13 @@
       </p:grpSpPr>
       <p:sp>
         <p:nvSpPr>
-          <p:cNvPr id="2" name="Title 1"/>
+          <p:cNvPr id="11" name="Título 1">
+            <a:extLst>
+              <a:ext uri="{FF2B5EF4-FFF2-40B4-BE49-F238E27FC236}">
+                <a16:creationId xmlns:a16="http://schemas.microsoft.com/office/drawing/2014/main" id="{77794A8F-03FD-204A-C33E-8A30CE0851B7}"/>
+              </a:ext>
+            </a:extLst>
+          </p:cNvPr>
           <p:cNvSpPr>
             <a:spLocks noGrp="1"/>
           </p:cNvSpPr>
@@ -3528,20 +3559,33 @@
             <p:ph type="title"/>
           </p:nvPr>
         </p:nvSpPr>
-        <p:spPr/>
+        <p:spPr>
+          <a:xfrm>
+            <a:off x="248264" y="308845"/>
+            <a:ext cx="8482781" cy="1325563"/>
+          </a:xfrm>
+        </p:spPr>
         <p:txBody>
           <a:bodyPr/>
           <a:lstStyle/>
           <a:p>
             <a:r>
-              <a:t>Takeaways</a:t>
-            </a:r>
-          </a:p>
-        </p:txBody>
-      </p:sp>
-      <p:sp>
-        <p:nvSpPr>
-          <p:cNvPr id="3" name="Content Placeholder 2"/>
+              <a:rPr lang="en-US" dirty="0"/>
+              <a:t>SVM</a:t>
+            </a:r>
+            <a:endParaRPr lang="en-GB" dirty="0"/>
+          </a:p>
+        </p:txBody>
+      </p:sp>
+      <p:sp>
+        <p:nvSpPr>
+          <p:cNvPr id="12" name="Marcador de contenido 2">
+            <a:extLst>
+              <a:ext uri="{FF2B5EF4-FFF2-40B4-BE49-F238E27FC236}">
+                <a16:creationId xmlns:a16="http://schemas.microsoft.com/office/drawing/2014/main" id="{435AB252-DA08-AE00-3859-3D8BCC81DB12}"/>
+              </a:ext>
+            </a:extLst>
+          </p:cNvPr>
           <p:cNvSpPr>
             <a:spLocks noGrp="1"/>
           </p:cNvSpPr>
@@ -3549,33 +3593,3420 @@
             <p:ph idx="1"/>
           </p:nvPr>
         </p:nvSpPr>
-        <p:spPr/>
+        <p:spPr>
+          <a:xfrm>
+            <a:off x="248264" y="1690687"/>
+            <a:ext cx="8482781" cy="4690447"/>
+          </a:xfrm>
+        </p:spPr>
+        <p:txBody>
+          <a:bodyPr>
+            <a:normAutofit fontScale="25000" lnSpcReduction="20000"/>
+          </a:bodyPr>
+          <a:lstStyle/>
+          <a:p>
+            <a:pPr marL="0" indent="0">
+              <a:buNone/>
+            </a:pPr>
+            <a:r>
+              <a:rPr lang="en-US" sz="9600" b="1" dirty="0"/>
+              <a:t>Preprocessing:</a:t>
+            </a:r>
+          </a:p>
+          <a:p>
+            <a:r>
+              <a:rPr lang="en-US" sz="9600" dirty="0"/>
+              <a:t>Title, text and subject are considered (subject with one hot encoding)</a:t>
+            </a:r>
+          </a:p>
+          <a:p>
+            <a:r>
+              <a:rPr lang="en-US" sz="9600" dirty="0"/>
+              <a:t>Tokenization with normalization and noise reduction (lowercase, removing </a:t>
+            </a:r>
+            <a:r>
+              <a:rPr lang="en-US" sz="9600" dirty="0" err="1"/>
+              <a:t>stopwords</a:t>
+            </a:r>
+            <a:r>
+              <a:rPr lang="en-US" sz="9600" dirty="0"/>
+              <a:t> and stemming)</a:t>
+            </a:r>
+          </a:p>
+          <a:p>
+            <a:r>
+              <a:rPr lang="en-US" sz="9600" dirty="0"/>
+              <a:t>Fusion of both features into one vector</a:t>
+            </a:r>
+          </a:p>
+          <a:p>
+            <a:endParaRPr lang="en-US" sz="9600" dirty="0"/>
+          </a:p>
+          <a:p>
+            <a:pPr marL="0" indent="0">
+              <a:buNone/>
+            </a:pPr>
+            <a:r>
+              <a:rPr lang="en-US" sz="9600" b="1" dirty="0"/>
+              <a:t>Training:</a:t>
+            </a:r>
+          </a:p>
+          <a:p>
+            <a:r>
+              <a:rPr lang="en-US" sz="9600" dirty="0"/>
+              <a:t>Define reproducible parameters (seed, CV-folds)</a:t>
+            </a:r>
+          </a:p>
+          <a:p>
+            <a:r>
+              <a:rPr lang="en-US" sz="9600" dirty="0"/>
+              <a:t>Train basic SVM</a:t>
+            </a:r>
+          </a:p>
+          <a:p>
+            <a:r>
+              <a:rPr lang="en-US" sz="9600" dirty="0"/>
+              <a:t>Hyperparameter tuning with </a:t>
+            </a:r>
+            <a:r>
+              <a:rPr lang="en-GB" sz="9600" dirty="0" err="1"/>
+              <a:t>RandomizedSearchCV</a:t>
+            </a:r>
+            <a:r>
+              <a:rPr lang="en-GB" sz="9600" dirty="0"/>
+              <a:t> (based on accuracy)</a:t>
+            </a:r>
+          </a:p>
+          <a:p>
+            <a:r>
+              <a:rPr lang="en-GB" sz="9600" dirty="0"/>
+              <a:t>Train final SVM with the best hyperparameters</a:t>
+            </a:r>
+            <a:endParaRPr lang="en-US" sz="9600" dirty="0"/>
+          </a:p>
+          <a:p>
+            <a:endParaRPr lang="en-GB" dirty="0"/>
+          </a:p>
+        </p:txBody>
+      </p:sp>
+    </p:spTree>
+    <p:extLst>
+      <p:ext uri="{BB962C8B-B14F-4D97-AF65-F5344CB8AC3E}">
+        <p14:creationId xmlns:p14="http://schemas.microsoft.com/office/powerpoint/2010/main" val="3408538982"/>
+      </p:ext>
+    </p:extLst>
+  </p:cSld>
+  <p:clrMapOvr>
+    <a:masterClrMapping/>
+  </p:clrMapOvr>
+</p:sld>
+</file>
+
+<file path=ppt/slides/slide14.xml><?xml version="1.0" encoding="utf-8"?>
+<p:sld xmlns:a="http://schemas.openxmlformats.org/drawingml/2006/main" xmlns:r="http://schemas.openxmlformats.org/officeDocument/2006/relationships" xmlns:p="http://schemas.openxmlformats.org/presentationml/2006/main">
+  <p:cSld>
+    <p:spTree>
+      <p:nvGrpSpPr>
+        <p:cNvPr id="1" name=""/>
+        <p:cNvGrpSpPr/>
+        <p:nvPr/>
+      </p:nvGrpSpPr>
+      <p:grpSpPr>
+        <a:xfrm>
+          <a:off x="0" y="0"/>
+          <a:ext cx="0" cy="0"/>
+          <a:chOff x="0" y="0"/>
+          <a:chExt cx="0" cy="0"/>
+        </a:xfrm>
+      </p:grpSpPr>
+      <p:sp>
+        <p:nvSpPr>
+          <p:cNvPr id="4" name="Título 1">
+            <a:extLst>
+              <a:ext uri="{FF2B5EF4-FFF2-40B4-BE49-F238E27FC236}">
+                <a16:creationId xmlns:a16="http://schemas.microsoft.com/office/drawing/2014/main" id="{FC38FD76-F829-0B10-C859-05076E3749CB}"/>
+              </a:ext>
+            </a:extLst>
+          </p:cNvPr>
+          <p:cNvSpPr>
+            <a:spLocks noGrp="1"/>
+          </p:cNvSpPr>
+          <p:nvPr>
+            <p:ph type="title"/>
+          </p:nvPr>
+        </p:nvSpPr>
+        <p:spPr>
+          <a:xfrm>
+            <a:off x="110612" y="355293"/>
+            <a:ext cx="8590936" cy="1325563"/>
+          </a:xfrm>
+        </p:spPr>
         <p:txBody>
           <a:bodyPr/>
           <a:lstStyle/>
           <a:p>
             <a:r>
-              <a:t>Classic models achieve strong performance</a:t>
-            </a:r>
-          </a:p>
-          <a:p>
-            <a:r>
-              <a:t>Performance is likely inflated by dataset bias</a:t>
-            </a:r>
-          </a:p>
-          <a:p>
-            <a:r>
-              <a:t>Subject leakage is extreme and must be handled</a:t>
-            </a:r>
-          </a:p>
-          <a:p>
-            <a:r>
-              <a:t>Future work: debiasing, cross-source validation</a:t>
+              <a:rPr lang="en-US" dirty="0"/>
+              <a:t>SVM results</a:t>
+            </a:r>
+            <a:endParaRPr lang="en-GB" dirty="0"/>
+          </a:p>
+        </p:txBody>
+      </p:sp>
+      <p:sp>
+        <p:nvSpPr>
+          <p:cNvPr id="5" name="CuadroTexto 4">
+            <a:extLst>
+              <a:ext uri="{FF2B5EF4-FFF2-40B4-BE49-F238E27FC236}">
+                <a16:creationId xmlns:a16="http://schemas.microsoft.com/office/drawing/2014/main" id="{63294DAD-3CE3-8879-538B-A254E8F59F83}"/>
+              </a:ext>
+            </a:extLst>
+          </p:cNvPr>
+          <p:cNvSpPr txBox="1"/>
+          <p:nvPr/>
+        </p:nvSpPr>
+        <p:spPr>
+          <a:xfrm>
+            <a:off x="953728" y="1589585"/>
+            <a:ext cx="1927123" cy="523220"/>
+          </a:xfrm>
+          <a:prstGeom prst="rect">
+            <a:avLst/>
+          </a:prstGeom>
+          <a:noFill/>
+        </p:spPr>
+        <p:txBody>
+          <a:bodyPr wrap="square" rtlCol="0">
+            <a:spAutoFit/>
+          </a:bodyPr>
+          <a:lstStyle/>
+          <a:p>
+            <a:r>
+              <a:rPr lang="en-US" sz="2800" dirty="0"/>
+              <a:t>Basic SVM</a:t>
+            </a:r>
+            <a:endParaRPr lang="en-GB" sz="2800" dirty="0"/>
+          </a:p>
+        </p:txBody>
+      </p:sp>
+      <p:sp>
+        <p:nvSpPr>
+          <p:cNvPr id="6" name="CuadroTexto 5">
+            <a:extLst>
+              <a:ext uri="{FF2B5EF4-FFF2-40B4-BE49-F238E27FC236}">
+                <a16:creationId xmlns:a16="http://schemas.microsoft.com/office/drawing/2014/main" id="{C640E110-128F-5B68-0C52-AFDDE47AD90B}"/>
+              </a:ext>
+            </a:extLst>
+          </p:cNvPr>
+          <p:cNvSpPr txBox="1"/>
+          <p:nvPr/>
+        </p:nvSpPr>
+        <p:spPr>
+          <a:xfrm>
+            <a:off x="4080389" y="1587461"/>
+            <a:ext cx="2861185" cy="523220"/>
+          </a:xfrm>
+          <a:prstGeom prst="rect">
+            <a:avLst/>
+          </a:prstGeom>
+          <a:noFill/>
+        </p:spPr>
+        <p:txBody>
+          <a:bodyPr wrap="square" rtlCol="0">
+            <a:spAutoFit/>
+          </a:bodyPr>
+          <a:lstStyle/>
+          <a:p>
+            <a:r>
+              <a:rPr lang="en-US" sz="2800" dirty="0"/>
+              <a:t>SVM with tuning</a:t>
+            </a:r>
+            <a:endParaRPr lang="en-GB" sz="2800" dirty="0"/>
+          </a:p>
+        </p:txBody>
+      </p:sp>
+      <p:sp>
+        <p:nvSpPr>
+          <p:cNvPr id="7" name="CuadroTexto 6">
+            <a:extLst>
+              <a:ext uri="{FF2B5EF4-FFF2-40B4-BE49-F238E27FC236}">
+                <a16:creationId xmlns:a16="http://schemas.microsoft.com/office/drawing/2014/main" id="{87C4A5A3-469C-C861-CDAD-F07C29CBE2FA}"/>
+              </a:ext>
+            </a:extLst>
+          </p:cNvPr>
+          <p:cNvSpPr txBox="1"/>
+          <p:nvPr/>
+        </p:nvSpPr>
+        <p:spPr>
+          <a:xfrm>
+            <a:off x="953728" y="2272993"/>
+            <a:ext cx="2861187" cy="830997"/>
+          </a:xfrm>
+          <a:prstGeom prst="rect">
+            <a:avLst/>
+          </a:prstGeom>
+          <a:noFill/>
+        </p:spPr>
+        <p:txBody>
+          <a:bodyPr wrap="square">
+            <a:spAutoFit/>
+          </a:bodyPr>
+          <a:lstStyle/>
+          <a:p>
+            <a:r>
+              <a:rPr lang="en-GB" sz="2400" dirty="0"/>
+              <a:t>Accuracy: 0.9977 </a:t>
+            </a:r>
+          </a:p>
+          <a:p>
+            <a:r>
+              <a:rPr lang="en-GB" sz="2400" dirty="0"/>
+              <a:t>MCC: 0.9953</a:t>
+            </a:r>
+          </a:p>
+        </p:txBody>
+      </p:sp>
+      <p:graphicFrame>
+        <p:nvGraphicFramePr>
+          <p:cNvPr id="8" name="Tabla 7">
+            <a:extLst>
+              <a:ext uri="{FF2B5EF4-FFF2-40B4-BE49-F238E27FC236}">
+                <a16:creationId xmlns:a16="http://schemas.microsoft.com/office/drawing/2014/main" id="{D6142A35-657D-C758-CB68-06E3C5F243E5}"/>
+              </a:ext>
+            </a:extLst>
+          </p:cNvPr>
+          <p:cNvGraphicFramePr>
+            <a:graphicFrameLocks noGrp="1"/>
+          </p:cNvGraphicFramePr>
+          <p:nvPr>
+            <p:extLst>
+              <p:ext uri="{D42A27DB-BD31-4B8C-83A1-F6EECF244321}">
+                <p14:modId xmlns:p14="http://schemas.microsoft.com/office/powerpoint/2010/main" val="2473977974"/>
+              </p:ext>
+            </p:extLst>
+          </p:nvPr>
+        </p:nvGraphicFramePr>
+        <p:xfrm>
+          <a:off x="1505563" y="3747207"/>
+          <a:ext cx="5641260" cy="2468880"/>
+        </p:xfrm>
+        <a:graphic>
+          <a:graphicData uri="http://schemas.openxmlformats.org/drawingml/2006/table">
+            <a:tbl>
+              <a:tblPr/>
+              <a:tblGrid>
+                <a:gridCol w="1256072">
+                  <a:extLst>
+                    <a:ext uri="{9D8B030D-6E8A-4147-A177-3AD203B41FA5}">
+                      <a16:colId xmlns:a16="http://schemas.microsoft.com/office/drawing/2014/main" val="2529616538"/>
+                    </a:ext>
+                  </a:extLst>
+                </a:gridCol>
+                <a:gridCol w="1101213">
+                  <a:extLst>
+                    <a:ext uri="{9D8B030D-6E8A-4147-A177-3AD203B41FA5}">
+                      <a16:colId xmlns:a16="http://schemas.microsoft.com/office/drawing/2014/main" val="300941870"/>
+                    </a:ext>
+                  </a:extLst>
+                </a:gridCol>
+                <a:gridCol w="1027471">
+                  <a:extLst>
+                    <a:ext uri="{9D8B030D-6E8A-4147-A177-3AD203B41FA5}">
+                      <a16:colId xmlns:a16="http://schemas.microsoft.com/office/drawing/2014/main" val="1070201705"/>
+                    </a:ext>
+                  </a:extLst>
+                </a:gridCol>
+                <a:gridCol w="1128252">
+                  <a:extLst>
+                    <a:ext uri="{9D8B030D-6E8A-4147-A177-3AD203B41FA5}">
+                      <a16:colId xmlns:a16="http://schemas.microsoft.com/office/drawing/2014/main" val="417569215"/>
+                    </a:ext>
+                  </a:extLst>
+                </a:gridCol>
+                <a:gridCol w="1128252">
+                  <a:extLst>
+                    <a:ext uri="{9D8B030D-6E8A-4147-A177-3AD203B41FA5}">
+                      <a16:colId xmlns:a16="http://schemas.microsoft.com/office/drawing/2014/main" val="2682234863"/>
+                    </a:ext>
+                  </a:extLst>
+                </a:gridCol>
+              </a:tblGrid>
+              <a:tr h="334707">
+                <a:tc>
+                  <a:txBody>
+                    <a:bodyPr/>
+                    <a:lstStyle/>
+                    <a:p>
+                      <a:pPr>
+                        <a:buNone/>
+                      </a:pPr>
+                      <a:r>
+                        <a:rPr lang="en-GB" dirty="0"/>
+                        <a:t>Class</a:t>
+                      </a:r>
+                    </a:p>
+                  </a:txBody>
+                  <a:tcPr anchor="ctr">
+                    <a:lnL w="12700" cap="flat" cmpd="sng" algn="ctr">
+                      <a:solidFill>
+                        <a:schemeClr val="tx1"/>
+                      </a:solidFill>
+                      <a:prstDash val="solid"/>
+                      <a:round/>
+                      <a:headEnd type="none" w="med" len="med"/>
+                      <a:tailEnd type="none" w="med" len="med"/>
+                    </a:lnL>
+                    <a:lnR w="12700" cap="flat" cmpd="sng" algn="ctr">
+                      <a:solidFill>
+                        <a:schemeClr val="tx1"/>
+                      </a:solidFill>
+                      <a:prstDash val="solid"/>
+                      <a:round/>
+                      <a:headEnd type="none" w="med" len="med"/>
+                      <a:tailEnd type="none" w="med" len="med"/>
+                    </a:lnR>
+                    <a:lnT w="12700" cap="flat" cmpd="sng" algn="ctr">
+                      <a:solidFill>
+                        <a:schemeClr val="tx1"/>
+                      </a:solidFill>
+                      <a:prstDash val="solid"/>
+                      <a:round/>
+                      <a:headEnd type="none" w="med" len="med"/>
+                      <a:tailEnd type="none" w="med" len="med"/>
+                    </a:lnT>
+                    <a:lnB w="12700" cap="flat" cmpd="sng" algn="ctr">
+                      <a:solidFill>
+                        <a:schemeClr val="tx1"/>
+                      </a:solidFill>
+                      <a:prstDash val="solid"/>
+                      <a:round/>
+                      <a:headEnd type="none" w="med" len="med"/>
+                      <a:tailEnd type="none" w="med" len="med"/>
+                    </a:lnB>
+                    <a:noFill/>
+                  </a:tcPr>
+                </a:tc>
+                <a:tc>
+                  <a:txBody>
+                    <a:bodyPr/>
+                    <a:lstStyle/>
+                    <a:p>
+                      <a:pPr>
+                        <a:buNone/>
+                      </a:pPr>
+                      <a:r>
+                        <a:rPr lang="en-GB" dirty="0"/>
+                        <a:t>Precision</a:t>
+                      </a:r>
+                    </a:p>
+                  </a:txBody>
+                  <a:tcPr anchor="ctr">
+                    <a:lnL w="12700" cap="flat" cmpd="sng" algn="ctr">
+                      <a:solidFill>
+                        <a:schemeClr val="tx1"/>
+                      </a:solidFill>
+                      <a:prstDash val="solid"/>
+                      <a:round/>
+                      <a:headEnd type="none" w="med" len="med"/>
+                      <a:tailEnd type="none" w="med" len="med"/>
+                    </a:lnL>
+                    <a:lnR w="12700" cap="flat" cmpd="sng" algn="ctr">
+                      <a:solidFill>
+                        <a:schemeClr val="tx1"/>
+                      </a:solidFill>
+                      <a:prstDash val="solid"/>
+                      <a:round/>
+                      <a:headEnd type="none" w="med" len="med"/>
+                      <a:tailEnd type="none" w="med" len="med"/>
+                    </a:lnR>
+                    <a:lnT w="12700" cap="flat" cmpd="sng" algn="ctr">
+                      <a:solidFill>
+                        <a:schemeClr val="tx1"/>
+                      </a:solidFill>
+                      <a:prstDash val="solid"/>
+                      <a:round/>
+                      <a:headEnd type="none" w="med" len="med"/>
+                      <a:tailEnd type="none" w="med" len="med"/>
+                    </a:lnT>
+                    <a:lnB w="12700" cap="flat" cmpd="sng" algn="ctr">
+                      <a:solidFill>
+                        <a:schemeClr val="tx1"/>
+                      </a:solidFill>
+                      <a:prstDash val="solid"/>
+                      <a:round/>
+                      <a:headEnd type="none" w="med" len="med"/>
+                      <a:tailEnd type="none" w="med" len="med"/>
+                    </a:lnB>
+                    <a:noFill/>
+                  </a:tcPr>
+                </a:tc>
+                <a:tc>
+                  <a:txBody>
+                    <a:bodyPr/>
+                    <a:lstStyle/>
+                    <a:p>
+                      <a:pPr>
+                        <a:buNone/>
+                      </a:pPr>
+                      <a:r>
+                        <a:rPr lang="en-GB"/>
+                        <a:t>Recall</a:t>
+                      </a:r>
+                    </a:p>
+                  </a:txBody>
+                  <a:tcPr anchor="ctr">
+                    <a:lnL w="12700" cap="flat" cmpd="sng" algn="ctr">
+                      <a:solidFill>
+                        <a:schemeClr val="tx1"/>
+                      </a:solidFill>
+                      <a:prstDash val="solid"/>
+                      <a:round/>
+                      <a:headEnd type="none" w="med" len="med"/>
+                      <a:tailEnd type="none" w="med" len="med"/>
+                    </a:lnL>
+                    <a:lnR w="12700" cap="flat" cmpd="sng" algn="ctr">
+                      <a:solidFill>
+                        <a:schemeClr val="tx1"/>
+                      </a:solidFill>
+                      <a:prstDash val="solid"/>
+                      <a:round/>
+                      <a:headEnd type="none" w="med" len="med"/>
+                      <a:tailEnd type="none" w="med" len="med"/>
+                    </a:lnR>
+                    <a:lnT w="12700" cap="flat" cmpd="sng" algn="ctr">
+                      <a:solidFill>
+                        <a:schemeClr val="tx1"/>
+                      </a:solidFill>
+                      <a:prstDash val="solid"/>
+                      <a:round/>
+                      <a:headEnd type="none" w="med" len="med"/>
+                      <a:tailEnd type="none" w="med" len="med"/>
+                    </a:lnT>
+                    <a:lnB w="12700" cap="flat" cmpd="sng" algn="ctr">
+                      <a:solidFill>
+                        <a:schemeClr val="tx1"/>
+                      </a:solidFill>
+                      <a:prstDash val="solid"/>
+                      <a:round/>
+                      <a:headEnd type="none" w="med" len="med"/>
+                      <a:tailEnd type="none" w="med" len="med"/>
+                    </a:lnB>
+                    <a:noFill/>
+                  </a:tcPr>
+                </a:tc>
+                <a:tc>
+                  <a:txBody>
+                    <a:bodyPr/>
+                    <a:lstStyle/>
+                    <a:p>
+                      <a:pPr>
+                        <a:buNone/>
+                      </a:pPr>
+                      <a:r>
+                        <a:rPr lang="en-GB" dirty="0"/>
+                        <a:t>F1-score</a:t>
+                      </a:r>
+                    </a:p>
+                  </a:txBody>
+                  <a:tcPr anchor="ctr">
+                    <a:lnL w="12700" cap="flat" cmpd="sng" algn="ctr">
+                      <a:solidFill>
+                        <a:schemeClr val="tx1"/>
+                      </a:solidFill>
+                      <a:prstDash val="solid"/>
+                      <a:round/>
+                      <a:headEnd type="none" w="med" len="med"/>
+                      <a:tailEnd type="none" w="med" len="med"/>
+                    </a:lnL>
+                    <a:lnR w="12700" cap="flat" cmpd="sng" algn="ctr">
+                      <a:solidFill>
+                        <a:schemeClr val="tx1"/>
+                      </a:solidFill>
+                      <a:prstDash val="solid"/>
+                      <a:round/>
+                      <a:headEnd type="none" w="med" len="med"/>
+                      <a:tailEnd type="none" w="med" len="med"/>
+                    </a:lnR>
+                    <a:lnT w="12700" cap="flat" cmpd="sng" algn="ctr">
+                      <a:solidFill>
+                        <a:schemeClr val="tx1"/>
+                      </a:solidFill>
+                      <a:prstDash val="solid"/>
+                      <a:round/>
+                      <a:headEnd type="none" w="med" len="med"/>
+                      <a:tailEnd type="none" w="med" len="med"/>
+                    </a:lnT>
+                    <a:lnB w="12700" cap="flat" cmpd="sng" algn="ctr">
+                      <a:solidFill>
+                        <a:schemeClr val="tx1"/>
+                      </a:solidFill>
+                      <a:prstDash val="solid"/>
+                      <a:round/>
+                      <a:headEnd type="none" w="med" len="med"/>
+                      <a:tailEnd type="none" w="med" len="med"/>
+                    </a:lnB>
+                    <a:noFill/>
+                  </a:tcPr>
+                </a:tc>
+                <a:tc>
+                  <a:txBody>
+                    <a:bodyPr/>
+                    <a:lstStyle/>
+                    <a:p>
+                      <a:pPr>
+                        <a:buNone/>
+                      </a:pPr>
+                      <a:r>
+                        <a:rPr lang="en-GB"/>
+                        <a:t>Support</a:t>
+                      </a:r>
+                    </a:p>
+                  </a:txBody>
+                  <a:tcPr anchor="ctr">
+                    <a:lnL w="12700" cap="flat" cmpd="sng" algn="ctr">
+                      <a:solidFill>
+                        <a:schemeClr val="tx1"/>
+                      </a:solidFill>
+                      <a:prstDash val="solid"/>
+                      <a:round/>
+                      <a:headEnd type="none" w="med" len="med"/>
+                      <a:tailEnd type="none" w="med" len="med"/>
+                    </a:lnL>
+                    <a:lnR w="12700" cap="flat" cmpd="sng" algn="ctr">
+                      <a:solidFill>
+                        <a:schemeClr val="tx1"/>
+                      </a:solidFill>
+                      <a:prstDash val="solid"/>
+                      <a:round/>
+                      <a:headEnd type="none" w="med" len="med"/>
+                      <a:tailEnd type="none" w="med" len="med"/>
+                    </a:lnR>
+                    <a:lnT w="12700" cap="flat" cmpd="sng" algn="ctr">
+                      <a:solidFill>
+                        <a:schemeClr val="tx1"/>
+                      </a:solidFill>
+                      <a:prstDash val="solid"/>
+                      <a:round/>
+                      <a:headEnd type="none" w="med" len="med"/>
+                      <a:tailEnd type="none" w="med" len="med"/>
+                    </a:lnT>
+                    <a:lnB w="12700" cap="flat" cmpd="sng" algn="ctr">
+                      <a:solidFill>
+                        <a:schemeClr val="tx1"/>
+                      </a:solidFill>
+                      <a:prstDash val="solid"/>
+                      <a:round/>
+                      <a:headEnd type="none" w="med" len="med"/>
+                      <a:tailEnd type="none" w="med" len="med"/>
+                    </a:lnB>
+                    <a:noFill/>
+                  </a:tcPr>
+                </a:tc>
+                <a:extLst>
+                  <a:ext uri="{0D108BD9-81ED-4DB2-BD59-A6C34878D82A}">
+                    <a16:rowId xmlns:a16="http://schemas.microsoft.com/office/drawing/2014/main" val="618331434"/>
+                  </a:ext>
+                </a:extLst>
+              </a:tr>
+              <a:tr h="334707">
+                <a:tc>
+                  <a:txBody>
+                    <a:bodyPr/>
+                    <a:lstStyle/>
+                    <a:p>
+                      <a:pPr>
+                        <a:buNone/>
+                      </a:pPr>
+                      <a:r>
+                        <a:rPr lang="en-GB" dirty="0"/>
+                        <a:t>Real</a:t>
+                      </a:r>
+                    </a:p>
+                  </a:txBody>
+                  <a:tcPr anchor="ctr">
+                    <a:lnL w="12700" cap="flat" cmpd="sng" algn="ctr">
+                      <a:solidFill>
+                        <a:schemeClr val="tx1"/>
+                      </a:solidFill>
+                      <a:prstDash val="solid"/>
+                      <a:round/>
+                      <a:headEnd type="none" w="med" len="med"/>
+                      <a:tailEnd type="none" w="med" len="med"/>
+                    </a:lnL>
+                    <a:lnR w="12700" cap="flat" cmpd="sng" algn="ctr">
+                      <a:solidFill>
+                        <a:schemeClr val="tx1"/>
+                      </a:solidFill>
+                      <a:prstDash val="solid"/>
+                      <a:round/>
+                      <a:headEnd type="none" w="med" len="med"/>
+                      <a:tailEnd type="none" w="med" len="med"/>
+                    </a:lnR>
+                    <a:lnT w="12700" cap="flat" cmpd="sng" algn="ctr">
+                      <a:solidFill>
+                        <a:schemeClr val="tx1"/>
+                      </a:solidFill>
+                      <a:prstDash val="solid"/>
+                      <a:round/>
+                      <a:headEnd type="none" w="med" len="med"/>
+                      <a:tailEnd type="none" w="med" len="med"/>
+                    </a:lnT>
+                    <a:lnB w="12700" cap="flat" cmpd="sng" algn="ctr">
+                      <a:solidFill>
+                        <a:schemeClr val="tx1"/>
+                      </a:solidFill>
+                      <a:prstDash val="solid"/>
+                      <a:round/>
+                      <a:headEnd type="none" w="med" len="med"/>
+                      <a:tailEnd type="none" w="med" len="med"/>
+                    </a:lnB>
+                    <a:noFill/>
+                  </a:tcPr>
+                </a:tc>
+                <a:tc>
+                  <a:txBody>
+                    <a:bodyPr/>
+                    <a:lstStyle/>
+                    <a:p>
+                      <a:pPr>
+                        <a:buNone/>
+                      </a:pPr>
+                      <a:r>
+                        <a:rPr lang="en-GB"/>
+                        <a:t>1.00</a:t>
+                      </a:r>
+                    </a:p>
+                  </a:txBody>
+                  <a:tcPr anchor="ctr">
+                    <a:lnL w="12700" cap="flat" cmpd="sng" algn="ctr">
+                      <a:solidFill>
+                        <a:schemeClr val="tx1"/>
+                      </a:solidFill>
+                      <a:prstDash val="solid"/>
+                      <a:round/>
+                      <a:headEnd type="none" w="med" len="med"/>
+                      <a:tailEnd type="none" w="med" len="med"/>
+                    </a:lnL>
+                    <a:lnR w="12700" cap="flat" cmpd="sng" algn="ctr">
+                      <a:solidFill>
+                        <a:schemeClr val="tx1"/>
+                      </a:solidFill>
+                      <a:prstDash val="solid"/>
+                      <a:round/>
+                      <a:headEnd type="none" w="med" len="med"/>
+                      <a:tailEnd type="none" w="med" len="med"/>
+                    </a:lnR>
+                    <a:lnT w="12700" cap="flat" cmpd="sng" algn="ctr">
+                      <a:solidFill>
+                        <a:schemeClr val="tx1"/>
+                      </a:solidFill>
+                      <a:prstDash val="solid"/>
+                      <a:round/>
+                      <a:headEnd type="none" w="med" len="med"/>
+                      <a:tailEnd type="none" w="med" len="med"/>
+                    </a:lnT>
+                    <a:lnB w="12700" cap="flat" cmpd="sng" algn="ctr">
+                      <a:solidFill>
+                        <a:schemeClr val="tx1"/>
+                      </a:solidFill>
+                      <a:prstDash val="solid"/>
+                      <a:round/>
+                      <a:headEnd type="none" w="med" len="med"/>
+                      <a:tailEnd type="none" w="med" len="med"/>
+                    </a:lnB>
+                    <a:noFill/>
+                  </a:tcPr>
+                </a:tc>
+                <a:tc>
+                  <a:txBody>
+                    <a:bodyPr/>
+                    <a:lstStyle/>
+                    <a:p>
+                      <a:pPr>
+                        <a:buNone/>
+                      </a:pPr>
+                      <a:r>
+                        <a:rPr lang="en-GB" dirty="0"/>
+                        <a:t>1.00</a:t>
+                      </a:r>
+                    </a:p>
+                  </a:txBody>
+                  <a:tcPr anchor="ctr">
+                    <a:lnL w="12700" cap="flat" cmpd="sng" algn="ctr">
+                      <a:solidFill>
+                        <a:schemeClr val="tx1"/>
+                      </a:solidFill>
+                      <a:prstDash val="solid"/>
+                      <a:round/>
+                      <a:headEnd type="none" w="med" len="med"/>
+                      <a:tailEnd type="none" w="med" len="med"/>
+                    </a:lnL>
+                    <a:lnR w="12700" cap="flat" cmpd="sng" algn="ctr">
+                      <a:solidFill>
+                        <a:schemeClr val="tx1"/>
+                      </a:solidFill>
+                      <a:prstDash val="solid"/>
+                      <a:round/>
+                      <a:headEnd type="none" w="med" len="med"/>
+                      <a:tailEnd type="none" w="med" len="med"/>
+                    </a:lnR>
+                    <a:lnT w="12700" cap="flat" cmpd="sng" algn="ctr">
+                      <a:solidFill>
+                        <a:schemeClr val="tx1"/>
+                      </a:solidFill>
+                      <a:prstDash val="solid"/>
+                      <a:round/>
+                      <a:headEnd type="none" w="med" len="med"/>
+                      <a:tailEnd type="none" w="med" len="med"/>
+                    </a:lnT>
+                    <a:lnB w="12700" cap="flat" cmpd="sng" algn="ctr">
+                      <a:solidFill>
+                        <a:schemeClr val="tx1"/>
+                      </a:solidFill>
+                      <a:prstDash val="solid"/>
+                      <a:round/>
+                      <a:headEnd type="none" w="med" len="med"/>
+                      <a:tailEnd type="none" w="med" len="med"/>
+                    </a:lnB>
+                    <a:noFill/>
+                  </a:tcPr>
+                </a:tc>
+                <a:tc>
+                  <a:txBody>
+                    <a:bodyPr/>
+                    <a:lstStyle/>
+                    <a:p>
+                      <a:pPr>
+                        <a:buNone/>
+                      </a:pPr>
+                      <a:r>
+                        <a:rPr lang="en-GB"/>
+                        <a:t>1.00</a:t>
+                      </a:r>
+                    </a:p>
+                  </a:txBody>
+                  <a:tcPr anchor="ctr">
+                    <a:lnL w="12700" cap="flat" cmpd="sng" algn="ctr">
+                      <a:solidFill>
+                        <a:schemeClr val="tx1"/>
+                      </a:solidFill>
+                      <a:prstDash val="solid"/>
+                      <a:round/>
+                      <a:headEnd type="none" w="med" len="med"/>
+                      <a:tailEnd type="none" w="med" len="med"/>
+                    </a:lnL>
+                    <a:lnR w="12700" cap="flat" cmpd="sng" algn="ctr">
+                      <a:solidFill>
+                        <a:schemeClr val="tx1"/>
+                      </a:solidFill>
+                      <a:prstDash val="solid"/>
+                      <a:round/>
+                      <a:headEnd type="none" w="med" len="med"/>
+                      <a:tailEnd type="none" w="med" len="med"/>
+                    </a:lnR>
+                    <a:lnT w="12700" cap="flat" cmpd="sng" algn="ctr">
+                      <a:solidFill>
+                        <a:schemeClr val="tx1"/>
+                      </a:solidFill>
+                      <a:prstDash val="solid"/>
+                      <a:round/>
+                      <a:headEnd type="none" w="med" len="med"/>
+                      <a:tailEnd type="none" w="med" len="med"/>
+                    </a:lnT>
+                    <a:lnB w="12700" cap="flat" cmpd="sng" algn="ctr">
+                      <a:solidFill>
+                        <a:schemeClr val="tx1"/>
+                      </a:solidFill>
+                      <a:prstDash val="solid"/>
+                      <a:round/>
+                      <a:headEnd type="none" w="med" len="med"/>
+                      <a:tailEnd type="none" w="med" len="med"/>
+                    </a:lnB>
+                    <a:noFill/>
+                  </a:tcPr>
+                </a:tc>
+                <a:tc>
+                  <a:txBody>
+                    <a:bodyPr/>
+                    <a:lstStyle/>
+                    <a:p>
+                      <a:pPr>
+                        <a:buNone/>
+                      </a:pPr>
+                      <a:r>
+                        <a:rPr lang="en-GB"/>
+                        <a:t>4284</a:t>
+                      </a:r>
+                    </a:p>
+                  </a:txBody>
+                  <a:tcPr anchor="ctr">
+                    <a:lnL w="12700" cap="flat" cmpd="sng" algn="ctr">
+                      <a:solidFill>
+                        <a:schemeClr val="tx1"/>
+                      </a:solidFill>
+                      <a:prstDash val="solid"/>
+                      <a:round/>
+                      <a:headEnd type="none" w="med" len="med"/>
+                      <a:tailEnd type="none" w="med" len="med"/>
+                    </a:lnL>
+                    <a:lnR w="12700" cap="flat" cmpd="sng" algn="ctr">
+                      <a:solidFill>
+                        <a:schemeClr val="tx1"/>
+                      </a:solidFill>
+                      <a:prstDash val="solid"/>
+                      <a:round/>
+                      <a:headEnd type="none" w="med" len="med"/>
+                      <a:tailEnd type="none" w="med" len="med"/>
+                    </a:lnR>
+                    <a:lnT w="12700" cap="flat" cmpd="sng" algn="ctr">
+                      <a:solidFill>
+                        <a:schemeClr val="tx1"/>
+                      </a:solidFill>
+                      <a:prstDash val="solid"/>
+                      <a:round/>
+                      <a:headEnd type="none" w="med" len="med"/>
+                      <a:tailEnd type="none" w="med" len="med"/>
+                    </a:lnT>
+                    <a:lnB w="12700" cap="flat" cmpd="sng" algn="ctr">
+                      <a:solidFill>
+                        <a:schemeClr val="tx1"/>
+                      </a:solidFill>
+                      <a:prstDash val="solid"/>
+                      <a:round/>
+                      <a:headEnd type="none" w="med" len="med"/>
+                      <a:tailEnd type="none" w="med" len="med"/>
+                    </a:lnB>
+                    <a:noFill/>
+                  </a:tcPr>
+                </a:tc>
+                <a:extLst>
+                  <a:ext uri="{0D108BD9-81ED-4DB2-BD59-A6C34878D82A}">
+                    <a16:rowId xmlns:a16="http://schemas.microsoft.com/office/drawing/2014/main" val="1867091066"/>
+                  </a:ext>
+                </a:extLst>
+              </a:tr>
+              <a:tr h="334707">
+                <a:tc>
+                  <a:txBody>
+                    <a:bodyPr/>
+                    <a:lstStyle/>
+                    <a:p>
+                      <a:pPr>
+                        <a:buNone/>
+                      </a:pPr>
+                      <a:r>
+                        <a:rPr lang="en-GB"/>
+                        <a:t>Fake</a:t>
+                      </a:r>
+                    </a:p>
+                  </a:txBody>
+                  <a:tcPr anchor="ctr">
+                    <a:lnL w="12700" cap="flat" cmpd="sng" algn="ctr">
+                      <a:solidFill>
+                        <a:schemeClr val="tx1"/>
+                      </a:solidFill>
+                      <a:prstDash val="solid"/>
+                      <a:round/>
+                      <a:headEnd type="none" w="med" len="med"/>
+                      <a:tailEnd type="none" w="med" len="med"/>
+                    </a:lnL>
+                    <a:lnR w="12700" cap="flat" cmpd="sng" algn="ctr">
+                      <a:solidFill>
+                        <a:schemeClr val="tx1"/>
+                      </a:solidFill>
+                      <a:prstDash val="solid"/>
+                      <a:round/>
+                      <a:headEnd type="none" w="med" len="med"/>
+                      <a:tailEnd type="none" w="med" len="med"/>
+                    </a:lnR>
+                    <a:lnT w="12700" cap="flat" cmpd="sng" algn="ctr">
+                      <a:solidFill>
+                        <a:schemeClr val="tx1"/>
+                      </a:solidFill>
+                      <a:prstDash val="solid"/>
+                      <a:round/>
+                      <a:headEnd type="none" w="med" len="med"/>
+                      <a:tailEnd type="none" w="med" len="med"/>
+                    </a:lnT>
+                    <a:lnB w="12700" cap="flat" cmpd="sng" algn="ctr">
+                      <a:solidFill>
+                        <a:schemeClr val="tx1"/>
+                      </a:solidFill>
+                      <a:prstDash val="solid"/>
+                      <a:round/>
+                      <a:headEnd type="none" w="med" len="med"/>
+                      <a:tailEnd type="none" w="med" len="med"/>
+                    </a:lnB>
+                    <a:noFill/>
+                  </a:tcPr>
+                </a:tc>
+                <a:tc>
+                  <a:txBody>
+                    <a:bodyPr/>
+                    <a:lstStyle/>
+                    <a:p>
+                      <a:pPr>
+                        <a:buNone/>
+                      </a:pPr>
+                      <a:r>
+                        <a:rPr lang="en-GB" dirty="0"/>
+                        <a:t>1.00</a:t>
+                      </a:r>
+                    </a:p>
+                  </a:txBody>
+                  <a:tcPr anchor="ctr">
+                    <a:lnL w="12700" cap="flat" cmpd="sng" algn="ctr">
+                      <a:solidFill>
+                        <a:schemeClr val="tx1"/>
+                      </a:solidFill>
+                      <a:prstDash val="solid"/>
+                      <a:round/>
+                      <a:headEnd type="none" w="med" len="med"/>
+                      <a:tailEnd type="none" w="med" len="med"/>
+                    </a:lnL>
+                    <a:lnR w="12700" cap="flat" cmpd="sng" algn="ctr">
+                      <a:solidFill>
+                        <a:schemeClr val="tx1"/>
+                      </a:solidFill>
+                      <a:prstDash val="solid"/>
+                      <a:round/>
+                      <a:headEnd type="none" w="med" len="med"/>
+                      <a:tailEnd type="none" w="med" len="med"/>
+                    </a:lnR>
+                    <a:lnT w="12700" cap="flat" cmpd="sng" algn="ctr">
+                      <a:solidFill>
+                        <a:schemeClr val="tx1"/>
+                      </a:solidFill>
+                      <a:prstDash val="solid"/>
+                      <a:round/>
+                      <a:headEnd type="none" w="med" len="med"/>
+                      <a:tailEnd type="none" w="med" len="med"/>
+                    </a:lnT>
+                    <a:lnB w="12700" cap="flat" cmpd="sng" algn="ctr">
+                      <a:solidFill>
+                        <a:schemeClr val="tx1"/>
+                      </a:solidFill>
+                      <a:prstDash val="solid"/>
+                      <a:round/>
+                      <a:headEnd type="none" w="med" len="med"/>
+                      <a:tailEnd type="none" w="med" len="med"/>
+                    </a:lnB>
+                    <a:noFill/>
+                  </a:tcPr>
+                </a:tc>
+                <a:tc>
+                  <a:txBody>
+                    <a:bodyPr/>
+                    <a:lstStyle/>
+                    <a:p>
+                      <a:pPr>
+                        <a:buNone/>
+                      </a:pPr>
+                      <a:r>
+                        <a:rPr lang="en-GB"/>
+                        <a:t>1.00</a:t>
+                      </a:r>
+                    </a:p>
+                  </a:txBody>
+                  <a:tcPr anchor="ctr">
+                    <a:lnL w="12700" cap="flat" cmpd="sng" algn="ctr">
+                      <a:solidFill>
+                        <a:schemeClr val="tx1"/>
+                      </a:solidFill>
+                      <a:prstDash val="solid"/>
+                      <a:round/>
+                      <a:headEnd type="none" w="med" len="med"/>
+                      <a:tailEnd type="none" w="med" len="med"/>
+                    </a:lnL>
+                    <a:lnR w="12700" cap="flat" cmpd="sng" algn="ctr">
+                      <a:solidFill>
+                        <a:schemeClr val="tx1"/>
+                      </a:solidFill>
+                      <a:prstDash val="solid"/>
+                      <a:round/>
+                      <a:headEnd type="none" w="med" len="med"/>
+                      <a:tailEnd type="none" w="med" len="med"/>
+                    </a:lnR>
+                    <a:lnT w="12700" cap="flat" cmpd="sng" algn="ctr">
+                      <a:solidFill>
+                        <a:schemeClr val="tx1"/>
+                      </a:solidFill>
+                      <a:prstDash val="solid"/>
+                      <a:round/>
+                      <a:headEnd type="none" w="med" len="med"/>
+                      <a:tailEnd type="none" w="med" len="med"/>
+                    </a:lnT>
+                    <a:lnB w="12700" cap="flat" cmpd="sng" algn="ctr">
+                      <a:solidFill>
+                        <a:schemeClr val="tx1"/>
+                      </a:solidFill>
+                      <a:prstDash val="solid"/>
+                      <a:round/>
+                      <a:headEnd type="none" w="med" len="med"/>
+                      <a:tailEnd type="none" w="med" len="med"/>
+                    </a:lnB>
+                    <a:noFill/>
+                  </a:tcPr>
+                </a:tc>
+                <a:tc>
+                  <a:txBody>
+                    <a:bodyPr/>
+                    <a:lstStyle/>
+                    <a:p>
+                      <a:pPr>
+                        <a:buNone/>
+                      </a:pPr>
+                      <a:r>
+                        <a:rPr lang="en-GB"/>
+                        <a:t>1.00</a:t>
+                      </a:r>
+                    </a:p>
+                  </a:txBody>
+                  <a:tcPr anchor="ctr">
+                    <a:lnL w="12700" cap="flat" cmpd="sng" algn="ctr">
+                      <a:solidFill>
+                        <a:schemeClr val="tx1"/>
+                      </a:solidFill>
+                      <a:prstDash val="solid"/>
+                      <a:round/>
+                      <a:headEnd type="none" w="med" len="med"/>
+                      <a:tailEnd type="none" w="med" len="med"/>
+                    </a:lnL>
+                    <a:lnR w="12700" cap="flat" cmpd="sng" algn="ctr">
+                      <a:solidFill>
+                        <a:schemeClr val="tx1"/>
+                      </a:solidFill>
+                      <a:prstDash val="solid"/>
+                      <a:round/>
+                      <a:headEnd type="none" w="med" len="med"/>
+                      <a:tailEnd type="none" w="med" len="med"/>
+                    </a:lnR>
+                    <a:lnT w="12700" cap="flat" cmpd="sng" algn="ctr">
+                      <a:solidFill>
+                        <a:schemeClr val="tx1"/>
+                      </a:solidFill>
+                      <a:prstDash val="solid"/>
+                      <a:round/>
+                      <a:headEnd type="none" w="med" len="med"/>
+                      <a:tailEnd type="none" w="med" len="med"/>
+                    </a:lnT>
+                    <a:lnB w="12700" cap="flat" cmpd="sng" algn="ctr">
+                      <a:solidFill>
+                        <a:schemeClr val="tx1"/>
+                      </a:solidFill>
+                      <a:prstDash val="solid"/>
+                      <a:round/>
+                      <a:headEnd type="none" w="med" len="med"/>
+                      <a:tailEnd type="none" w="med" len="med"/>
+                    </a:lnB>
+                    <a:noFill/>
+                  </a:tcPr>
+                </a:tc>
+                <a:tc>
+                  <a:txBody>
+                    <a:bodyPr/>
+                    <a:lstStyle/>
+                    <a:p>
+                      <a:pPr>
+                        <a:buNone/>
+                      </a:pPr>
+                      <a:r>
+                        <a:rPr lang="en-GB"/>
+                        <a:t>4696</a:t>
+                      </a:r>
+                    </a:p>
+                  </a:txBody>
+                  <a:tcPr anchor="ctr">
+                    <a:lnL w="12700" cap="flat" cmpd="sng" algn="ctr">
+                      <a:solidFill>
+                        <a:schemeClr val="tx1"/>
+                      </a:solidFill>
+                      <a:prstDash val="solid"/>
+                      <a:round/>
+                      <a:headEnd type="none" w="med" len="med"/>
+                      <a:tailEnd type="none" w="med" len="med"/>
+                    </a:lnL>
+                    <a:lnR w="12700" cap="flat" cmpd="sng" algn="ctr">
+                      <a:solidFill>
+                        <a:schemeClr val="tx1"/>
+                      </a:solidFill>
+                      <a:prstDash val="solid"/>
+                      <a:round/>
+                      <a:headEnd type="none" w="med" len="med"/>
+                      <a:tailEnd type="none" w="med" len="med"/>
+                    </a:lnR>
+                    <a:lnT w="12700" cap="flat" cmpd="sng" algn="ctr">
+                      <a:solidFill>
+                        <a:schemeClr val="tx1"/>
+                      </a:solidFill>
+                      <a:prstDash val="solid"/>
+                      <a:round/>
+                      <a:headEnd type="none" w="med" len="med"/>
+                      <a:tailEnd type="none" w="med" len="med"/>
+                    </a:lnT>
+                    <a:lnB w="12700" cap="flat" cmpd="sng" algn="ctr">
+                      <a:solidFill>
+                        <a:schemeClr val="tx1"/>
+                      </a:solidFill>
+                      <a:prstDash val="solid"/>
+                      <a:round/>
+                      <a:headEnd type="none" w="med" len="med"/>
+                      <a:tailEnd type="none" w="med" len="med"/>
+                    </a:lnB>
+                    <a:noFill/>
+                  </a:tcPr>
+                </a:tc>
+                <a:extLst>
+                  <a:ext uri="{0D108BD9-81ED-4DB2-BD59-A6C34878D82A}">
+                    <a16:rowId xmlns:a16="http://schemas.microsoft.com/office/drawing/2014/main" val="678278828"/>
+                  </a:ext>
+                </a:extLst>
+              </a:tr>
+              <a:tr h="334707">
+                <a:tc>
+                  <a:txBody>
+                    <a:bodyPr/>
+                    <a:lstStyle/>
+                    <a:p>
+                      <a:pPr>
+                        <a:buNone/>
+                      </a:pPr>
+                      <a:r>
+                        <a:rPr lang="en-GB" b="1"/>
+                        <a:t>Accuracy</a:t>
+                      </a:r>
+                      <a:endParaRPr lang="en-GB"/>
+                    </a:p>
+                  </a:txBody>
+                  <a:tcPr anchor="ctr">
+                    <a:lnL w="12700" cap="flat" cmpd="sng" algn="ctr">
+                      <a:solidFill>
+                        <a:schemeClr val="tx1"/>
+                      </a:solidFill>
+                      <a:prstDash val="solid"/>
+                      <a:round/>
+                      <a:headEnd type="none" w="med" len="med"/>
+                      <a:tailEnd type="none" w="med" len="med"/>
+                    </a:lnL>
+                    <a:lnR w="12700" cap="flat" cmpd="sng" algn="ctr">
+                      <a:solidFill>
+                        <a:schemeClr val="tx1"/>
+                      </a:solidFill>
+                      <a:prstDash val="solid"/>
+                      <a:round/>
+                      <a:headEnd type="none" w="med" len="med"/>
+                      <a:tailEnd type="none" w="med" len="med"/>
+                    </a:lnR>
+                    <a:lnT w="12700" cap="flat" cmpd="sng" algn="ctr">
+                      <a:solidFill>
+                        <a:schemeClr val="tx1"/>
+                      </a:solidFill>
+                      <a:prstDash val="solid"/>
+                      <a:round/>
+                      <a:headEnd type="none" w="med" len="med"/>
+                      <a:tailEnd type="none" w="med" len="med"/>
+                    </a:lnT>
+                    <a:lnB w="12700" cap="flat" cmpd="sng" algn="ctr">
+                      <a:solidFill>
+                        <a:schemeClr val="tx1"/>
+                      </a:solidFill>
+                      <a:prstDash val="solid"/>
+                      <a:round/>
+                      <a:headEnd type="none" w="med" len="med"/>
+                      <a:tailEnd type="none" w="med" len="med"/>
+                    </a:lnB>
+                    <a:noFill/>
+                  </a:tcPr>
+                </a:tc>
+                <a:tc>
+                  <a:txBody>
+                    <a:bodyPr/>
+                    <a:lstStyle/>
+                    <a:p>
+                      <a:pPr>
+                        <a:buNone/>
+                      </a:pPr>
+                      <a:r>
+                        <a:rPr lang="en-GB" dirty="0"/>
+                        <a:t>-</a:t>
+                      </a:r>
+                    </a:p>
+                  </a:txBody>
+                  <a:tcPr anchor="ctr">
+                    <a:lnL w="12700" cap="flat" cmpd="sng" algn="ctr">
+                      <a:solidFill>
+                        <a:schemeClr val="tx1"/>
+                      </a:solidFill>
+                      <a:prstDash val="solid"/>
+                      <a:round/>
+                      <a:headEnd type="none" w="med" len="med"/>
+                      <a:tailEnd type="none" w="med" len="med"/>
+                    </a:lnL>
+                    <a:lnR w="12700" cap="flat" cmpd="sng" algn="ctr">
+                      <a:solidFill>
+                        <a:schemeClr val="tx1"/>
+                      </a:solidFill>
+                      <a:prstDash val="solid"/>
+                      <a:round/>
+                      <a:headEnd type="none" w="med" len="med"/>
+                      <a:tailEnd type="none" w="med" len="med"/>
+                    </a:lnR>
+                    <a:lnT w="12700" cap="flat" cmpd="sng" algn="ctr">
+                      <a:solidFill>
+                        <a:schemeClr val="tx1"/>
+                      </a:solidFill>
+                      <a:prstDash val="solid"/>
+                      <a:round/>
+                      <a:headEnd type="none" w="med" len="med"/>
+                      <a:tailEnd type="none" w="med" len="med"/>
+                    </a:lnT>
+                    <a:lnB w="12700" cap="flat" cmpd="sng" algn="ctr">
+                      <a:solidFill>
+                        <a:schemeClr val="tx1"/>
+                      </a:solidFill>
+                      <a:prstDash val="solid"/>
+                      <a:round/>
+                      <a:headEnd type="none" w="med" len="med"/>
+                      <a:tailEnd type="none" w="med" len="med"/>
+                    </a:lnB>
+                    <a:noFill/>
+                  </a:tcPr>
+                </a:tc>
+                <a:tc>
+                  <a:txBody>
+                    <a:bodyPr/>
+                    <a:lstStyle/>
+                    <a:p>
+                      <a:pPr>
+                        <a:buNone/>
+                      </a:pPr>
+                      <a:r>
+                        <a:rPr lang="en-GB" dirty="0"/>
+                        <a:t>-</a:t>
+                      </a:r>
+                    </a:p>
+                  </a:txBody>
+                  <a:tcPr anchor="ctr">
+                    <a:lnL w="12700" cap="flat" cmpd="sng" algn="ctr">
+                      <a:solidFill>
+                        <a:schemeClr val="tx1"/>
+                      </a:solidFill>
+                      <a:prstDash val="solid"/>
+                      <a:round/>
+                      <a:headEnd type="none" w="med" len="med"/>
+                      <a:tailEnd type="none" w="med" len="med"/>
+                    </a:lnL>
+                    <a:lnR w="12700" cap="flat" cmpd="sng" algn="ctr">
+                      <a:solidFill>
+                        <a:schemeClr val="tx1"/>
+                      </a:solidFill>
+                      <a:prstDash val="solid"/>
+                      <a:round/>
+                      <a:headEnd type="none" w="med" len="med"/>
+                      <a:tailEnd type="none" w="med" len="med"/>
+                    </a:lnR>
+                    <a:lnT w="12700" cap="flat" cmpd="sng" algn="ctr">
+                      <a:solidFill>
+                        <a:schemeClr val="tx1"/>
+                      </a:solidFill>
+                      <a:prstDash val="solid"/>
+                      <a:round/>
+                      <a:headEnd type="none" w="med" len="med"/>
+                      <a:tailEnd type="none" w="med" len="med"/>
+                    </a:lnT>
+                    <a:lnB w="12700" cap="flat" cmpd="sng" algn="ctr">
+                      <a:solidFill>
+                        <a:schemeClr val="tx1"/>
+                      </a:solidFill>
+                      <a:prstDash val="solid"/>
+                      <a:round/>
+                      <a:headEnd type="none" w="med" len="med"/>
+                      <a:tailEnd type="none" w="med" len="med"/>
+                    </a:lnB>
+                    <a:noFill/>
+                  </a:tcPr>
+                </a:tc>
+                <a:tc>
+                  <a:txBody>
+                    <a:bodyPr/>
+                    <a:lstStyle/>
+                    <a:p>
+                      <a:pPr>
+                        <a:buNone/>
+                      </a:pPr>
+                      <a:r>
+                        <a:rPr lang="en-GB" dirty="0"/>
+                        <a:t>1.00</a:t>
+                      </a:r>
+                    </a:p>
+                  </a:txBody>
+                  <a:tcPr anchor="ctr">
+                    <a:lnL w="12700" cap="flat" cmpd="sng" algn="ctr">
+                      <a:solidFill>
+                        <a:schemeClr val="tx1"/>
+                      </a:solidFill>
+                      <a:prstDash val="solid"/>
+                      <a:round/>
+                      <a:headEnd type="none" w="med" len="med"/>
+                      <a:tailEnd type="none" w="med" len="med"/>
+                    </a:lnL>
+                    <a:lnR w="12700" cap="flat" cmpd="sng" algn="ctr">
+                      <a:solidFill>
+                        <a:schemeClr val="tx1"/>
+                      </a:solidFill>
+                      <a:prstDash val="solid"/>
+                      <a:round/>
+                      <a:headEnd type="none" w="med" len="med"/>
+                      <a:tailEnd type="none" w="med" len="med"/>
+                    </a:lnR>
+                    <a:lnT w="12700" cap="flat" cmpd="sng" algn="ctr">
+                      <a:solidFill>
+                        <a:schemeClr val="tx1"/>
+                      </a:solidFill>
+                      <a:prstDash val="solid"/>
+                      <a:round/>
+                      <a:headEnd type="none" w="med" len="med"/>
+                      <a:tailEnd type="none" w="med" len="med"/>
+                    </a:lnT>
+                    <a:lnB w="12700" cap="flat" cmpd="sng" algn="ctr">
+                      <a:solidFill>
+                        <a:schemeClr val="tx1"/>
+                      </a:solidFill>
+                      <a:prstDash val="solid"/>
+                      <a:round/>
+                      <a:headEnd type="none" w="med" len="med"/>
+                      <a:tailEnd type="none" w="med" len="med"/>
+                    </a:lnB>
+                    <a:noFill/>
+                  </a:tcPr>
+                </a:tc>
+                <a:tc>
+                  <a:txBody>
+                    <a:bodyPr/>
+                    <a:lstStyle/>
+                    <a:p>
+                      <a:pPr>
+                        <a:buNone/>
+                      </a:pPr>
+                      <a:r>
+                        <a:rPr lang="en-GB" dirty="0"/>
+                        <a:t>8980</a:t>
+                      </a:r>
+                    </a:p>
+                  </a:txBody>
+                  <a:tcPr anchor="ctr">
+                    <a:lnL w="12700" cap="flat" cmpd="sng" algn="ctr">
+                      <a:solidFill>
+                        <a:schemeClr val="tx1"/>
+                      </a:solidFill>
+                      <a:prstDash val="solid"/>
+                      <a:round/>
+                      <a:headEnd type="none" w="med" len="med"/>
+                      <a:tailEnd type="none" w="med" len="med"/>
+                    </a:lnL>
+                    <a:lnR w="12700" cap="flat" cmpd="sng" algn="ctr">
+                      <a:solidFill>
+                        <a:schemeClr val="tx1"/>
+                      </a:solidFill>
+                      <a:prstDash val="solid"/>
+                      <a:round/>
+                      <a:headEnd type="none" w="med" len="med"/>
+                      <a:tailEnd type="none" w="med" len="med"/>
+                    </a:lnR>
+                    <a:lnT w="12700" cap="flat" cmpd="sng" algn="ctr">
+                      <a:solidFill>
+                        <a:schemeClr val="tx1"/>
+                      </a:solidFill>
+                      <a:prstDash val="solid"/>
+                      <a:round/>
+                      <a:headEnd type="none" w="med" len="med"/>
+                      <a:tailEnd type="none" w="med" len="med"/>
+                    </a:lnT>
+                    <a:lnB w="12700" cap="flat" cmpd="sng" algn="ctr">
+                      <a:solidFill>
+                        <a:schemeClr val="tx1"/>
+                      </a:solidFill>
+                      <a:prstDash val="solid"/>
+                      <a:round/>
+                      <a:headEnd type="none" w="med" len="med"/>
+                      <a:tailEnd type="none" w="med" len="med"/>
+                    </a:lnB>
+                    <a:noFill/>
+                  </a:tcPr>
+                </a:tc>
+                <a:extLst>
+                  <a:ext uri="{0D108BD9-81ED-4DB2-BD59-A6C34878D82A}">
+                    <a16:rowId xmlns:a16="http://schemas.microsoft.com/office/drawing/2014/main" val="3442233651"/>
+                  </a:ext>
+                </a:extLst>
+              </a:tr>
+              <a:tr h="334707">
+                <a:tc>
+                  <a:txBody>
+                    <a:bodyPr/>
+                    <a:lstStyle/>
+                    <a:p>
+                      <a:pPr>
+                        <a:buNone/>
+                      </a:pPr>
+                      <a:r>
+                        <a:rPr lang="en-GB" b="1"/>
+                        <a:t>Macro Avg</a:t>
+                      </a:r>
+                      <a:endParaRPr lang="en-GB"/>
+                    </a:p>
+                  </a:txBody>
+                  <a:tcPr anchor="ctr">
+                    <a:lnL w="12700" cap="flat" cmpd="sng" algn="ctr">
+                      <a:solidFill>
+                        <a:schemeClr val="tx1"/>
+                      </a:solidFill>
+                      <a:prstDash val="solid"/>
+                      <a:round/>
+                      <a:headEnd type="none" w="med" len="med"/>
+                      <a:tailEnd type="none" w="med" len="med"/>
+                    </a:lnL>
+                    <a:lnR w="12700" cap="flat" cmpd="sng" algn="ctr">
+                      <a:solidFill>
+                        <a:schemeClr val="tx1"/>
+                      </a:solidFill>
+                      <a:prstDash val="solid"/>
+                      <a:round/>
+                      <a:headEnd type="none" w="med" len="med"/>
+                      <a:tailEnd type="none" w="med" len="med"/>
+                    </a:lnR>
+                    <a:lnT w="12700" cap="flat" cmpd="sng" algn="ctr">
+                      <a:solidFill>
+                        <a:schemeClr val="tx1"/>
+                      </a:solidFill>
+                      <a:prstDash val="solid"/>
+                      <a:round/>
+                      <a:headEnd type="none" w="med" len="med"/>
+                      <a:tailEnd type="none" w="med" len="med"/>
+                    </a:lnT>
+                    <a:lnB w="12700" cap="flat" cmpd="sng" algn="ctr">
+                      <a:solidFill>
+                        <a:schemeClr val="tx1"/>
+                      </a:solidFill>
+                      <a:prstDash val="solid"/>
+                      <a:round/>
+                      <a:headEnd type="none" w="med" len="med"/>
+                      <a:tailEnd type="none" w="med" len="med"/>
+                    </a:lnB>
+                    <a:noFill/>
+                  </a:tcPr>
+                </a:tc>
+                <a:tc>
+                  <a:txBody>
+                    <a:bodyPr/>
+                    <a:lstStyle/>
+                    <a:p>
+                      <a:pPr>
+                        <a:buNone/>
+                      </a:pPr>
+                      <a:r>
+                        <a:rPr lang="en-GB"/>
+                        <a:t>1.00</a:t>
+                      </a:r>
+                    </a:p>
+                  </a:txBody>
+                  <a:tcPr anchor="ctr">
+                    <a:lnL w="12700" cap="flat" cmpd="sng" algn="ctr">
+                      <a:solidFill>
+                        <a:schemeClr val="tx1"/>
+                      </a:solidFill>
+                      <a:prstDash val="solid"/>
+                      <a:round/>
+                      <a:headEnd type="none" w="med" len="med"/>
+                      <a:tailEnd type="none" w="med" len="med"/>
+                    </a:lnL>
+                    <a:lnR w="12700" cap="flat" cmpd="sng" algn="ctr">
+                      <a:solidFill>
+                        <a:schemeClr val="tx1"/>
+                      </a:solidFill>
+                      <a:prstDash val="solid"/>
+                      <a:round/>
+                      <a:headEnd type="none" w="med" len="med"/>
+                      <a:tailEnd type="none" w="med" len="med"/>
+                    </a:lnR>
+                    <a:lnT w="12700" cap="flat" cmpd="sng" algn="ctr">
+                      <a:solidFill>
+                        <a:schemeClr val="tx1"/>
+                      </a:solidFill>
+                      <a:prstDash val="solid"/>
+                      <a:round/>
+                      <a:headEnd type="none" w="med" len="med"/>
+                      <a:tailEnd type="none" w="med" len="med"/>
+                    </a:lnT>
+                    <a:lnB w="12700" cap="flat" cmpd="sng" algn="ctr">
+                      <a:solidFill>
+                        <a:schemeClr val="tx1"/>
+                      </a:solidFill>
+                      <a:prstDash val="solid"/>
+                      <a:round/>
+                      <a:headEnd type="none" w="med" len="med"/>
+                      <a:tailEnd type="none" w="med" len="med"/>
+                    </a:lnB>
+                    <a:noFill/>
+                  </a:tcPr>
+                </a:tc>
+                <a:tc>
+                  <a:txBody>
+                    <a:bodyPr/>
+                    <a:lstStyle/>
+                    <a:p>
+                      <a:pPr>
+                        <a:buNone/>
+                      </a:pPr>
+                      <a:r>
+                        <a:rPr lang="en-GB"/>
+                        <a:t>1.00</a:t>
+                      </a:r>
+                    </a:p>
+                  </a:txBody>
+                  <a:tcPr anchor="ctr">
+                    <a:lnL w="12700" cap="flat" cmpd="sng" algn="ctr">
+                      <a:solidFill>
+                        <a:schemeClr val="tx1"/>
+                      </a:solidFill>
+                      <a:prstDash val="solid"/>
+                      <a:round/>
+                      <a:headEnd type="none" w="med" len="med"/>
+                      <a:tailEnd type="none" w="med" len="med"/>
+                    </a:lnL>
+                    <a:lnR w="12700" cap="flat" cmpd="sng" algn="ctr">
+                      <a:solidFill>
+                        <a:schemeClr val="tx1"/>
+                      </a:solidFill>
+                      <a:prstDash val="solid"/>
+                      <a:round/>
+                      <a:headEnd type="none" w="med" len="med"/>
+                      <a:tailEnd type="none" w="med" len="med"/>
+                    </a:lnR>
+                    <a:lnT w="12700" cap="flat" cmpd="sng" algn="ctr">
+                      <a:solidFill>
+                        <a:schemeClr val="tx1"/>
+                      </a:solidFill>
+                      <a:prstDash val="solid"/>
+                      <a:round/>
+                      <a:headEnd type="none" w="med" len="med"/>
+                      <a:tailEnd type="none" w="med" len="med"/>
+                    </a:lnT>
+                    <a:lnB w="12700" cap="flat" cmpd="sng" algn="ctr">
+                      <a:solidFill>
+                        <a:schemeClr val="tx1"/>
+                      </a:solidFill>
+                      <a:prstDash val="solid"/>
+                      <a:round/>
+                      <a:headEnd type="none" w="med" len="med"/>
+                      <a:tailEnd type="none" w="med" len="med"/>
+                    </a:lnB>
+                    <a:noFill/>
+                  </a:tcPr>
+                </a:tc>
+                <a:tc>
+                  <a:txBody>
+                    <a:bodyPr/>
+                    <a:lstStyle/>
+                    <a:p>
+                      <a:pPr>
+                        <a:buNone/>
+                      </a:pPr>
+                      <a:r>
+                        <a:rPr lang="en-GB" dirty="0"/>
+                        <a:t>1.00</a:t>
+                      </a:r>
+                    </a:p>
+                  </a:txBody>
+                  <a:tcPr anchor="ctr">
+                    <a:lnL w="12700" cap="flat" cmpd="sng" algn="ctr">
+                      <a:solidFill>
+                        <a:schemeClr val="tx1"/>
+                      </a:solidFill>
+                      <a:prstDash val="solid"/>
+                      <a:round/>
+                      <a:headEnd type="none" w="med" len="med"/>
+                      <a:tailEnd type="none" w="med" len="med"/>
+                    </a:lnL>
+                    <a:lnR w="12700" cap="flat" cmpd="sng" algn="ctr">
+                      <a:solidFill>
+                        <a:schemeClr val="tx1"/>
+                      </a:solidFill>
+                      <a:prstDash val="solid"/>
+                      <a:round/>
+                      <a:headEnd type="none" w="med" len="med"/>
+                      <a:tailEnd type="none" w="med" len="med"/>
+                    </a:lnR>
+                    <a:lnT w="12700" cap="flat" cmpd="sng" algn="ctr">
+                      <a:solidFill>
+                        <a:schemeClr val="tx1"/>
+                      </a:solidFill>
+                      <a:prstDash val="solid"/>
+                      <a:round/>
+                      <a:headEnd type="none" w="med" len="med"/>
+                      <a:tailEnd type="none" w="med" len="med"/>
+                    </a:lnT>
+                    <a:lnB w="12700" cap="flat" cmpd="sng" algn="ctr">
+                      <a:solidFill>
+                        <a:schemeClr val="tx1"/>
+                      </a:solidFill>
+                      <a:prstDash val="solid"/>
+                      <a:round/>
+                      <a:headEnd type="none" w="med" len="med"/>
+                      <a:tailEnd type="none" w="med" len="med"/>
+                    </a:lnB>
+                    <a:noFill/>
+                  </a:tcPr>
+                </a:tc>
+                <a:tc>
+                  <a:txBody>
+                    <a:bodyPr/>
+                    <a:lstStyle/>
+                    <a:p>
+                      <a:pPr>
+                        <a:buNone/>
+                      </a:pPr>
+                      <a:r>
+                        <a:rPr lang="en-GB" dirty="0"/>
+                        <a:t>8980</a:t>
+                      </a:r>
+                    </a:p>
+                  </a:txBody>
+                  <a:tcPr anchor="ctr">
+                    <a:lnL w="12700" cap="flat" cmpd="sng" algn="ctr">
+                      <a:solidFill>
+                        <a:schemeClr val="tx1"/>
+                      </a:solidFill>
+                      <a:prstDash val="solid"/>
+                      <a:round/>
+                      <a:headEnd type="none" w="med" len="med"/>
+                      <a:tailEnd type="none" w="med" len="med"/>
+                    </a:lnL>
+                    <a:lnR w="12700" cap="flat" cmpd="sng" algn="ctr">
+                      <a:solidFill>
+                        <a:schemeClr val="tx1"/>
+                      </a:solidFill>
+                      <a:prstDash val="solid"/>
+                      <a:round/>
+                      <a:headEnd type="none" w="med" len="med"/>
+                      <a:tailEnd type="none" w="med" len="med"/>
+                    </a:lnR>
+                    <a:lnT w="12700" cap="flat" cmpd="sng" algn="ctr">
+                      <a:solidFill>
+                        <a:schemeClr val="tx1"/>
+                      </a:solidFill>
+                      <a:prstDash val="solid"/>
+                      <a:round/>
+                      <a:headEnd type="none" w="med" len="med"/>
+                      <a:tailEnd type="none" w="med" len="med"/>
+                    </a:lnT>
+                    <a:lnB w="12700" cap="flat" cmpd="sng" algn="ctr">
+                      <a:solidFill>
+                        <a:schemeClr val="tx1"/>
+                      </a:solidFill>
+                      <a:prstDash val="solid"/>
+                      <a:round/>
+                      <a:headEnd type="none" w="med" len="med"/>
+                      <a:tailEnd type="none" w="med" len="med"/>
+                    </a:lnB>
+                    <a:noFill/>
+                  </a:tcPr>
+                </a:tc>
+                <a:extLst>
+                  <a:ext uri="{0D108BD9-81ED-4DB2-BD59-A6C34878D82A}">
+                    <a16:rowId xmlns:a16="http://schemas.microsoft.com/office/drawing/2014/main" val="3625560076"/>
+                  </a:ext>
+                </a:extLst>
+              </a:tr>
+              <a:tr h="334707">
+                <a:tc>
+                  <a:txBody>
+                    <a:bodyPr/>
+                    <a:lstStyle/>
+                    <a:p>
+                      <a:pPr>
+                        <a:buNone/>
+                      </a:pPr>
+                      <a:r>
+                        <a:rPr lang="en-GB" b="1"/>
+                        <a:t>Weighted Avg</a:t>
+                      </a:r>
+                      <a:endParaRPr lang="en-GB"/>
+                    </a:p>
+                  </a:txBody>
+                  <a:tcPr anchor="ctr">
+                    <a:lnL w="12700" cap="flat" cmpd="sng" algn="ctr">
+                      <a:solidFill>
+                        <a:schemeClr val="tx1"/>
+                      </a:solidFill>
+                      <a:prstDash val="solid"/>
+                      <a:round/>
+                      <a:headEnd type="none" w="med" len="med"/>
+                      <a:tailEnd type="none" w="med" len="med"/>
+                    </a:lnL>
+                    <a:lnR w="12700" cap="flat" cmpd="sng" algn="ctr">
+                      <a:solidFill>
+                        <a:schemeClr val="tx1"/>
+                      </a:solidFill>
+                      <a:prstDash val="solid"/>
+                      <a:round/>
+                      <a:headEnd type="none" w="med" len="med"/>
+                      <a:tailEnd type="none" w="med" len="med"/>
+                    </a:lnR>
+                    <a:lnT w="12700" cap="flat" cmpd="sng" algn="ctr">
+                      <a:solidFill>
+                        <a:schemeClr val="tx1"/>
+                      </a:solidFill>
+                      <a:prstDash val="solid"/>
+                      <a:round/>
+                      <a:headEnd type="none" w="med" len="med"/>
+                      <a:tailEnd type="none" w="med" len="med"/>
+                    </a:lnT>
+                    <a:lnB w="12700" cap="flat" cmpd="sng" algn="ctr">
+                      <a:solidFill>
+                        <a:schemeClr val="tx1"/>
+                      </a:solidFill>
+                      <a:prstDash val="solid"/>
+                      <a:round/>
+                      <a:headEnd type="none" w="med" len="med"/>
+                      <a:tailEnd type="none" w="med" len="med"/>
+                    </a:lnB>
+                    <a:noFill/>
+                  </a:tcPr>
+                </a:tc>
+                <a:tc>
+                  <a:txBody>
+                    <a:bodyPr/>
+                    <a:lstStyle/>
+                    <a:p>
+                      <a:pPr>
+                        <a:buNone/>
+                      </a:pPr>
+                      <a:r>
+                        <a:rPr lang="en-GB"/>
+                        <a:t>1.00</a:t>
+                      </a:r>
+                    </a:p>
+                  </a:txBody>
+                  <a:tcPr anchor="ctr">
+                    <a:lnL w="12700" cap="flat" cmpd="sng" algn="ctr">
+                      <a:solidFill>
+                        <a:schemeClr val="tx1"/>
+                      </a:solidFill>
+                      <a:prstDash val="solid"/>
+                      <a:round/>
+                      <a:headEnd type="none" w="med" len="med"/>
+                      <a:tailEnd type="none" w="med" len="med"/>
+                    </a:lnL>
+                    <a:lnR w="12700" cap="flat" cmpd="sng" algn="ctr">
+                      <a:solidFill>
+                        <a:schemeClr val="tx1"/>
+                      </a:solidFill>
+                      <a:prstDash val="solid"/>
+                      <a:round/>
+                      <a:headEnd type="none" w="med" len="med"/>
+                      <a:tailEnd type="none" w="med" len="med"/>
+                    </a:lnR>
+                    <a:lnT w="12700" cap="flat" cmpd="sng" algn="ctr">
+                      <a:solidFill>
+                        <a:schemeClr val="tx1"/>
+                      </a:solidFill>
+                      <a:prstDash val="solid"/>
+                      <a:round/>
+                      <a:headEnd type="none" w="med" len="med"/>
+                      <a:tailEnd type="none" w="med" len="med"/>
+                    </a:lnT>
+                    <a:lnB w="12700" cap="flat" cmpd="sng" algn="ctr">
+                      <a:solidFill>
+                        <a:schemeClr val="tx1"/>
+                      </a:solidFill>
+                      <a:prstDash val="solid"/>
+                      <a:round/>
+                      <a:headEnd type="none" w="med" len="med"/>
+                      <a:tailEnd type="none" w="med" len="med"/>
+                    </a:lnB>
+                    <a:noFill/>
+                  </a:tcPr>
+                </a:tc>
+                <a:tc>
+                  <a:txBody>
+                    <a:bodyPr/>
+                    <a:lstStyle/>
+                    <a:p>
+                      <a:pPr>
+                        <a:buNone/>
+                      </a:pPr>
+                      <a:r>
+                        <a:rPr lang="en-GB"/>
+                        <a:t>1.00</a:t>
+                      </a:r>
+                    </a:p>
+                  </a:txBody>
+                  <a:tcPr anchor="ctr">
+                    <a:lnL w="12700" cap="flat" cmpd="sng" algn="ctr">
+                      <a:solidFill>
+                        <a:schemeClr val="tx1"/>
+                      </a:solidFill>
+                      <a:prstDash val="solid"/>
+                      <a:round/>
+                      <a:headEnd type="none" w="med" len="med"/>
+                      <a:tailEnd type="none" w="med" len="med"/>
+                    </a:lnL>
+                    <a:lnR w="12700" cap="flat" cmpd="sng" algn="ctr">
+                      <a:solidFill>
+                        <a:schemeClr val="tx1"/>
+                      </a:solidFill>
+                      <a:prstDash val="solid"/>
+                      <a:round/>
+                      <a:headEnd type="none" w="med" len="med"/>
+                      <a:tailEnd type="none" w="med" len="med"/>
+                    </a:lnR>
+                    <a:lnT w="12700" cap="flat" cmpd="sng" algn="ctr">
+                      <a:solidFill>
+                        <a:schemeClr val="tx1"/>
+                      </a:solidFill>
+                      <a:prstDash val="solid"/>
+                      <a:round/>
+                      <a:headEnd type="none" w="med" len="med"/>
+                      <a:tailEnd type="none" w="med" len="med"/>
+                    </a:lnT>
+                    <a:lnB w="12700" cap="flat" cmpd="sng" algn="ctr">
+                      <a:solidFill>
+                        <a:schemeClr val="tx1"/>
+                      </a:solidFill>
+                      <a:prstDash val="solid"/>
+                      <a:round/>
+                      <a:headEnd type="none" w="med" len="med"/>
+                      <a:tailEnd type="none" w="med" len="med"/>
+                    </a:lnB>
+                    <a:noFill/>
+                  </a:tcPr>
+                </a:tc>
+                <a:tc>
+                  <a:txBody>
+                    <a:bodyPr/>
+                    <a:lstStyle/>
+                    <a:p>
+                      <a:pPr>
+                        <a:buNone/>
+                      </a:pPr>
+                      <a:r>
+                        <a:rPr lang="en-GB" dirty="0"/>
+                        <a:t>1.00</a:t>
+                      </a:r>
+                    </a:p>
+                  </a:txBody>
+                  <a:tcPr anchor="ctr">
+                    <a:lnL w="12700" cap="flat" cmpd="sng" algn="ctr">
+                      <a:solidFill>
+                        <a:schemeClr val="tx1"/>
+                      </a:solidFill>
+                      <a:prstDash val="solid"/>
+                      <a:round/>
+                      <a:headEnd type="none" w="med" len="med"/>
+                      <a:tailEnd type="none" w="med" len="med"/>
+                    </a:lnL>
+                    <a:lnR w="12700" cap="flat" cmpd="sng" algn="ctr">
+                      <a:solidFill>
+                        <a:schemeClr val="tx1"/>
+                      </a:solidFill>
+                      <a:prstDash val="solid"/>
+                      <a:round/>
+                      <a:headEnd type="none" w="med" len="med"/>
+                      <a:tailEnd type="none" w="med" len="med"/>
+                    </a:lnR>
+                    <a:lnT w="12700" cap="flat" cmpd="sng" algn="ctr">
+                      <a:solidFill>
+                        <a:schemeClr val="tx1"/>
+                      </a:solidFill>
+                      <a:prstDash val="solid"/>
+                      <a:round/>
+                      <a:headEnd type="none" w="med" len="med"/>
+                      <a:tailEnd type="none" w="med" len="med"/>
+                    </a:lnT>
+                    <a:lnB w="12700" cap="flat" cmpd="sng" algn="ctr">
+                      <a:solidFill>
+                        <a:schemeClr val="tx1"/>
+                      </a:solidFill>
+                      <a:prstDash val="solid"/>
+                      <a:round/>
+                      <a:headEnd type="none" w="med" len="med"/>
+                      <a:tailEnd type="none" w="med" len="med"/>
+                    </a:lnB>
+                    <a:noFill/>
+                  </a:tcPr>
+                </a:tc>
+                <a:tc>
+                  <a:txBody>
+                    <a:bodyPr/>
+                    <a:lstStyle/>
+                    <a:p>
+                      <a:pPr>
+                        <a:buNone/>
+                      </a:pPr>
+                      <a:r>
+                        <a:rPr lang="en-GB" dirty="0"/>
+                        <a:t>8980</a:t>
+                      </a:r>
+                    </a:p>
+                  </a:txBody>
+                  <a:tcPr anchor="ctr">
+                    <a:lnL w="12700" cap="flat" cmpd="sng" algn="ctr">
+                      <a:solidFill>
+                        <a:schemeClr val="tx1"/>
+                      </a:solidFill>
+                      <a:prstDash val="solid"/>
+                      <a:round/>
+                      <a:headEnd type="none" w="med" len="med"/>
+                      <a:tailEnd type="none" w="med" len="med"/>
+                    </a:lnL>
+                    <a:lnR w="12700" cap="flat" cmpd="sng" algn="ctr">
+                      <a:solidFill>
+                        <a:schemeClr val="tx1"/>
+                      </a:solidFill>
+                      <a:prstDash val="solid"/>
+                      <a:round/>
+                      <a:headEnd type="none" w="med" len="med"/>
+                      <a:tailEnd type="none" w="med" len="med"/>
+                    </a:lnR>
+                    <a:lnT w="12700" cap="flat" cmpd="sng" algn="ctr">
+                      <a:solidFill>
+                        <a:schemeClr val="tx1"/>
+                      </a:solidFill>
+                      <a:prstDash val="solid"/>
+                      <a:round/>
+                      <a:headEnd type="none" w="med" len="med"/>
+                      <a:tailEnd type="none" w="med" len="med"/>
+                    </a:lnT>
+                    <a:lnB w="12700" cap="flat" cmpd="sng" algn="ctr">
+                      <a:solidFill>
+                        <a:schemeClr val="tx1"/>
+                      </a:solidFill>
+                      <a:prstDash val="solid"/>
+                      <a:round/>
+                      <a:headEnd type="none" w="med" len="med"/>
+                      <a:tailEnd type="none" w="med" len="med"/>
+                    </a:lnB>
+                    <a:noFill/>
+                  </a:tcPr>
+                </a:tc>
+                <a:extLst>
+                  <a:ext uri="{0D108BD9-81ED-4DB2-BD59-A6C34878D82A}">
+                    <a16:rowId xmlns:a16="http://schemas.microsoft.com/office/drawing/2014/main" val="4085293771"/>
+                  </a:ext>
+                </a:extLst>
+              </a:tr>
+            </a:tbl>
+          </a:graphicData>
+        </a:graphic>
+      </p:graphicFrame>
+      <p:sp>
+        <p:nvSpPr>
+          <p:cNvPr id="9" name="CuadroTexto 8">
+            <a:extLst>
+              <a:ext uri="{FF2B5EF4-FFF2-40B4-BE49-F238E27FC236}">
+                <a16:creationId xmlns:a16="http://schemas.microsoft.com/office/drawing/2014/main" id="{6820A762-A449-A673-EE00-36B54F6FBC27}"/>
+              </a:ext>
+            </a:extLst>
+          </p:cNvPr>
+          <p:cNvSpPr txBox="1"/>
+          <p:nvPr/>
+        </p:nvSpPr>
+        <p:spPr>
+          <a:xfrm>
+            <a:off x="4080389" y="2112805"/>
+            <a:ext cx="4375357" cy="1323439"/>
+          </a:xfrm>
+          <a:prstGeom prst="rect">
+            <a:avLst/>
+          </a:prstGeom>
+          <a:noFill/>
+        </p:spPr>
+        <p:txBody>
+          <a:bodyPr wrap="square">
+            <a:spAutoFit/>
+          </a:bodyPr>
+          <a:lstStyle/>
+          <a:p>
+            <a:r>
+              <a:rPr lang="en-GB" sz="2000" dirty="0"/>
+              <a:t>Best Hyperparameters: {'kernel': 'linear', 'C': 0.1}</a:t>
+            </a:r>
+          </a:p>
+          <a:p>
+            <a:r>
+              <a:rPr lang="en-GB" sz="2000" dirty="0"/>
+              <a:t>Accuracy: 0.9999</a:t>
+            </a:r>
+          </a:p>
+          <a:p>
+            <a:r>
+              <a:rPr lang="en-GB" sz="2000" dirty="0"/>
+              <a:t>MCC: 0.9998</a:t>
             </a:r>
           </a:p>
         </p:txBody>
       </p:sp>
     </p:spTree>
+    <p:extLst>
+      <p:ext uri="{BB962C8B-B14F-4D97-AF65-F5344CB8AC3E}">
+        <p14:creationId xmlns:p14="http://schemas.microsoft.com/office/powerpoint/2010/main" val="145002764"/>
+      </p:ext>
+    </p:extLst>
+  </p:cSld>
+  <p:clrMapOvr>
+    <a:masterClrMapping/>
+  </p:clrMapOvr>
+</p:sld>
+</file>
+
+<file path=ppt/slides/slide15.xml><?xml version="1.0" encoding="utf-8"?>
+<p:sld xmlns:a="http://schemas.openxmlformats.org/drawingml/2006/main" xmlns:r="http://schemas.openxmlformats.org/officeDocument/2006/relationships" xmlns:p="http://schemas.openxmlformats.org/presentationml/2006/main">
+  <p:cSld>
+    <p:spTree>
+      <p:nvGrpSpPr>
+        <p:cNvPr id="1" name="">
+          <a:extLst>
+            <a:ext uri="{FF2B5EF4-FFF2-40B4-BE49-F238E27FC236}">
+              <a16:creationId xmlns:a16="http://schemas.microsoft.com/office/drawing/2014/main" id="{2E376139-5304-6A67-722D-8576D9A1099D}"/>
+            </a:ext>
+          </a:extLst>
+        </p:cNvPr>
+        <p:cNvGrpSpPr/>
+        <p:nvPr/>
+      </p:nvGrpSpPr>
+      <p:grpSpPr>
+        <a:xfrm>
+          <a:off x="0" y="0"/>
+          <a:ext cx="0" cy="0"/>
+          <a:chOff x="0" y="0"/>
+          <a:chExt cx="0" cy="0"/>
+        </a:xfrm>
+      </p:grpSpPr>
+      <p:sp>
+        <p:nvSpPr>
+          <p:cNvPr id="4" name="Título 1">
+            <a:extLst>
+              <a:ext uri="{FF2B5EF4-FFF2-40B4-BE49-F238E27FC236}">
+                <a16:creationId xmlns:a16="http://schemas.microsoft.com/office/drawing/2014/main" id="{F775C3FD-1D9D-2524-AECC-B007F9810609}"/>
+              </a:ext>
+            </a:extLst>
+          </p:cNvPr>
+          <p:cNvSpPr>
+            <a:spLocks noGrp="1"/>
+          </p:cNvSpPr>
+          <p:nvPr>
+            <p:ph type="title"/>
+          </p:nvPr>
+        </p:nvSpPr>
+        <p:spPr>
+          <a:xfrm>
+            <a:off x="110612" y="355293"/>
+            <a:ext cx="8590936" cy="1325563"/>
+          </a:xfrm>
+        </p:spPr>
+        <p:txBody>
+          <a:bodyPr/>
+          <a:lstStyle/>
+          <a:p>
+            <a:r>
+              <a:rPr lang="en-US" dirty="0"/>
+              <a:t>SVM results</a:t>
+            </a:r>
+            <a:endParaRPr lang="en-GB" dirty="0"/>
+          </a:p>
+        </p:txBody>
+      </p:sp>
+      <p:sp>
+        <p:nvSpPr>
+          <p:cNvPr id="2" name="CuadroTexto 1">
+            <a:extLst>
+              <a:ext uri="{FF2B5EF4-FFF2-40B4-BE49-F238E27FC236}">
+                <a16:creationId xmlns:a16="http://schemas.microsoft.com/office/drawing/2014/main" id="{F8AE29C1-6B9C-6592-CEEA-C4D9823E9488}"/>
+              </a:ext>
+            </a:extLst>
+          </p:cNvPr>
+          <p:cNvSpPr txBox="1"/>
+          <p:nvPr/>
+        </p:nvSpPr>
+        <p:spPr>
+          <a:xfrm>
+            <a:off x="1234441" y="1808675"/>
+            <a:ext cx="2281085" cy="523220"/>
+          </a:xfrm>
+          <a:prstGeom prst="rect">
+            <a:avLst/>
+          </a:prstGeom>
+          <a:noFill/>
+        </p:spPr>
+        <p:txBody>
+          <a:bodyPr wrap="square" rtlCol="0">
+            <a:spAutoFit/>
+          </a:bodyPr>
+          <a:lstStyle/>
+          <a:p>
+            <a:r>
+              <a:rPr lang="en-US" sz="2800" dirty="0"/>
+              <a:t>Basic SVM</a:t>
+            </a:r>
+            <a:endParaRPr lang="en-GB" sz="2800" dirty="0"/>
+          </a:p>
+        </p:txBody>
+      </p:sp>
+      <p:sp>
+        <p:nvSpPr>
+          <p:cNvPr id="3" name="CuadroTexto 2">
+            <a:extLst>
+              <a:ext uri="{FF2B5EF4-FFF2-40B4-BE49-F238E27FC236}">
+                <a16:creationId xmlns:a16="http://schemas.microsoft.com/office/drawing/2014/main" id="{869D2976-2380-0238-FD5D-0146250BE3EC}"/>
+              </a:ext>
+            </a:extLst>
+          </p:cNvPr>
+          <p:cNvSpPr txBox="1"/>
+          <p:nvPr/>
+        </p:nvSpPr>
+        <p:spPr>
+          <a:xfrm>
+            <a:off x="5447074" y="1808675"/>
+            <a:ext cx="2930010" cy="523220"/>
+          </a:xfrm>
+          <a:prstGeom prst="rect">
+            <a:avLst/>
+          </a:prstGeom>
+          <a:noFill/>
+        </p:spPr>
+        <p:txBody>
+          <a:bodyPr wrap="square" rtlCol="0">
+            <a:spAutoFit/>
+          </a:bodyPr>
+          <a:lstStyle/>
+          <a:p>
+            <a:r>
+              <a:rPr lang="en-US" sz="2800" dirty="0"/>
+              <a:t>SVM with tuning</a:t>
+            </a:r>
+            <a:endParaRPr lang="en-GB" sz="2800" dirty="0"/>
+          </a:p>
+        </p:txBody>
+      </p:sp>
+      <p:pic>
+        <p:nvPicPr>
+          <p:cNvPr id="10" name="Imagen 9">
+            <a:extLst>
+              <a:ext uri="{FF2B5EF4-FFF2-40B4-BE49-F238E27FC236}">
+                <a16:creationId xmlns:a16="http://schemas.microsoft.com/office/drawing/2014/main" id="{6A155973-C971-E855-899A-305D843CE584}"/>
+              </a:ext>
+            </a:extLst>
+          </p:cNvPr>
+          <p:cNvPicPr>
+            <a:picLocks noChangeAspect="1"/>
+          </p:cNvPicPr>
+          <p:nvPr/>
+        </p:nvPicPr>
+        <p:blipFill>
+          <a:blip r:embed="rId2">
+            <a:extLst>
+              <a:ext uri="{28A0092B-C50C-407E-A947-70E740481C1C}">
+                <a14:useLocalDpi xmlns:a14="http://schemas.microsoft.com/office/drawing/2010/main" val="0"/>
+              </a:ext>
+            </a:extLst>
+          </a:blip>
+          <a:stretch>
+            <a:fillRect/>
+          </a:stretch>
+        </p:blipFill>
+        <p:spPr>
+          <a:xfrm>
+            <a:off x="110612" y="2728255"/>
+            <a:ext cx="4528744" cy="3396557"/>
+          </a:xfrm>
+          <a:prstGeom prst="rect">
+            <a:avLst/>
+          </a:prstGeom>
+        </p:spPr>
+      </p:pic>
+      <p:pic>
+        <p:nvPicPr>
+          <p:cNvPr id="11" name="Imagen 10">
+            <a:extLst>
+              <a:ext uri="{FF2B5EF4-FFF2-40B4-BE49-F238E27FC236}">
+                <a16:creationId xmlns:a16="http://schemas.microsoft.com/office/drawing/2014/main" id="{CE48A6E2-6698-7891-E489-72FC59487F7D}"/>
+              </a:ext>
+            </a:extLst>
+          </p:cNvPr>
+          <p:cNvPicPr>
+            <a:picLocks noChangeAspect="1"/>
+          </p:cNvPicPr>
+          <p:nvPr/>
+        </p:nvPicPr>
+        <p:blipFill>
+          <a:blip r:embed="rId3">
+            <a:extLst>
+              <a:ext uri="{28A0092B-C50C-407E-A947-70E740481C1C}">
+                <a14:useLocalDpi xmlns:a14="http://schemas.microsoft.com/office/drawing/2010/main" val="0"/>
+              </a:ext>
+            </a:extLst>
+          </a:blip>
+          <a:stretch>
+            <a:fillRect/>
+          </a:stretch>
+        </p:blipFill>
+        <p:spPr>
+          <a:xfrm>
+            <a:off x="4571281" y="2852815"/>
+            <a:ext cx="4462107" cy="3346581"/>
+          </a:xfrm>
+          <a:prstGeom prst="rect">
+            <a:avLst/>
+          </a:prstGeom>
+        </p:spPr>
+      </p:pic>
+    </p:spTree>
+    <p:extLst>
+      <p:ext uri="{BB962C8B-B14F-4D97-AF65-F5344CB8AC3E}">
+        <p14:creationId xmlns:p14="http://schemas.microsoft.com/office/powerpoint/2010/main" val="523959907"/>
+      </p:ext>
+    </p:extLst>
+  </p:cSld>
+  <p:clrMapOvr>
+    <a:masterClrMapping/>
+  </p:clrMapOvr>
+</p:sld>
+</file>
+
+<file path=ppt/slides/slide16.xml><?xml version="1.0" encoding="utf-8"?>
+<p:sld xmlns:a="http://schemas.openxmlformats.org/drawingml/2006/main" xmlns:r="http://schemas.openxmlformats.org/officeDocument/2006/relationships" xmlns:p="http://schemas.openxmlformats.org/presentationml/2006/main">
+  <p:cSld>
+    <p:spTree>
+      <p:nvGrpSpPr>
+        <p:cNvPr id="1" name=""/>
+        <p:cNvGrpSpPr/>
+        <p:nvPr/>
+      </p:nvGrpSpPr>
+      <p:grpSpPr>
+        <a:xfrm>
+          <a:off x="0" y="0"/>
+          <a:ext cx="0" cy="0"/>
+          <a:chOff x="0" y="0"/>
+          <a:chExt cx="0" cy="0"/>
+        </a:xfrm>
+      </p:grpSpPr>
+      <p:sp>
+        <p:nvSpPr>
+          <p:cNvPr id="4" name="Título 1">
+            <a:extLst>
+              <a:ext uri="{FF2B5EF4-FFF2-40B4-BE49-F238E27FC236}">
+                <a16:creationId xmlns:a16="http://schemas.microsoft.com/office/drawing/2014/main" id="{D40784ED-454C-122D-DDC3-988F14B390C7}"/>
+              </a:ext>
+            </a:extLst>
+          </p:cNvPr>
+          <p:cNvSpPr>
+            <a:spLocks noGrp="1"/>
+          </p:cNvSpPr>
+          <p:nvPr>
+            <p:ph type="title"/>
+          </p:nvPr>
+        </p:nvSpPr>
+        <p:spPr>
+          <a:xfrm>
+            <a:off x="1102442" y="384328"/>
+            <a:ext cx="6939116" cy="1325563"/>
+          </a:xfrm>
+        </p:spPr>
+        <p:txBody>
+          <a:bodyPr/>
+          <a:lstStyle/>
+          <a:p>
+            <a:r>
+              <a:rPr lang="en-US" dirty="0"/>
+              <a:t>BERT</a:t>
+            </a:r>
+            <a:endParaRPr lang="en-GB" dirty="0"/>
+          </a:p>
+        </p:txBody>
+      </p:sp>
+      <mc:AlternateContent xmlns:mc="http://schemas.openxmlformats.org/markup-compatibility/2006" xmlns:a14="http://schemas.microsoft.com/office/drawing/2010/main">
+        <mc:Choice Requires="a14">
+          <p:sp>
+            <p:nvSpPr>
+              <p:cNvPr id="5" name="Marcador de contenido 2">
+                <a:extLst>
+                  <a:ext uri="{FF2B5EF4-FFF2-40B4-BE49-F238E27FC236}">
+                    <a16:creationId xmlns:a16="http://schemas.microsoft.com/office/drawing/2014/main" id="{E2BD0E71-8115-42FF-9510-7B31C90D369C}"/>
+                  </a:ext>
+                </a:extLst>
+              </p:cNvPr>
+              <p:cNvSpPr>
+                <a:spLocks noGrp="1"/>
+              </p:cNvSpPr>
+              <p:nvPr>
+                <p:ph idx="1"/>
+              </p:nvPr>
+            </p:nvSpPr>
+            <p:spPr>
+              <a:xfrm>
+                <a:off x="68826" y="1680392"/>
+                <a:ext cx="9075174" cy="4830813"/>
+              </a:xfrm>
+            </p:spPr>
+            <p:txBody>
+              <a:bodyPr>
+                <a:normAutofit fontScale="85000" lnSpcReduction="20000"/>
+              </a:bodyPr>
+              <a:lstStyle/>
+              <a:p>
+                <a:r>
+                  <a:rPr lang="en-GB" sz="3300" dirty="0"/>
+                  <a:t>bert-base-uncased </a:t>
+                </a:r>
+                <a14:m>
+                  <m:oMath xmlns:m="http://schemas.openxmlformats.org/officeDocument/2006/math">
+                    <m:r>
+                      <a:rPr lang="en-US" sz="3300" b="0" i="1" smtClean="0">
+                        <a:latin typeface="Cambria Math" panose="02040503050406030204" pitchFamily="18" charset="0"/>
+                      </a:rPr>
+                      <m:t>→</m:t>
+                    </m:r>
+                  </m:oMath>
+                </a14:m>
+                <a:r>
+                  <a:rPr lang="en-GB" sz="3300" dirty="0"/>
+                  <a:t> pretrained on large English corpora</a:t>
+                </a:r>
+              </a:p>
+              <a:p>
+                <a:r>
+                  <a:rPr lang="en-GB" sz="3300" dirty="0" err="1"/>
+                  <a:t>WordPiece</a:t>
+                </a:r>
+                <a:r>
+                  <a:rPr lang="en-GB" sz="3300" dirty="0"/>
+                  <a:t> </a:t>
+                </a:r>
+                <a:r>
+                  <a:rPr lang="en-GB" sz="3300" dirty="0" err="1"/>
+                  <a:t>subword</a:t>
+                </a:r>
+                <a:r>
+                  <a:rPr lang="en-GB" sz="3300" dirty="0"/>
+                  <a:t> tokenization</a:t>
+                </a:r>
+              </a:p>
+              <a:p>
+                <a:r>
+                  <a:rPr lang="en-GB" sz="3300" dirty="0"/>
+                  <a:t>No manual preprocessing</a:t>
+                </a:r>
+              </a:p>
+              <a:p>
+                <a:endParaRPr lang="en-GB" sz="3300" dirty="0"/>
+              </a:p>
+              <a:p>
+                <a:pPr marL="0" indent="0">
+                  <a:buNone/>
+                </a:pPr>
+                <a:r>
+                  <a:rPr lang="en-GB" sz="3300" b="1" dirty="0"/>
+                  <a:t>Training:</a:t>
+                </a:r>
+              </a:p>
+              <a:p>
+                <a:r>
+                  <a:rPr lang="en-GB" sz="3300" dirty="0"/>
+                  <a:t>Model sees the training data in batches </a:t>
+                </a:r>
+                <a14:m>
+                  <m:oMath xmlns:m="http://schemas.openxmlformats.org/officeDocument/2006/math">
+                    <m:r>
+                      <a:rPr lang="en-US" sz="3300" b="0" i="1" smtClean="0">
+                        <a:latin typeface="Cambria Math" panose="02040503050406030204" pitchFamily="18" charset="0"/>
+                      </a:rPr>
+                      <m:t>→</m:t>
+                    </m:r>
+                  </m:oMath>
+                </a14:m>
+                <a:r>
+                  <a:rPr lang="en-GB" sz="3300" dirty="0"/>
+                  <a:t> more efficient and stable</a:t>
+                </a:r>
+              </a:p>
+              <a:p>
+                <a:r>
+                  <a:rPr lang="en-GB" sz="3300" dirty="0"/>
+                  <a:t>3 epochs </a:t>
+                </a:r>
+                <a14:m>
+                  <m:oMath xmlns:m="http://schemas.openxmlformats.org/officeDocument/2006/math">
+                    <m:r>
+                      <a:rPr lang="en-US" sz="3300" b="0" i="1" smtClean="0">
+                        <a:latin typeface="Cambria Math" panose="02040503050406030204" pitchFamily="18" charset="0"/>
+                      </a:rPr>
+                      <m:t>→</m:t>
+                    </m:r>
+                  </m:oMath>
+                </a14:m>
+                <a:r>
+                  <a:rPr lang="en-GB" sz="3300" dirty="0"/>
+                  <a:t> iteratively refine its understanding of the task</a:t>
+                </a:r>
+              </a:p>
+              <a:p>
+                <a:r>
+                  <a:rPr lang="en-GB" sz="3300" dirty="0"/>
+                  <a:t>For each batch: Loss function </a:t>
+                </a:r>
+                <a14:m>
+                  <m:oMath xmlns:m="http://schemas.openxmlformats.org/officeDocument/2006/math">
+                    <m:r>
+                      <a:rPr lang="en-US" sz="3300" b="0" i="1" smtClean="0">
+                        <a:latin typeface="Cambria Math" panose="02040503050406030204" pitchFamily="18" charset="0"/>
+                      </a:rPr>
+                      <m:t>→</m:t>
+                    </m:r>
+                  </m:oMath>
+                </a14:m>
+                <a:r>
+                  <a:rPr lang="en-GB" sz="3300" dirty="0"/>
+                  <a:t> optimizer (</a:t>
+                </a:r>
+                <a:r>
+                  <a:rPr lang="en-GB" sz="3300" dirty="0" err="1"/>
+                  <a:t>AdamW</a:t>
+                </a:r>
+                <a:r>
+                  <a:rPr lang="en-GB" sz="3300" dirty="0"/>
+                  <a:t>) updates weights </a:t>
+                </a:r>
+                <a14:m>
+                  <m:oMath xmlns:m="http://schemas.openxmlformats.org/officeDocument/2006/math">
+                    <m:r>
+                      <a:rPr lang="en-US" sz="3300" b="0" i="1" smtClean="0">
+                        <a:latin typeface="Cambria Math" panose="02040503050406030204" pitchFamily="18" charset="0"/>
+                      </a:rPr>
+                      <m:t>→</m:t>
+                    </m:r>
+                  </m:oMath>
+                </a14:m>
+                <a:r>
+                  <a:rPr lang="en-GB" sz="3300" dirty="0"/>
+                  <a:t> learning rate scheduler (stabilize and converge)</a:t>
+                </a:r>
+              </a:p>
+              <a:p>
+                <a:endParaRPr lang="en-GB" dirty="0"/>
+              </a:p>
+              <a:p>
+                <a:endParaRPr lang="en-GB" dirty="0"/>
+              </a:p>
+            </p:txBody>
+          </p:sp>
+        </mc:Choice>
+        <mc:Fallback xmlns="">
+          <p:sp>
+            <p:nvSpPr>
+              <p:cNvPr id="5" name="Marcador de contenido 2">
+                <a:extLst>
+                  <a:ext uri="{FF2B5EF4-FFF2-40B4-BE49-F238E27FC236}">
+                    <a16:creationId xmlns:a16="http://schemas.microsoft.com/office/drawing/2014/main" id="{E2BD0E71-8115-42FF-9510-7B31C90D369C}"/>
+                  </a:ext>
+                </a:extLst>
+              </p:cNvPr>
+              <p:cNvSpPr>
+                <a:spLocks noGrp="1" noRot="1" noChangeAspect="1" noMove="1" noResize="1" noEditPoints="1" noAdjustHandles="1" noChangeArrowheads="1" noChangeShapeType="1" noTextEdit="1"/>
+              </p:cNvSpPr>
+              <p:nvPr>
+                <p:ph idx="1"/>
+              </p:nvPr>
+            </p:nvSpPr>
+            <p:spPr>
+              <a:xfrm>
+                <a:off x="68826" y="1680392"/>
+                <a:ext cx="9075174" cy="4830813"/>
+              </a:xfrm>
+              <a:blipFill>
+                <a:blip r:embed="rId2"/>
+                <a:stretch>
+                  <a:fillRect l="-1343" t="-2904"/>
+                </a:stretch>
+              </a:blipFill>
+            </p:spPr>
+            <p:txBody>
+              <a:bodyPr/>
+              <a:lstStyle/>
+              <a:p>
+                <a:r>
+                  <a:rPr lang="en-GB">
+                    <a:noFill/>
+                  </a:rPr>
+                  <a:t> </a:t>
+                </a:r>
+              </a:p>
+            </p:txBody>
+          </p:sp>
+        </mc:Fallback>
+      </mc:AlternateContent>
+    </p:spTree>
+    <p:extLst>
+      <p:ext uri="{BB962C8B-B14F-4D97-AF65-F5344CB8AC3E}">
+        <p14:creationId xmlns:p14="http://schemas.microsoft.com/office/powerpoint/2010/main" val="3926465610"/>
+      </p:ext>
+    </p:extLst>
+  </p:cSld>
+  <p:clrMapOvr>
+    <a:masterClrMapping/>
+  </p:clrMapOvr>
+</p:sld>
+</file>
+
+<file path=ppt/slides/slide17.xml><?xml version="1.0" encoding="utf-8"?>
+<p:sld xmlns:a="http://schemas.openxmlformats.org/drawingml/2006/main" xmlns:r="http://schemas.openxmlformats.org/officeDocument/2006/relationships" xmlns:p="http://schemas.openxmlformats.org/presentationml/2006/main">
+  <p:cSld>
+    <p:spTree>
+      <p:nvGrpSpPr>
+        <p:cNvPr id="1" name=""/>
+        <p:cNvGrpSpPr/>
+        <p:nvPr/>
+      </p:nvGrpSpPr>
+      <p:grpSpPr>
+        <a:xfrm>
+          <a:off x="0" y="0"/>
+          <a:ext cx="0" cy="0"/>
+          <a:chOff x="0" y="0"/>
+          <a:chExt cx="0" cy="0"/>
+        </a:xfrm>
+      </p:grpSpPr>
+      <p:pic>
+        <p:nvPicPr>
+          <p:cNvPr id="6" name="Imagen 5">
+            <a:extLst>
+              <a:ext uri="{FF2B5EF4-FFF2-40B4-BE49-F238E27FC236}">
+                <a16:creationId xmlns:a16="http://schemas.microsoft.com/office/drawing/2014/main" id="{0575DC02-B12B-8C64-566A-D76DDA03978F}"/>
+              </a:ext>
+            </a:extLst>
+          </p:cNvPr>
+          <p:cNvPicPr>
+            <a:picLocks noChangeAspect="1"/>
+          </p:cNvPicPr>
+          <p:nvPr/>
+        </p:nvPicPr>
+        <p:blipFill>
+          <a:blip r:embed="rId2">
+            <a:extLst>
+              <a:ext uri="{28A0092B-C50C-407E-A947-70E740481C1C}">
+                <a14:useLocalDpi xmlns:a14="http://schemas.microsoft.com/office/drawing/2010/main" val="0"/>
+              </a:ext>
+            </a:extLst>
+          </a:blip>
+          <a:stretch>
+            <a:fillRect/>
+          </a:stretch>
+        </p:blipFill>
+        <p:spPr>
+          <a:xfrm>
+            <a:off x="3200024" y="2064314"/>
+            <a:ext cx="5664608" cy="4248456"/>
+          </a:xfrm>
+          <a:prstGeom prst="rect">
+            <a:avLst/>
+          </a:prstGeom>
+        </p:spPr>
+      </p:pic>
+      <p:sp>
+        <p:nvSpPr>
+          <p:cNvPr id="4" name="Título 1">
+            <a:extLst>
+              <a:ext uri="{FF2B5EF4-FFF2-40B4-BE49-F238E27FC236}">
+                <a16:creationId xmlns:a16="http://schemas.microsoft.com/office/drawing/2014/main" id="{1BF0DA51-25DD-E09F-EE2D-2F83DE2A6B56}"/>
+              </a:ext>
+            </a:extLst>
+          </p:cNvPr>
+          <p:cNvSpPr>
+            <a:spLocks noGrp="1"/>
+          </p:cNvSpPr>
+          <p:nvPr>
+            <p:ph type="title"/>
+          </p:nvPr>
+        </p:nvSpPr>
+        <p:spPr>
+          <a:xfrm>
+            <a:off x="591164" y="345000"/>
+            <a:ext cx="7961671" cy="1325563"/>
+          </a:xfrm>
+        </p:spPr>
+        <p:txBody>
+          <a:bodyPr/>
+          <a:lstStyle/>
+          <a:p>
+            <a:r>
+              <a:rPr lang="en-US" dirty="0"/>
+              <a:t>BERT results</a:t>
+            </a:r>
+            <a:endParaRPr lang="en-GB" dirty="0"/>
+          </a:p>
+        </p:txBody>
+      </p:sp>
+      <p:sp>
+        <p:nvSpPr>
+          <p:cNvPr id="5" name="CuadroTexto 4">
+            <a:extLst>
+              <a:ext uri="{FF2B5EF4-FFF2-40B4-BE49-F238E27FC236}">
+                <a16:creationId xmlns:a16="http://schemas.microsoft.com/office/drawing/2014/main" id="{C5B88C14-E811-A14A-5C91-9A4CC2CB3B3D}"/>
+              </a:ext>
+            </a:extLst>
+          </p:cNvPr>
+          <p:cNvSpPr txBox="1"/>
+          <p:nvPr/>
+        </p:nvSpPr>
+        <p:spPr>
+          <a:xfrm>
+            <a:off x="152024" y="2064314"/>
+            <a:ext cx="6096000" cy="954107"/>
+          </a:xfrm>
+          <a:prstGeom prst="rect">
+            <a:avLst/>
+          </a:prstGeom>
+          <a:noFill/>
+        </p:spPr>
+        <p:txBody>
+          <a:bodyPr wrap="square">
+            <a:spAutoFit/>
+          </a:bodyPr>
+          <a:lstStyle/>
+          <a:p>
+            <a:r>
+              <a:rPr lang="en-GB" sz="2800" dirty="0"/>
+              <a:t>Test Accuracy: 0.9993</a:t>
+            </a:r>
+          </a:p>
+          <a:p>
+            <a:r>
+              <a:rPr lang="en-GB" sz="2800" dirty="0"/>
+              <a:t>Test MCC: 0.9987</a:t>
+            </a:r>
+          </a:p>
+        </p:txBody>
+      </p:sp>
+    </p:spTree>
+    <p:extLst>
+      <p:ext uri="{BB962C8B-B14F-4D97-AF65-F5344CB8AC3E}">
+        <p14:creationId xmlns:p14="http://schemas.microsoft.com/office/powerpoint/2010/main" val="218018376"/>
+      </p:ext>
+    </p:extLst>
+  </p:cSld>
+  <p:clrMapOvr>
+    <a:masterClrMapping/>
+  </p:clrMapOvr>
+</p:sld>
+</file>
+
+<file path=ppt/slides/slide18.xml><?xml version="1.0" encoding="utf-8"?>
+<p:sld xmlns:a="http://schemas.openxmlformats.org/drawingml/2006/main" xmlns:r="http://schemas.openxmlformats.org/officeDocument/2006/relationships" xmlns:p="http://schemas.openxmlformats.org/presentationml/2006/main">
+  <p:cSld>
+    <p:spTree>
+      <p:nvGrpSpPr>
+        <p:cNvPr id="1" name=""/>
+        <p:cNvGrpSpPr/>
+        <p:nvPr/>
+      </p:nvGrpSpPr>
+      <p:grpSpPr>
+        <a:xfrm>
+          <a:off x="0" y="0"/>
+          <a:ext cx="0" cy="0"/>
+          <a:chOff x="0" y="0"/>
+          <a:chExt cx="0" cy="0"/>
+        </a:xfrm>
+      </p:grpSpPr>
+      <p:sp>
+        <p:nvSpPr>
+          <p:cNvPr id="2" name="Título 1">
+            <a:extLst>
+              <a:ext uri="{FF2B5EF4-FFF2-40B4-BE49-F238E27FC236}">
+                <a16:creationId xmlns:a16="http://schemas.microsoft.com/office/drawing/2014/main" id="{58DDF2BA-4B47-5098-9196-CACB47A238B1}"/>
+              </a:ext>
+            </a:extLst>
+          </p:cNvPr>
+          <p:cNvSpPr txBox="1">
+            <a:spLocks/>
+          </p:cNvSpPr>
+          <p:nvPr/>
+        </p:nvSpPr>
+        <p:spPr>
+          <a:xfrm>
+            <a:off x="1004119" y="2658063"/>
+            <a:ext cx="7135761" cy="1325563"/>
+          </a:xfrm>
+          <a:prstGeom prst="rect">
+            <a:avLst/>
+          </a:prstGeom>
+        </p:spPr>
+        <p:txBody>
+          <a:bodyPr/>
+          <a:lstStyle>
+            <a:lvl1pPr algn="ctr" defTabSz="457200" rtl="0" eaLnBrk="1" latinLnBrk="0" hangingPunct="1">
+              <a:spcBef>
+                <a:spcPct val="0"/>
+              </a:spcBef>
+              <a:buNone/>
+              <a:defRPr sz="4400" kern="1200">
+                <a:solidFill>
+                  <a:schemeClr val="tx1"/>
+                </a:solidFill>
+                <a:latin typeface="+mj-lt"/>
+                <a:ea typeface="+mj-ea"/>
+                <a:cs typeface="+mj-cs"/>
+              </a:defRPr>
+            </a:lvl1pPr>
+          </a:lstStyle>
+          <a:p>
+            <a:r>
+              <a:rPr lang="en-GB"/>
+              <a:t>Do you see anything strange?</a:t>
+            </a:r>
+            <a:endParaRPr lang="en-GB" dirty="0"/>
+          </a:p>
+        </p:txBody>
+      </p:sp>
+    </p:spTree>
+    <p:extLst>
+      <p:ext uri="{BB962C8B-B14F-4D97-AF65-F5344CB8AC3E}">
+        <p14:creationId xmlns:p14="http://schemas.microsoft.com/office/powerpoint/2010/main" val="3907325505"/>
+      </p:ext>
+    </p:extLst>
+  </p:cSld>
+  <p:clrMapOvr>
+    <a:masterClrMapping/>
+  </p:clrMapOvr>
+</p:sld>
+</file>
+
+<file path=ppt/slides/slide19.xml><?xml version="1.0" encoding="utf-8"?>
+<p:sld xmlns:a="http://schemas.openxmlformats.org/drawingml/2006/main" xmlns:r="http://schemas.openxmlformats.org/officeDocument/2006/relationships" xmlns:p="http://schemas.openxmlformats.org/presentationml/2006/main">
+  <p:cSld>
+    <p:spTree>
+      <p:nvGrpSpPr>
+        <p:cNvPr id="1" name=""/>
+        <p:cNvGrpSpPr/>
+        <p:nvPr/>
+      </p:nvGrpSpPr>
+      <p:grpSpPr>
+        <a:xfrm>
+          <a:off x="0" y="0"/>
+          <a:ext cx="0" cy="0"/>
+          <a:chOff x="0" y="0"/>
+          <a:chExt cx="0" cy="0"/>
+        </a:xfrm>
+      </p:grpSpPr>
+      <p:sp>
+        <p:nvSpPr>
+          <p:cNvPr id="5" name="Título 1">
+            <a:extLst>
+              <a:ext uri="{FF2B5EF4-FFF2-40B4-BE49-F238E27FC236}">
+                <a16:creationId xmlns:a16="http://schemas.microsoft.com/office/drawing/2014/main" id="{AD82D011-368B-9F68-7D09-C8DEFC5A6C94}"/>
+              </a:ext>
+            </a:extLst>
+          </p:cNvPr>
+          <p:cNvSpPr txBox="1">
+            <a:spLocks/>
+          </p:cNvSpPr>
+          <p:nvPr/>
+        </p:nvSpPr>
+        <p:spPr>
+          <a:xfrm>
+            <a:off x="287593" y="365125"/>
+            <a:ext cx="8256639" cy="1325563"/>
+          </a:xfrm>
+          <a:prstGeom prst="rect">
+            <a:avLst/>
+          </a:prstGeom>
+        </p:spPr>
+        <p:txBody>
+          <a:bodyPr vert="horz" lIns="91440" tIns="45720" rIns="91440" bIns="45720" rtlCol="0" anchor="ctr">
+            <a:normAutofit/>
+          </a:bodyPr>
+          <a:lstStyle>
+            <a:lvl1pPr algn="l" defTabSz="914400" rtl="0" eaLnBrk="1" latinLnBrk="0" hangingPunct="1">
+              <a:lnSpc>
+                <a:spcPct val="90000"/>
+              </a:lnSpc>
+              <a:spcBef>
+                <a:spcPct val="0"/>
+              </a:spcBef>
+              <a:buNone/>
+              <a:defRPr sz="4400" kern="1200">
+                <a:solidFill>
+                  <a:schemeClr val="tx1"/>
+                </a:solidFill>
+                <a:latin typeface="+mj-lt"/>
+                <a:ea typeface="+mj-ea"/>
+                <a:cs typeface="+mj-cs"/>
+              </a:defRPr>
+            </a:lvl1pPr>
+          </a:lstStyle>
+          <a:p>
+            <a:pPr marL="0" marR="0" lvl="0" indent="0" algn="ctr" defTabSz="914400" rtl="0" eaLnBrk="1" fontAlgn="auto" latinLnBrk="0" hangingPunct="1">
+              <a:lnSpc>
+                <a:spcPct val="90000"/>
+              </a:lnSpc>
+              <a:spcBef>
+                <a:spcPct val="0"/>
+              </a:spcBef>
+              <a:spcAft>
+                <a:spcPts val="0"/>
+              </a:spcAft>
+              <a:buClrTx/>
+              <a:buSzTx/>
+              <a:buFontTx/>
+              <a:buNone/>
+              <a:tabLst/>
+              <a:defRPr/>
+            </a:pPr>
+            <a:r>
+              <a:rPr kumimoji="0" lang="en-US" sz="4400" b="0" i="0" u="none" strike="noStrike" kern="1200" cap="none" spc="0" normalizeH="0" baseline="0" noProof="0">
+                <a:ln>
+                  <a:noFill/>
+                </a:ln>
+                <a:solidFill>
+                  <a:sysClr val="windowText" lastClr="000000"/>
+                </a:solidFill>
+                <a:effectLst/>
+                <a:uLnTx/>
+                <a:uFillTx/>
+                <a:latin typeface="Aptos Display" panose="02110004020202020204"/>
+                <a:ea typeface="+mj-ea"/>
+                <a:cs typeface="+mj-cs"/>
+              </a:rPr>
+              <a:t>Bias in dataset</a:t>
+            </a:r>
+            <a:endParaRPr kumimoji="0" lang="en-GB" sz="4400" b="0" i="0" u="none" strike="noStrike" kern="1200" cap="none" spc="0" normalizeH="0" baseline="0" noProof="0" dirty="0">
+              <a:ln>
+                <a:noFill/>
+              </a:ln>
+              <a:solidFill>
+                <a:sysClr val="windowText" lastClr="000000"/>
+              </a:solidFill>
+              <a:effectLst/>
+              <a:uLnTx/>
+              <a:uFillTx/>
+              <a:latin typeface="Aptos Display" panose="02110004020202020204"/>
+              <a:ea typeface="+mj-ea"/>
+              <a:cs typeface="+mj-cs"/>
+            </a:endParaRPr>
+          </a:p>
+        </p:txBody>
+      </p:sp>
+      <p:sp>
+        <p:nvSpPr>
+          <p:cNvPr id="6" name="Marcador de contenido 2">
+            <a:extLst>
+              <a:ext uri="{FF2B5EF4-FFF2-40B4-BE49-F238E27FC236}">
+                <a16:creationId xmlns:a16="http://schemas.microsoft.com/office/drawing/2014/main" id="{4FC71306-BE20-0E48-0F7F-037E6B7996C1}"/>
+              </a:ext>
+            </a:extLst>
+          </p:cNvPr>
+          <p:cNvSpPr txBox="1">
+            <a:spLocks/>
+          </p:cNvSpPr>
+          <p:nvPr/>
+        </p:nvSpPr>
+        <p:spPr>
+          <a:xfrm>
+            <a:off x="287593" y="1825625"/>
+            <a:ext cx="8610601" cy="4351338"/>
+          </a:xfrm>
+          <a:prstGeom prst="rect">
+            <a:avLst/>
+          </a:prstGeom>
+        </p:spPr>
+        <p:txBody>
+          <a:bodyPr vert="horz" lIns="91440" tIns="45720" rIns="91440" bIns="45720" rtlCol="0">
+            <a:normAutofit/>
+          </a:bodyPr>
+          <a:lstStyle>
+            <a:lvl1pPr marL="228600" indent="-228600" algn="l" defTabSz="914400" rtl="0" eaLnBrk="1" latinLnBrk="0" hangingPunct="1">
+              <a:lnSpc>
+                <a:spcPct val="90000"/>
+              </a:lnSpc>
+              <a:spcBef>
+                <a:spcPts val="1000"/>
+              </a:spcBef>
+              <a:buFont typeface="Arial" panose="020B0604020202020204" pitchFamily="34" charset="0"/>
+              <a:buChar char="•"/>
+              <a:defRPr sz="2800" kern="1200">
+                <a:solidFill>
+                  <a:schemeClr val="tx1"/>
+                </a:solidFill>
+                <a:latin typeface="+mn-lt"/>
+                <a:ea typeface="+mn-ea"/>
+                <a:cs typeface="+mn-cs"/>
+              </a:defRPr>
+            </a:lvl1pPr>
+            <a:lvl2pPr marL="685800" indent="-228600" algn="l" defTabSz="914400" rtl="0" eaLnBrk="1" latinLnBrk="0" hangingPunct="1">
+              <a:lnSpc>
+                <a:spcPct val="90000"/>
+              </a:lnSpc>
+              <a:spcBef>
+                <a:spcPts val="500"/>
+              </a:spcBef>
+              <a:buFont typeface="Arial" panose="020B0604020202020204" pitchFamily="34" charset="0"/>
+              <a:buChar char="•"/>
+              <a:defRPr sz="2400" kern="1200">
+                <a:solidFill>
+                  <a:schemeClr val="tx1"/>
+                </a:solidFill>
+                <a:latin typeface="+mn-lt"/>
+                <a:ea typeface="+mn-ea"/>
+                <a:cs typeface="+mn-cs"/>
+              </a:defRPr>
+            </a:lvl2pPr>
+            <a:lvl3pPr marL="1143000" indent="-228600" algn="l" defTabSz="914400" rtl="0" eaLnBrk="1" latinLnBrk="0" hangingPunct="1">
+              <a:lnSpc>
+                <a:spcPct val="90000"/>
+              </a:lnSpc>
+              <a:spcBef>
+                <a:spcPts val="500"/>
+              </a:spcBef>
+              <a:buFont typeface="Arial" panose="020B0604020202020204" pitchFamily="34" charset="0"/>
+              <a:buChar char="•"/>
+              <a:defRPr sz="2000" kern="1200">
+                <a:solidFill>
+                  <a:schemeClr val="tx1"/>
+                </a:solidFill>
+                <a:latin typeface="+mn-lt"/>
+                <a:ea typeface="+mn-ea"/>
+                <a:cs typeface="+mn-cs"/>
+              </a:defRPr>
+            </a:lvl3pPr>
+            <a:lvl4pPr marL="1600200" indent="-228600" algn="l" defTabSz="914400" rtl="0" eaLnBrk="1" latinLnBrk="0" hangingPunct="1">
+              <a:lnSpc>
+                <a:spcPct val="90000"/>
+              </a:lnSpc>
+              <a:spcBef>
+                <a:spcPts val="500"/>
+              </a:spcBef>
+              <a:buFont typeface="Arial" panose="020B0604020202020204" pitchFamily="34" charset="0"/>
+              <a:buChar char="•"/>
+              <a:defRPr sz="1800" kern="1200">
+                <a:solidFill>
+                  <a:schemeClr val="tx1"/>
+                </a:solidFill>
+                <a:latin typeface="+mn-lt"/>
+                <a:ea typeface="+mn-ea"/>
+                <a:cs typeface="+mn-cs"/>
+              </a:defRPr>
+            </a:lvl4pPr>
+            <a:lvl5pPr marL="2057400" indent="-228600" algn="l" defTabSz="914400" rtl="0" eaLnBrk="1" latinLnBrk="0" hangingPunct="1">
+              <a:lnSpc>
+                <a:spcPct val="90000"/>
+              </a:lnSpc>
+              <a:spcBef>
+                <a:spcPts val="500"/>
+              </a:spcBef>
+              <a:buFont typeface="Arial" panose="020B0604020202020204" pitchFamily="34" charset="0"/>
+              <a:buChar char="•"/>
+              <a:defRPr sz="1800" kern="1200">
+                <a:solidFill>
+                  <a:schemeClr val="tx1"/>
+                </a:solidFill>
+                <a:latin typeface="+mn-lt"/>
+                <a:ea typeface="+mn-ea"/>
+                <a:cs typeface="+mn-cs"/>
+              </a:defRPr>
+            </a:lvl5pPr>
+            <a:lvl6pPr marL="2514600" indent="-228600" algn="l" defTabSz="914400" rtl="0" eaLnBrk="1" latinLnBrk="0" hangingPunct="1">
+              <a:lnSpc>
+                <a:spcPct val="90000"/>
+              </a:lnSpc>
+              <a:spcBef>
+                <a:spcPts val="500"/>
+              </a:spcBef>
+              <a:buFont typeface="Arial" panose="020B0604020202020204" pitchFamily="34" charset="0"/>
+              <a:buChar char="•"/>
+              <a:defRPr sz="1800" kern="1200">
+                <a:solidFill>
+                  <a:schemeClr val="tx1"/>
+                </a:solidFill>
+                <a:latin typeface="+mn-lt"/>
+                <a:ea typeface="+mn-ea"/>
+                <a:cs typeface="+mn-cs"/>
+              </a:defRPr>
+            </a:lvl6pPr>
+            <a:lvl7pPr marL="2971800" indent="-228600" algn="l" defTabSz="914400" rtl="0" eaLnBrk="1" latinLnBrk="0" hangingPunct="1">
+              <a:lnSpc>
+                <a:spcPct val="90000"/>
+              </a:lnSpc>
+              <a:spcBef>
+                <a:spcPts val="500"/>
+              </a:spcBef>
+              <a:buFont typeface="Arial" panose="020B0604020202020204" pitchFamily="34" charset="0"/>
+              <a:buChar char="•"/>
+              <a:defRPr sz="1800" kern="1200">
+                <a:solidFill>
+                  <a:schemeClr val="tx1"/>
+                </a:solidFill>
+                <a:latin typeface="+mn-lt"/>
+                <a:ea typeface="+mn-ea"/>
+                <a:cs typeface="+mn-cs"/>
+              </a:defRPr>
+            </a:lvl7pPr>
+            <a:lvl8pPr marL="3429000" indent="-228600" algn="l" defTabSz="914400" rtl="0" eaLnBrk="1" latinLnBrk="0" hangingPunct="1">
+              <a:lnSpc>
+                <a:spcPct val="90000"/>
+              </a:lnSpc>
+              <a:spcBef>
+                <a:spcPts val="500"/>
+              </a:spcBef>
+              <a:buFont typeface="Arial" panose="020B0604020202020204" pitchFamily="34" charset="0"/>
+              <a:buChar char="•"/>
+              <a:defRPr sz="1800" kern="1200">
+                <a:solidFill>
+                  <a:schemeClr val="tx1"/>
+                </a:solidFill>
+                <a:latin typeface="+mn-lt"/>
+                <a:ea typeface="+mn-ea"/>
+                <a:cs typeface="+mn-cs"/>
+              </a:defRPr>
+            </a:lvl8pPr>
+            <a:lvl9pPr marL="3886200" indent="-228600" algn="l" defTabSz="914400" rtl="0" eaLnBrk="1" latinLnBrk="0" hangingPunct="1">
+              <a:lnSpc>
+                <a:spcPct val="90000"/>
+              </a:lnSpc>
+              <a:spcBef>
+                <a:spcPts val="500"/>
+              </a:spcBef>
+              <a:buFont typeface="Arial" panose="020B0604020202020204" pitchFamily="34" charset="0"/>
+              <a:buChar char="•"/>
+              <a:defRPr sz="1800" kern="1200">
+                <a:solidFill>
+                  <a:schemeClr val="tx1"/>
+                </a:solidFill>
+                <a:latin typeface="+mn-lt"/>
+                <a:ea typeface="+mn-ea"/>
+                <a:cs typeface="+mn-cs"/>
+              </a:defRPr>
+            </a:lvl9pPr>
+          </a:lstStyle>
+          <a:p>
+            <a:pPr marL="228600" marR="0" lvl="0" indent="-228600" algn="l" defTabSz="914400" rtl="0" eaLnBrk="1" fontAlgn="auto" latinLnBrk="0" hangingPunct="1">
+              <a:lnSpc>
+                <a:spcPct val="90000"/>
+              </a:lnSpc>
+              <a:spcBef>
+                <a:spcPts val="1000"/>
+              </a:spcBef>
+              <a:spcAft>
+                <a:spcPts val="0"/>
+              </a:spcAft>
+              <a:buClrTx/>
+              <a:buSzTx/>
+              <a:buFont typeface="Arial" panose="020B0604020202020204" pitchFamily="34" charset="0"/>
+              <a:buChar char="•"/>
+              <a:tabLst/>
+              <a:defRPr/>
+            </a:pPr>
+            <a:r>
+              <a:rPr kumimoji="0" lang="en-GB" sz="2800" b="0" i="0" u="none" strike="noStrike" kern="1200" cap="none" spc="0" normalizeH="0" baseline="0" noProof="0" dirty="0">
+                <a:ln>
+                  <a:noFill/>
+                </a:ln>
+                <a:solidFill>
+                  <a:sysClr val="windowText" lastClr="000000"/>
+                </a:solidFill>
+                <a:effectLst/>
+                <a:uLnTx/>
+                <a:uFillTx/>
+                <a:latin typeface="Aptos" panose="02110004020202020204"/>
+                <a:ea typeface="+mn-ea"/>
+                <a:cs typeface="+mn-cs"/>
+              </a:rPr>
+              <a:t>Dataset on Kaggle (similar one): '(Reuters)' tag on text column</a:t>
+            </a:r>
+          </a:p>
+          <a:p>
+            <a:pPr marL="228600" marR="0" lvl="0" indent="-228600" algn="l" defTabSz="914400" rtl="0" eaLnBrk="1" fontAlgn="auto" latinLnBrk="0" hangingPunct="1">
+              <a:lnSpc>
+                <a:spcPct val="90000"/>
+              </a:lnSpc>
+              <a:spcBef>
+                <a:spcPts val="1000"/>
+              </a:spcBef>
+              <a:spcAft>
+                <a:spcPts val="0"/>
+              </a:spcAft>
+              <a:buClrTx/>
+              <a:buSzTx/>
+              <a:buFont typeface="Arial" panose="020B0604020202020204" pitchFamily="34" charset="0"/>
+              <a:buChar char="•"/>
+              <a:tabLst/>
+              <a:defRPr/>
+            </a:pPr>
+            <a:r>
+              <a:rPr kumimoji="0" lang="en-GB" sz="2800" b="0" i="0" u="none" strike="noStrike" kern="1200" cap="none" spc="0" normalizeH="0" baseline="0" noProof="0" dirty="0">
+                <a:ln>
+                  <a:noFill/>
+                </a:ln>
+                <a:solidFill>
+                  <a:sysClr val="windowText" lastClr="000000"/>
+                </a:solidFill>
+                <a:effectLst/>
+                <a:uLnTx/>
+                <a:uFillTx/>
+                <a:latin typeface="Aptos" panose="02110004020202020204"/>
+                <a:ea typeface="+mn-ea"/>
+                <a:cs typeface="+mn-cs"/>
+              </a:rPr>
+              <a:t>Our dataset didn’t have it, but Reuters was used</a:t>
+            </a:r>
+          </a:p>
+          <a:p>
+            <a:pPr marL="228600" marR="0" lvl="0" indent="-228600" algn="l" defTabSz="914400" rtl="0" eaLnBrk="1" fontAlgn="auto" latinLnBrk="0" hangingPunct="1">
+              <a:lnSpc>
+                <a:spcPct val="90000"/>
+              </a:lnSpc>
+              <a:spcBef>
+                <a:spcPts val="1000"/>
+              </a:spcBef>
+              <a:spcAft>
+                <a:spcPts val="0"/>
+              </a:spcAft>
+              <a:buClrTx/>
+              <a:buSzTx/>
+              <a:buFont typeface="Arial" panose="020B0604020202020204" pitchFamily="34" charset="0"/>
+              <a:buChar char="•"/>
+              <a:tabLst/>
+              <a:defRPr/>
+            </a:pPr>
+            <a:r>
+              <a:rPr kumimoji="0" lang="en-GB" sz="2800" b="0" i="0" u="none" strike="noStrike" kern="1200" cap="none" spc="0" normalizeH="0" baseline="0" noProof="0" dirty="0">
+                <a:ln>
+                  <a:noFill/>
+                </a:ln>
+                <a:solidFill>
+                  <a:sysClr val="windowText" lastClr="000000"/>
+                </a:solidFill>
+                <a:effectLst/>
+                <a:uLnTx/>
+                <a:uFillTx/>
+                <a:latin typeface="Aptos" panose="02110004020202020204"/>
+                <a:ea typeface="+mn-ea"/>
+                <a:cs typeface="+mn-cs"/>
+              </a:rPr>
+              <a:t>Reuters: major global news agency</a:t>
+            </a:r>
+          </a:p>
+          <a:p>
+            <a:pPr marL="228600" marR="0" lvl="0" indent="-228600" algn="l" defTabSz="914400" rtl="0" eaLnBrk="1" fontAlgn="auto" latinLnBrk="0" hangingPunct="1">
+              <a:lnSpc>
+                <a:spcPct val="90000"/>
+              </a:lnSpc>
+              <a:spcBef>
+                <a:spcPts val="1000"/>
+              </a:spcBef>
+              <a:spcAft>
+                <a:spcPts val="0"/>
+              </a:spcAft>
+              <a:buClrTx/>
+              <a:buSzTx/>
+              <a:buFont typeface="Arial" panose="020B0604020202020204" pitchFamily="34" charset="0"/>
+              <a:buChar char="•"/>
+              <a:tabLst/>
+              <a:defRPr/>
+            </a:pPr>
+            <a:endParaRPr kumimoji="0" lang="en-GB" sz="2800" b="0" i="0" u="none" strike="noStrike" kern="1200" cap="none" spc="0" normalizeH="0" baseline="0" noProof="0" dirty="0">
+              <a:ln>
+                <a:noFill/>
+              </a:ln>
+              <a:solidFill>
+                <a:sysClr val="windowText" lastClr="000000"/>
+              </a:solidFill>
+              <a:effectLst/>
+              <a:uLnTx/>
+              <a:uFillTx/>
+              <a:latin typeface="Aptos" panose="02110004020202020204"/>
+              <a:ea typeface="+mn-ea"/>
+              <a:cs typeface="+mn-cs"/>
+            </a:endParaRPr>
+          </a:p>
+          <a:p>
+            <a:pPr marL="0" marR="0" lvl="0" indent="0" algn="l" defTabSz="914400" rtl="0" eaLnBrk="1" fontAlgn="auto" latinLnBrk="0" hangingPunct="1">
+              <a:lnSpc>
+                <a:spcPct val="90000"/>
+              </a:lnSpc>
+              <a:spcBef>
+                <a:spcPts val="1000"/>
+              </a:spcBef>
+              <a:spcAft>
+                <a:spcPts val="0"/>
+              </a:spcAft>
+              <a:buClrTx/>
+              <a:buSzTx/>
+              <a:buFont typeface="Arial" panose="020B0604020202020204" pitchFamily="34" charset="0"/>
+              <a:buNone/>
+              <a:tabLst/>
+              <a:defRPr/>
+            </a:pPr>
+            <a:r>
+              <a:rPr kumimoji="0" lang="en-GB" sz="2800" b="0" i="0" u="none" strike="noStrike" kern="1200" cap="none" spc="0" normalizeH="0" baseline="0" noProof="0" dirty="0">
+                <a:ln>
+                  <a:noFill/>
+                </a:ln>
+                <a:solidFill>
+                  <a:sysClr val="windowText" lastClr="000000"/>
+                </a:solidFill>
+                <a:effectLst/>
+                <a:uLnTx/>
+                <a:uFillTx/>
+                <a:latin typeface="Aptos" panose="02110004020202020204"/>
+                <a:ea typeface="+mn-ea"/>
+                <a:cs typeface="+mn-cs"/>
+              </a:rPr>
+              <a:t>	 Indicator of true news?</a:t>
+            </a:r>
+          </a:p>
+          <a:p>
+            <a:pPr marL="228600" marR="0" lvl="0" indent="-228600" algn="l" defTabSz="914400" rtl="0" eaLnBrk="1" fontAlgn="auto" latinLnBrk="0" hangingPunct="1">
+              <a:lnSpc>
+                <a:spcPct val="90000"/>
+              </a:lnSpc>
+              <a:spcBef>
+                <a:spcPts val="1000"/>
+              </a:spcBef>
+              <a:spcAft>
+                <a:spcPts val="0"/>
+              </a:spcAft>
+              <a:buClrTx/>
+              <a:buSzTx/>
+              <a:buFont typeface="Arial" panose="020B0604020202020204" pitchFamily="34" charset="0"/>
+              <a:buChar char="•"/>
+              <a:tabLst/>
+              <a:defRPr/>
+            </a:pPr>
+            <a:endParaRPr kumimoji="0" lang="en-GB" sz="2800" b="0" i="0" u="none" strike="noStrike" kern="1200" cap="none" spc="0" normalizeH="0" baseline="0" noProof="0" dirty="0">
+              <a:ln>
+                <a:noFill/>
+              </a:ln>
+              <a:solidFill>
+                <a:sysClr val="windowText" lastClr="000000"/>
+              </a:solidFill>
+              <a:effectLst/>
+              <a:uLnTx/>
+              <a:uFillTx/>
+              <a:latin typeface="Aptos" panose="02110004020202020204"/>
+              <a:ea typeface="+mn-ea"/>
+              <a:cs typeface="+mn-cs"/>
+            </a:endParaRPr>
+          </a:p>
+          <a:p>
+            <a:pPr marL="228600" marR="0" lvl="0" indent="-228600" algn="l" defTabSz="914400" rtl="0" eaLnBrk="1" fontAlgn="auto" latinLnBrk="0" hangingPunct="1">
+              <a:lnSpc>
+                <a:spcPct val="90000"/>
+              </a:lnSpc>
+              <a:spcBef>
+                <a:spcPts val="1000"/>
+              </a:spcBef>
+              <a:spcAft>
+                <a:spcPts val="0"/>
+              </a:spcAft>
+              <a:buClrTx/>
+              <a:buSzTx/>
+              <a:buFont typeface="Arial" panose="020B0604020202020204" pitchFamily="34" charset="0"/>
+              <a:buChar char="•"/>
+              <a:tabLst/>
+              <a:defRPr/>
+            </a:pPr>
+            <a:r>
+              <a:rPr kumimoji="0" lang="en-GB" sz="2800" b="0" i="0" u="none" strike="noStrike" kern="1200" cap="none" spc="0" normalizeH="0" baseline="0" noProof="0" dirty="0">
+                <a:ln>
+                  <a:noFill/>
+                </a:ln>
+                <a:solidFill>
+                  <a:sysClr val="windowText" lastClr="000000"/>
+                </a:solidFill>
+                <a:effectLst/>
+                <a:uLnTx/>
+                <a:uFillTx/>
+                <a:latin typeface="Aptos" panose="02110004020202020204"/>
+                <a:ea typeface="+mn-ea"/>
+                <a:cs typeface="+mn-cs"/>
+              </a:rPr>
+              <a:t>Train on a new dataset</a:t>
+            </a:r>
+          </a:p>
+        </p:txBody>
+      </p:sp>
+      <p:sp>
+        <p:nvSpPr>
+          <p:cNvPr id="7" name="Flecha: a la derecha 6">
+            <a:extLst>
+              <a:ext uri="{FF2B5EF4-FFF2-40B4-BE49-F238E27FC236}">
+                <a16:creationId xmlns:a16="http://schemas.microsoft.com/office/drawing/2014/main" id="{730A638E-30E8-8449-B476-50B14536FBD5}"/>
+              </a:ext>
+            </a:extLst>
+          </p:cNvPr>
+          <p:cNvSpPr/>
+          <p:nvPr/>
+        </p:nvSpPr>
+        <p:spPr>
+          <a:xfrm>
+            <a:off x="825910" y="4354821"/>
+            <a:ext cx="245806" cy="196646"/>
+          </a:xfrm>
+          <a:prstGeom prst="rightArrow">
+            <a:avLst/>
+          </a:prstGeom>
+          <a:solidFill>
+            <a:sysClr val="windowText" lastClr="000000"/>
+          </a:solidFill>
+          <a:ln w="19050" cap="flat" cmpd="sng" algn="ctr">
+            <a:noFill/>
+            <a:prstDash val="solid"/>
+            <a:miter lim="800000"/>
+          </a:ln>
+          <a:effectLst/>
+        </p:spPr>
+        <p:txBody>
+          <a:bodyPr rtlCol="0" anchor="ctr"/>
+          <a:lstStyle/>
+          <a:p>
+            <a:pPr marL="0" marR="0" lvl="0" indent="0" algn="ctr" defTabSz="914400" eaLnBrk="1" fontAlgn="auto" latinLnBrk="0" hangingPunct="1">
+              <a:lnSpc>
+                <a:spcPct val="100000"/>
+              </a:lnSpc>
+              <a:spcBef>
+                <a:spcPts val="0"/>
+              </a:spcBef>
+              <a:spcAft>
+                <a:spcPts val="0"/>
+              </a:spcAft>
+              <a:buClrTx/>
+              <a:buSzTx/>
+              <a:buFontTx/>
+              <a:buNone/>
+              <a:tabLst/>
+              <a:defRPr/>
+            </a:pPr>
+            <a:endParaRPr kumimoji="0" lang="en-GB" sz="1800" b="0" i="0" u="none" strike="noStrike" kern="0" cap="none" spc="0" normalizeH="0" baseline="0" noProof="0" dirty="0">
+              <a:ln>
+                <a:noFill/>
+              </a:ln>
+              <a:solidFill>
+                <a:prstClr val="white"/>
+              </a:solidFill>
+              <a:effectLst/>
+              <a:uLnTx/>
+              <a:uFillTx/>
+              <a:latin typeface="Aptos" panose="02110004020202020204"/>
+              <a:ea typeface="+mn-ea"/>
+              <a:cs typeface="+mn-cs"/>
+            </a:endParaRPr>
+          </a:p>
+        </p:txBody>
+      </p:sp>
+    </p:spTree>
+    <p:extLst>
+      <p:ext uri="{BB962C8B-B14F-4D97-AF65-F5344CB8AC3E}">
+        <p14:creationId xmlns:p14="http://schemas.microsoft.com/office/powerpoint/2010/main" val="3777087903"/>
+      </p:ext>
+    </p:extLst>
   </p:cSld>
   <p:clrMapOvr>
     <a:masterClrMapping/>
@@ -3658,6 +7089,436 @@
           <a:p>
             <a:r>
               <a:t>Subject leakage analysis</a:t>
+            </a:r>
+          </a:p>
+        </p:txBody>
+      </p:sp>
+    </p:spTree>
+  </p:cSld>
+  <p:clrMapOvr>
+    <a:masterClrMapping/>
+  </p:clrMapOvr>
+</p:sld>
+</file>
+
+<file path=ppt/slides/slide20.xml><?xml version="1.0" encoding="utf-8"?>
+<p:sld xmlns:a="http://schemas.openxmlformats.org/drawingml/2006/main" xmlns:r="http://schemas.openxmlformats.org/officeDocument/2006/relationships" xmlns:p="http://schemas.openxmlformats.org/presentationml/2006/main">
+  <p:cSld>
+    <p:spTree>
+      <p:nvGrpSpPr>
+        <p:cNvPr id="1" name=""/>
+        <p:cNvGrpSpPr/>
+        <p:nvPr/>
+      </p:nvGrpSpPr>
+      <p:grpSpPr>
+        <a:xfrm>
+          <a:off x="0" y="0"/>
+          <a:ext cx="0" cy="0"/>
+          <a:chOff x="0" y="0"/>
+          <a:chExt cx="0" cy="0"/>
+        </a:xfrm>
+      </p:grpSpPr>
+      <p:sp>
+        <p:nvSpPr>
+          <p:cNvPr id="2" name="Título 1">
+            <a:extLst>
+              <a:ext uri="{FF2B5EF4-FFF2-40B4-BE49-F238E27FC236}">
+                <a16:creationId xmlns:a16="http://schemas.microsoft.com/office/drawing/2014/main" id="{59A4C37D-A458-8B4F-AFBE-9F80C7B26AD4}"/>
+              </a:ext>
+            </a:extLst>
+          </p:cNvPr>
+          <p:cNvSpPr txBox="1">
+            <a:spLocks/>
+          </p:cNvSpPr>
+          <p:nvPr/>
+        </p:nvSpPr>
+        <p:spPr>
+          <a:xfrm>
+            <a:off x="-685800" y="581435"/>
+            <a:ext cx="10515600" cy="1325563"/>
+          </a:xfrm>
+          <a:prstGeom prst="rect">
+            <a:avLst/>
+          </a:prstGeom>
+        </p:spPr>
+        <p:txBody>
+          <a:bodyPr/>
+          <a:lstStyle>
+            <a:lvl1pPr algn="ctr" defTabSz="457200" rtl="0" eaLnBrk="1" latinLnBrk="0" hangingPunct="1">
+              <a:spcBef>
+                <a:spcPct val="0"/>
+              </a:spcBef>
+              <a:buNone/>
+              <a:defRPr sz="4400" kern="1200">
+                <a:solidFill>
+                  <a:schemeClr val="tx1"/>
+                </a:solidFill>
+                <a:latin typeface="+mj-lt"/>
+                <a:ea typeface="+mj-ea"/>
+                <a:cs typeface="+mj-cs"/>
+              </a:defRPr>
+            </a:lvl1pPr>
+          </a:lstStyle>
+          <a:p>
+            <a:r>
+              <a:rPr lang="en-US" dirty="0"/>
+              <a:t>New dataset results</a:t>
+            </a:r>
+            <a:endParaRPr lang="en-GB" dirty="0"/>
+          </a:p>
+        </p:txBody>
+      </p:sp>
+      <p:sp>
+        <p:nvSpPr>
+          <p:cNvPr id="3" name="CuadroTexto 2">
+            <a:extLst>
+              <a:ext uri="{FF2B5EF4-FFF2-40B4-BE49-F238E27FC236}">
+                <a16:creationId xmlns:a16="http://schemas.microsoft.com/office/drawing/2014/main" id="{C6012945-09F3-CCE9-2501-19D1682B2503}"/>
+              </a:ext>
+            </a:extLst>
+          </p:cNvPr>
+          <p:cNvSpPr txBox="1"/>
+          <p:nvPr/>
+        </p:nvSpPr>
+        <p:spPr>
+          <a:xfrm>
+            <a:off x="444907" y="2231096"/>
+            <a:ext cx="3615813" cy="523220"/>
+          </a:xfrm>
+          <a:prstGeom prst="rect">
+            <a:avLst/>
+          </a:prstGeom>
+          <a:noFill/>
+        </p:spPr>
+        <p:txBody>
+          <a:bodyPr wrap="square" rtlCol="0">
+            <a:spAutoFit/>
+          </a:bodyPr>
+          <a:lstStyle/>
+          <a:p>
+            <a:r>
+              <a:rPr lang="en-US" sz="2800" dirty="0"/>
+              <a:t>Logistic Regression</a:t>
+            </a:r>
+          </a:p>
+        </p:txBody>
+      </p:sp>
+      <p:sp>
+        <p:nvSpPr>
+          <p:cNvPr id="4" name="CuadroTexto 3">
+            <a:extLst>
+              <a:ext uri="{FF2B5EF4-FFF2-40B4-BE49-F238E27FC236}">
+                <a16:creationId xmlns:a16="http://schemas.microsoft.com/office/drawing/2014/main" id="{C2431B3D-F068-463F-B0FD-494C2BFC21D5}"/>
+              </a:ext>
+            </a:extLst>
+          </p:cNvPr>
+          <p:cNvSpPr txBox="1"/>
+          <p:nvPr/>
+        </p:nvSpPr>
+        <p:spPr>
+          <a:xfrm>
+            <a:off x="444907" y="3013501"/>
+            <a:ext cx="3615813" cy="830997"/>
+          </a:xfrm>
+          <a:prstGeom prst="rect">
+            <a:avLst/>
+          </a:prstGeom>
+          <a:noFill/>
+        </p:spPr>
+        <p:txBody>
+          <a:bodyPr wrap="square">
+            <a:spAutoFit/>
+          </a:bodyPr>
+          <a:lstStyle/>
+          <a:p>
+            <a:r>
+              <a:rPr lang="en-GB" sz="2400" dirty="0"/>
+              <a:t>Accuracy: 0.9174</a:t>
+            </a:r>
+          </a:p>
+          <a:p>
+            <a:r>
+              <a:rPr lang="en-GB" sz="2400" dirty="0"/>
+              <a:t>MCC: 0.8360</a:t>
+            </a:r>
+          </a:p>
+        </p:txBody>
+      </p:sp>
+      <p:sp>
+        <p:nvSpPr>
+          <p:cNvPr id="5" name="CuadroTexto 4">
+            <a:extLst>
+              <a:ext uri="{FF2B5EF4-FFF2-40B4-BE49-F238E27FC236}">
+                <a16:creationId xmlns:a16="http://schemas.microsoft.com/office/drawing/2014/main" id="{B80C9D72-FA8A-9D97-F568-063629B8BCB9}"/>
+              </a:ext>
+            </a:extLst>
+          </p:cNvPr>
+          <p:cNvSpPr txBox="1"/>
+          <p:nvPr/>
+        </p:nvSpPr>
+        <p:spPr>
+          <a:xfrm>
+            <a:off x="5203725" y="2221434"/>
+            <a:ext cx="3495368" cy="523220"/>
+          </a:xfrm>
+          <a:prstGeom prst="rect">
+            <a:avLst/>
+          </a:prstGeom>
+          <a:noFill/>
+        </p:spPr>
+        <p:txBody>
+          <a:bodyPr wrap="square" rtlCol="0">
+            <a:spAutoFit/>
+          </a:bodyPr>
+          <a:lstStyle/>
+          <a:p>
+            <a:r>
+              <a:rPr lang="en-US" sz="2800" dirty="0"/>
+              <a:t>Linear Regression</a:t>
+            </a:r>
+          </a:p>
+        </p:txBody>
+      </p:sp>
+      <p:sp>
+        <p:nvSpPr>
+          <p:cNvPr id="6" name="CuadroTexto 5">
+            <a:extLst>
+              <a:ext uri="{FF2B5EF4-FFF2-40B4-BE49-F238E27FC236}">
+                <a16:creationId xmlns:a16="http://schemas.microsoft.com/office/drawing/2014/main" id="{D94C15AE-62FF-1579-4D49-84A8A88DF538}"/>
+              </a:ext>
+            </a:extLst>
+          </p:cNvPr>
+          <p:cNvSpPr txBox="1"/>
+          <p:nvPr/>
+        </p:nvSpPr>
+        <p:spPr>
+          <a:xfrm>
+            <a:off x="5203725" y="2984260"/>
+            <a:ext cx="3615813" cy="830997"/>
+          </a:xfrm>
+          <a:prstGeom prst="rect">
+            <a:avLst/>
+          </a:prstGeom>
+          <a:noFill/>
+        </p:spPr>
+        <p:txBody>
+          <a:bodyPr wrap="square">
+            <a:spAutoFit/>
+          </a:bodyPr>
+          <a:lstStyle/>
+          <a:p>
+            <a:r>
+              <a:rPr lang="en-GB" sz="2400" dirty="0"/>
+              <a:t>Accuracy: 0.9067</a:t>
+            </a:r>
+          </a:p>
+          <a:p>
+            <a:r>
+              <a:rPr lang="en-GB" sz="2400" dirty="0"/>
+              <a:t>MCC: 0.8134</a:t>
+            </a:r>
+          </a:p>
+        </p:txBody>
+      </p:sp>
+    </p:spTree>
+    <p:extLst>
+      <p:ext uri="{BB962C8B-B14F-4D97-AF65-F5344CB8AC3E}">
+        <p14:creationId xmlns:p14="http://schemas.microsoft.com/office/powerpoint/2010/main" val="1027927280"/>
+      </p:ext>
+    </p:extLst>
+  </p:cSld>
+  <p:clrMapOvr>
+    <a:masterClrMapping/>
+  </p:clrMapOvr>
+</p:sld>
+</file>
+
+<file path=ppt/slides/slide21.xml><?xml version="1.0" encoding="utf-8"?>
+<p:sld xmlns:a="http://schemas.openxmlformats.org/drawingml/2006/main" xmlns:r="http://schemas.openxmlformats.org/officeDocument/2006/relationships" xmlns:p="http://schemas.openxmlformats.org/presentationml/2006/main">
+  <p:cSld>
+    <p:spTree>
+      <p:nvGrpSpPr>
+        <p:cNvPr id="1" name="">
+          <a:extLst>
+            <a:ext uri="{FF2B5EF4-FFF2-40B4-BE49-F238E27FC236}">
+              <a16:creationId xmlns:a16="http://schemas.microsoft.com/office/drawing/2014/main" id="{010D87A0-2F9B-2461-3F52-01FEB5A4F4A8}"/>
+            </a:ext>
+          </a:extLst>
+        </p:cNvPr>
+        <p:cNvGrpSpPr/>
+        <p:nvPr/>
+      </p:nvGrpSpPr>
+      <p:grpSpPr>
+        <a:xfrm>
+          <a:off x="0" y="0"/>
+          <a:ext cx="0" cy="0"/>
+          <a:chOff x="0" y="0"/>
+          <a:chExt cx="0" cy="0"/>
+        </a:xfrm>
+      </p:grpSpPr>
+      <p:sp>
+        <p:nvSpPr>
+          <p:cNvPr id="2" name="Título 1">
+            <a:extLst>
+              <a:ext uri="{FF2B5EF4-FFF2-40B4-BE49-F238E27FC236}">
+                <a16:creationId xmlns:a16="http://schemas.microsoft.com/office/drawing/2014/main" id="{B8FF9B33-C5C7-16BD-F787-9410BD2DB20E}"/>
+              </a:ext>
+            </a:extLst>
+          </p:cNvPr>
+          <p:cNvSpPr txBox="1">
+            <a:spLocks/>
+          </p:cNvSpPr>
+          <p:nvPr/>
+        </p:nvSpPr>
+        <p:spPr>
+          <a:xfrm>
+            <a:off x="-685800" y="581435"/>
+            <a:ext cx="10515600" cy="1325563"/>
+          </a:xfrm>
+          <a:prstGeom prst="rect">
+            <a:avLst/>
+          </a:prstGeom>
+        </p:spPr>
+        <p:txBody>
+          <a:bodyPr/>
+          <a:lstStyle>
+            <a:lvl1pPr algn="ctr" defTabSz="457200" rtl="0" eaLnBrk="1" latinLnBrk="0" hangingPunct="1">
+              <a:spcBef>
+                <a:spcPct val="0"/>
+              </a:spcBef>
+              <a:buNone/>
+              <a:defRPr sz="4400" kern="1200">
+                <a:solidFill>
+                  <a:schemeClr val="tx1"/>
+                </a:solidFill>
+                <a:latin typeface="+mj-lt"/>
+                <a:ea typeface="+mj-ea"/>
+                <a:cs typeface="+mj-cs"/>
+              </a:defRPr>
+            </a:lvl1pPr>
+          </a:lstStyle>
+          <a:p>
+            <a:r>
+              <a:rPr lang="en-US" dirty="0"/>
+              <a:t>New dataset results</a:t>
+            </a:r>
+            <a:endParaRPr lang="en-GB" dirty="0"/>
+          </a:p>
+        </p:txBody>
+      </p:sp>
+      <p:pic>
+        <p:nvPicPr>
+          <p:cNvPr id="18" name="Imagen 17">
+            <a:extLst>
+              <a:ext uri="{FF2B5EF4-FFF2-40B4-BE49-F238E27FC236}">
+                <a16:creationId xmlns:a16="http://schemas.microsoft.com/office/drawing/2014/main" id="{B8B4D22B-4DC1-6092-E162-9C415D362E89}"/>
+              </a:ext>
+            </a:extLst>
+          </p:cNvPr>
+          <p:cNvPicPr>
+            <a:picLocks noChangeAspect="1"/>
+          </p:cNvPicPr>
+          <p:nvPr/>
+        </p:nvPicPr>
+        <p:blipFill>
+          <a:blip r:embed="rId2"/>
+          <a:stretch>
+            <a:fillRect/>
+          </a:stretch>
+        </p:blipFill>
+        <p:spPr>
+          <a:xfrm>
+            <a:off x="0" y="1789490"/>
+            <a:ext cx="9144000" cy="4280598"/>
+          </a:xfrm>
+          <a:prstGeom prst="rect">
+            <a:avLst/>
+          </a:prstGeom>
+        </p:spPr>
+      </p:pic>
+    </p:spTree>
+    <p:extLst>
+      <p:ext uri="{BB962C8B-B14F-4D97-AF65-F5344CB8AC3E}">
+        <p14:creationId xmlns:p14="http://schemas.microsoft.com/office/powerpoint/2010/main" val="1257786793"/>
+      </p:ext>
+    </p:extLst>
+  </p:cSld>
+  <p:clrMapOvr>
+    <a:masterClrMapping/>
+  </p:clrMapOvr>
+</p:sld>
+</file>
+
+<file path=ppt/slides/slide22.xml><?xml version="1.0" encoding="utf-8"?>
+<p:sld xmlns:a="http://schemas.openxmlformats.org/drawingml/2006/main" xmlns:r="http://schemas.openxmlformats.org/officeDocument/2006/relationships" xmlns:p="http://schemas.openxmlformats.org/presentationml/2006/main" show="0">
+  <p:cSld>
+    <p:spTree>
+      <p:nvGrpSpPr>
+        <p:cNvPr id="1" name=""/>
+        <p:cNvGrpSpPr/>
+        <p:nvPr/>
+      </p:nvGrpSpPr>
+      <p:grpSpPr>
+        <a:xfrm>
+          <a:off x="0" y="0"/>
+          <a:ext cx="0" cy="0"/>
+          <a:chOff x="0" y="0"/>
+          <a:chExt cx="0" cy="0"/>
+        </a:xfrm>
+      </p:grpSpPr>
+      <p:sp>
+        <p:nvSpPr>
+          <p:cNvPr id="2" name="Title 1"/>
+          <p:cNvSpPr>
+            <a:spLocks noGrp="1"/>
+          </p:cNvSpPr>
+          <p:nvPr>
+            <p:ph type="title"/>
+          </p:nvPr>
+        </p:nvSpPr>
+        <p:spPr/>
+        <p:txBody>
+          <a:bodyPr/>
+          <a:lstStyle/>
+          <a:p>
+            <a:r>
+              <a:t>Takeaways</a:t>
+            </a:r>
+          </a:p>
+        </p:txBody>
+      </p:sp>
+      <p:sp>
+        <p:nvSpPr>
+          <p:cNvPr id="3" name="Content Placeholder 2"/>
+          <p:cNvSpPr>
+            <a:spLocks noGrp="1"/>
+          </p:cNvSpPr>
+          <p:nvPr>
+            <p:ph idx="1"/>
+          </p:nvPr>
+        </p:nvSpPr>
+        <p:spPr/>
+        <p:txBody>
+          <a:bodyPr/>
+          <a:lstStyle/>
+          <a:p>
+            <a:r>
+              <a:t>Classic models achieve strong performance</a:t>
+            </a:r>
+          </a:p>
+          <a:p>
+            <a:r>
+              <a:t>Performance is likely inflated by dataset bias</a:t>
+            </a:r>
+          </a:p>
+          <a:p>
+            <a:r>
+              <a:t>Subject leakage is extreme and must be handled</a:t>
+            </a:r>
+          </a:p>
+          <a:p>
+            <a:r>
+              <a:t>Future work: debiasing, cross-source validation</a:t>
             </a:r>
           </a:p>
         </p:txBody>

--- a/fake-news-classifier.pptx
+++ b/fake-news-classifier.pptx
@@ -19,14 +19,15 @@
     <p:sldId id="264" r:id="rId13"/>
     <p:sldId id="269" r:id="rId14"/>
     <p:sldId id="270" r:id="rId15"/>
-    <p:sldId id="272" r:id="rId16"/>
-    <p:sldId id="271" r:id="rId17"/>
-    <p:sldId id="273" r:id="rId18"/>
-    <p:sldId id="274" r:id="rId19"/>
-    <p:sldId id="275" r:id="rId20"/>
-    <p:sldId id="276" r:id="rId21"/>
-    <p:sldId id="277" r:id="rId22"/>
-    <p:sldId id="265" r:id="rId23"/>
+    <p:sldId id="278" r:id="rId16"/>
+    <p:sldId id="272" r:id="rId17"/>
+    <p:sldId id="271" r:id="rId18"/>
+    <p:sldId id="273" r:id="rId19"/>
+    <p:sldId id="274" r:id="rId20"/>
+    <p:sldId id="275" r:id="rId21"/>
+    <p:sldId id="276" r:id="rId22"/>
+    <p:sldId id="277" r:id="rId23"/>
+    <p:sldId id="265" r:id="rId24"/>
   </p:sldIdLst>
   <p:sldSz cx="9144000" cy="6858000" type="screen4x3"/>
   <p:notesSz cx="6858000" cy="9144000"/>
@@ -323,7 +324,7 @@
           <a:p>
             <a:fld id="{5BCAD085-E8A6-8845-BD4E-CB4CCA059FC4}" type="datetimeFigureOut">
               <a:rPr lang="en-US" smtClean="0"/>
-              <a:t>1/20/2026</a:t>
+              <a:t>1/21/2026</a:t>
             </a:fld>
             <a:endParaRPr lang="en-US"/>
           </a:p>
@@ -491,7 +492,7 @@
           <a:p>
             <a:fld id="{5BCAD085-E8A6-8845-BD4E-CB4CCA059FC4}" type="datetimeFigureOut">
               <a:rPr lang="en-US" smtClean="0"/>
-              <a:t>1/20/2026</a:t>
+              <a:t>1/21/2026</a:t>
             </a:fld>
             <a:endParaRPr lang="en-US"/>
           </a:p>
@@ -669,7 +670,7 @@
           <a:p>
             <a:fld id="{5BCAD085-E8A6-8845-BD4E-CB4CCA059FC4}" type="datetimeFigureOut">
               <a:rPr lang="en-US" smtClean="0"/>
-              <a:t>1/20/2026</a:t>
+              <a:t>1/21/2026</a:t>
             </a:fld>
             <a:endParaRPr lang="en-US"/>
           </a:p>
@@ -837,7 +838,7 @@
           <a:p>
             <a:fld id="{5BCAD085-E8A6-8845-BD4E-CB4CCA059FC4}" type="datetimeFigureOut">
               <a:rPr lang="en-US" smtClean="0"/>
-              <a:t>1/20/2026</a:t>
+              <a:t>1/21/2026</a:t>
             </a:fld>
             <a:endParaRPr lang="en-US"/>
           </a:p>
@@ -1082,7 +1083,7 @@
           <a:p>
             <a:fld id="{5BCAD085-E8A6-8845-BD4E-CB4CCA059FC4}" type="datetimeFigureOut">
               <a:rPr lang="en-US" smtClean="0"/>
-              <a:t>1/20/2026</a:t>
+              <a:t>1/21/2026</a:t>
             </a:fld>
             <a:endParaRPr lang="en-US"/>
           </a:p>
@@ -1367,7 +1368,7 @@
           <a:p>
             <a:fld id="{5BCAD085-E8A6-8845-BD4E-CB4CCA059FC4}" type="datetimeFigureOut">
               <a:rPr lang="en-US" smtClean="0"/>
-              <a:t>1/20/2026</a:t>
+              <a:t>1/21/2026</a:t>
             </a:fld>
             <a:endParaRPr lang="en-US"/>
           </a:p>
@@ -1786,7 +1787,7 @@
           <a:p>
             <a:fld id="{5BCAD085-E8A6-8845-BD4E-CB4CCA059FC4}" type="datetimeFigureOut">
               <a:rPr lang="en-US" smtClean="0"/>
-              <a:t>1/20/2026</a:t>
+              <a:t>1/21/2026</a:t>
             </a:fld>
             <a:endParaRPr lang="en-US"/>
           </a:p>
@@ -1903,7 +1904,7 @@
           <a:p>
             <a:fld id="{5BCAD085-E8A6-8845-BD4E-CB4CCA059FC4}" type="datetimeFigureOut">
               <a:rPr lang="en-US" smtClean="0"/>
-              <a:t>1/20/2026</a:t>
+              <a:t>1/21/2026</a:t>
             </a:fld>
             <a:endParaRPr lang="en-US"/>
           </a:p>
@@ -1998,7 +1999,7 @@
           <a:p>
             <a:fld id="{5BCAD085-E8A6-8845-BD4E-CB4CCA059FC4}" type="datetimeFigureOut">
               <a:rPr lang="en-US" smtClean="0"/>
-              <a:t>1/20/2026</a:t>
+              <a:t>1/21/2026</a:t>
             </a:fld>
             <a:endParaRPr lang="en-US"/>
           </a:p>
@@ -2273,7 +2274,7 @@
           <a:p>
             <a:fld id="{5BCAD085-E8A6-8845-BD4E-CB4CCA059FC4}" type="datetimeFigureOut">
               <a:rPr lang="en-US" smtClean="0"/>
-              <a:t>1/20/2026</a:t>
+              <a:t>1/21/2026</a:t>
             </a:fld>
             <a:endParaRPr lang="en-US"/>
           </a:p>
@@ -2525,7 +2526,7 @@
           <a:p>
             <a:fld id="{5BCAD085-E8A6-8845-BD4E-CB4CCA059FC4}" type="datetimeFigureOut">
               <a:rPr lang="en-US" smtClean="0"/>
-              <a:t>1/20/2026</a:t>
+              <a:t>1/21/2026</a:t>
             </a:fld>
             <a:endParaRPr lang="en-US"/>
           </a:p>
@@ -2736,7 +2737,7 @@
           <a:p>
             <a:fld id="{5BCAD085-E8A6-8845-BD4E-CB4CCA059FC4}" type="datetimeFigureOut">
               <a:rPr lang="en-US" smtClean="0"/>
-              <a:t>1/20/2026</a:t>
+              <a:t>1/21/2026</a:t>
             </a:fld>
             <a:endParaRPr lang="en-US"/>
           </a:p>
@@ -3616,7 +3617,7 @@
           <a:p>
             <a:r>
               <a:rPr lang="en-US" sz="9600" dirty="0"/>
-              <a:t>Title, text and subject are considered (subject with one hot encoding)</a:t>
+              <a:t>Title and text are considered</a:t>
             </a:r>
           </a:p>
           <a:p>
@@ -3791,42 +3792,6 @@
       </p:sp>
       <p:sp>
         <p:nvSpPr>
-          <p:cNvPr id="6" name="CuadroTexto 5">
-            <a:extLst>
-              <a:ext uri="{FF2B5EF4-FFF2-40B4-BE49-F238E27FC236}">
-                <a16:creationId xmlns:a16="http://schemas.microsoft.com/office/drawing/2014/main" id="{C640E110-128F-5B68-0C52-AFDDE47AD90B}"/>
-              </a:ext>
-            </a:extLst>
-          </p:cNvPr>
-          <p:cNvSpPr txBox="1"/>
-          <p:nvPr/>
-        </p:nvSpPr>
-        <p:spPr>
-          <a:xfrm>
-            <a:off x="4080389" y="1587461"/>
-            <a:ext cx="2861185" cy="523220"/>
-          </a:xfrm>
-          <a:prstGeom prst="rect">
-            <a:avLst/>
-          </a:prstGeom>
-          <a:noFill/>
-        </p:spPr>
-        <p:txBody>
-          <a:bodyPr wrap="square" rtlCol="0">
-            <a:spAutoFit/>
-          </a:bodyPr>
-          <a:lstStyle/>
-          <a:p>
-            <a:r>
-              <a:rPr lang="en-US" sz="2800" dirty="0"/>
-              <a:t>SVM with tuning</a:t>
-            </a:r>
-            <a:endParaRPr lang="en-GB" sz="2800" dirty="0"/>
-          </a:p>
-        </p:txBody>
-      </p:sp>
-      <p:sp>
-        <p:nvSpPr>
           <p:cNvPr id="7" name="CuadroTexto 6">
             <a:extLst>
               <a:ext uri="{FF2B5EF4-FFF2-40B4-BE49-F238E27FC236}">
@@ -3855,23 +3820,23 @@
           <a:p>
             <a:r>
               <a:rPr lang="en-GB" sz="2400" dirty="0"/>
-              <a:t>Accuracy: 0.9977 </a:t>
+              <a:t>Accuracy: 0.9945 </a:t>
             </a:r>
           </a:p>
           <a:p>
             <a:r>
               <a:rPr lang="en-GB" sz="2400" dirty="0"/>
-              <a:t>MCC: 0.9953</a:t>
+              <a:t>MCC: 0.9891</a:t>
             </a:r>
           </a:p>
         </p:txBody>
       </p:sp>
       <p:graphicFrame>
         <p:nvGraphicFramePr>
-          <p:cNvPr id="8" name="Tabla 7">
+          <p:cNvPr id="2" name="Tabla 1">
             <a:extLst>
               <a:ext uri="{FF2B5EF4-FFF2-40B4-BE49-F238E27FC236}">
-                <a16:creationId xmlns:a16="http://schemas.microsoft.com/office/drawing/2014/main" id="{D6142A35-657D-C758-CB68-06E3C5F243E5}"/>
+                <a16:creationId xmlns:a16="http://schemas.microsoft.com/office/drawing/2014/main" id="{F0CAF4DA-3082-5645-FFC6-4C6FB2D01C65}"/>
               </a:ext>
             </a:extLst>
           </p:cNvPr>
@@ -3881,13 +3846,13 @@
           <p:nvPr>
             <p:extLst>
               <p:ext uri="{D42A27DB-BD31-4B8C-83A1-F6EECF244321}">
-                <p14:modId xmlns:p14="http://schemas.microsoft.com/office/powerpoint/2010/main" val="2473977974"/>
+                <p14:modId xmlns:p14="http://schemas.microsoft.com/office/powerpoint/2010/main" val="1902010008"/>
               </p:ext>
             </p:extLst>
           </p:nvPr>
         </p:nvGraphicFramePr>
         <p:xfrm>
-          <a:off x="1505563" y="3747207"/>
+          <a:off x="2814480" y="3214346"/>
           <a:ext cx="5641260" cy="2468880"/>
         </p:xfrm>
         <a:graphic>
@@ -4327,7 +4292,7 @@
                       </a:pPr>
                       <a:r>
                         <a:rPr lang="en-GB" dirty="0"/>
-                        <a:t>1.00</a:t>
+                        <a:t>0.99</a:t>
                       </a:r>
                     </a:p>
                   </a:txBody>
@@ -4380,8 +4345,8 @@
                         <a:buNone/>
                       </a:pPr>
                       <a:r>
-                        <a:rPr lang="en-GB"/>
-                        <a:t>1.00</a:t>
+                        <a:rPr lang="en-GB" dirty="0"/>
+                        <a:t>0.99</a:t>
                       </a:r>
                     </a:p>
                   </a:txBody>
@@ -4550,7 +4515,7 @@
                       </a:pPr>
                       <a:r>
                         <a:rPr lang="en-GB" dirty="0"/>
-                        <a:t>1.00</a:t>
+                        <a:t>0.99</a:t>
                       </a:r>
                     </a:p>
                   </a:txBody>
@@ -4603,7 +4568,7 @@
                         <a:buNone/>
                       </a:pPr>
                       <a:r>
-                        <a:rPr lang="en-GB"/>
+                        <a:rPr lang="en-GB" dirty="0"/>
                         <a:t>1.00</a:t>
                       </a:r>
                     </a:p>
@@ -4657,8 +4622,8 @@
                         <a:buNone/>
                       </a:pPr>
                       <a:r>
-                        <a:rPr lang="en-GB"/>
-                        <a:t>1.00</a:t>
+                        <a:rPr lang="en-GB" dirty="0"/>
+                        <a:t>0.99</a:t>
                       </a:r>
                     </a:p>
                   </a:txBody>
@@ -4936,7 +4901,7 @@
                       </a:pPr>
                       <a:r>
                         <a:rPr lang="en-GB" dirty="0"/>
-                        <a:t>1.00</a:t>
+                        <a:t>0.99</a:t>
                       </a:r>
                     </a:p>
                   </a:txBody>
@@ -5050,10 +5015,802 @@
                         <a:buNone/>
                       </a:pPr>
                       <a:r>
-                        <a:rPr lang="en-GB" b="1"/>
-                        <a:t>Macro Avg</a:t>
+                        <a:rPr lang="en-GB" b="1" dirty="0"/>
+                        <a:t>Macro </a:t>
                       </a:r>
-                      <a:endParaRPr lang="en-GB"/>
+                      <a:r>
+                        <a:rPr lang="en-GB" b="1" dirty="0" err="1"/>
+                        <a:t>Avg</a:t>
+                      </a:r>
+                      <a:endParaRPr lang="en-GB" dirty="0"/>
+                    </a:p>
+                  </a:txBody>
+                  <a:tcPr anchor="ctr">
+                    <a:lnL w="12700" cap="flat" cmpd="sng" algn="ctr">
+                      <a:solidFill>
+                        <a:schemeClr val="tx1"/>
+                      </a:solidFill>
+                      <a:prstDash val="solid"/>
+                      <a:round/>
+                      <a:headEnd type="none" w="med" len="med"/>
+                      <a:tailEnd type="none" w="med" len="med"/>
+                    </a:lnL>
+                    <a:lnR w="12700" cap="flat" cmpd="sng" algn="ctr">
+                      <a:solidFill>
+                        <a:schemeClr val="tx1"/>
+                      </a:solidFill>
+                      <a:prstDash val="solid"/>
+                      <a:round/>
+                      <a:headEnd type="none" w="med" len="med"/>
+                      <a:tailEnd type="none" w="med" len="med"/>
+                    </a:lnR>
+                    <a:lnT w="12700" cap="flat" cmpd="sng" algn="ctr">
+                      <a:solidFill>
+                        <a:schemeClr val="tx1"/>
+                      </a:solidFill>
+                      <a:prstDash val="solid"/>
+                      <a:round/>
+                      <a:headEnd type="none" w="med" len="med"/>
+                      <a:tailEnd type="none" w="med" len="med"/>
+                    </a:lnT>
+                    <a:lnB w="12700" cap="flat" cmpd="sng" algn="ctr">
+                      <a:solidFill>
+                        <a:schemeClr val="tx1"/>
+                      </a:solidFill>
+                      <a:prstDash val="solid"/>
+                      <a:round/>
+                      <a:headEnd type="none" w="med" len="med"/>
+                      <a:tailEnd type="none" w="med" len="med"/>
+                    </a:lnB>
+                    <a:noFill/>
+                  </a:tcPr>
+                </a:tc>
+                <a:tc>
+                  <a:txBody>
+                    <a:bodyPr/>
+                    <a:lstStyle/>
+                    <a:p>
+                      <a:pPr>
+                        <a:buNone/>
+                      </a:pPr>
+                      <a:r>
+                        <a:rPr lang="en-GB" dirty="0"/>
+                        <a:t>0.99</a:t>
+                      </a:r>
+                    </a:p>
+                  </a:txBody>
+                  <a:tcPr anchor="ctr">
+                    <a:lnL w="12700" cap="flat" cmpd="sng" algn="ctr">
+                      <a:solidFill>
+                        <a:schemeClr val="tx1"/>
+                      </a:solidFill>
+                      <a:prstDash val="solid"/>
+                      <a:round/>
+                      <a:headEnd type="none" w="med" len="med"/>
+                      <a:tailEnd type="none" w="med" len="med"/>
+                    </a:lnL>
+                    <a:lnR w="12700" cap="flat" cmpd="sng" algn="ctr">
+                      <a:solidFill>
+                        <a:schemeClr val="tx1"/>
+                      </a:solidFill>
+                      <a:prstDash val="solid"/>
+                      <a:round/>
+                      <a:headEnd type="none" w="med" len="med"/>
+                      <a:tailEnd type="none" w="med" len="med"/>
+                    </a:lnR>
+                    <a:lnT w="12700" cap="flat" cmpd="sng" algn="ctr">
+                      <a:solidFill>
+                        <a:schemeClr val="tx1"/>
+                      </a:solidFill>
+                      <a:prstDash val="solid"/>
+                      <a:round/>
+                      <a:headEnd type="none" w="med" len="med"/>
+                      <a:tailEnd type="none" w="med" len="med"/>
+                    </a:lnT>
+                    <a:lnB w="12700" cap="flat" cmpd="sng" algn="ctr">
+                      <a:solidFill>
+                        <a:schemeClr val="tx1"/>
+                      </a:solidFill>
+                      <a:prstDash val="solid"/>
+                      <a:round/>
+                      <a:headEnd type="none" w="med" len="med"/>
+                      <a:tailEnd type="none" w="med" len="med"/>
+                    </a:lnB>
+                    <a:noFill/>
+                  </a:tcPr>
+                </a:tc>
+                <a:tc>
+                  <a:txBody>
+                    <a:bodyPr/>
+                    <a:lstStyle/>
+                    <a:p>
+                      <a:pPr>
+                        <a:buNone/>
+                      </a:pPr>
+                      <a:r>
+                        <a:rPr lang="en-GB" dirty="0"/>
+                        <a:t>0.99</a:t>
+                      </a:r>
+                    </a:p>
+                  </a:txBody>
+                  <a:tcPr anchor="ctr">
+                    <a:lnL w="12700" cap="flat" cmpd="sng" algn="ctr">
+                      <a:solidFill>
+                        <a:schemeClr val="tx1"/>
+                      </a:solidFill>
+                      <a:prstDash val="solid"/>
+                      <a:round/>
+                      <a:headEnd type="none" w="med" len="med"/>
+                      <a:tailEnd type="none" w="med" len="med"/>
+                    </a:lnL>
+                    <a:lnR w="12700" cap="flat" cmpd="sng" algn="ctr">
+                      <a:solidFill>
+                        <a:schemeClr val="tx1"/>
+                      </a:solidFill>
+                      <a:prstDash val="solid"/>
+                      <a:round/>
+                      <a:headEnd type="none" w="med" len="med"/>
+                      <a:tailEnd type="none" w="med" len="med"/>
+                    </a:lnR>
+                    <a:lnT w="12700" cap="flat" cmpd="sng" algn="ctr">
+                      <a:solidFill>
+                        <a:schemeClr val="tx1"/>
+                      </a:solidFill>
+                      <a:prstDash val="solid"/>
+                      <a:round/>
+                      <a:headEnd type="none" w="med" len="med"/>
+                      <a:tailEnd type="none" w="med" len="med"/>
+                    </a:lnT>
+                    <a:lnB w="12700" cap="flat" cmpd="sng" algn="ctr">
+                      <a:solidFill>
+                        <a:schemeClr val="tx1"/>
+                      </a:solidFill>
+                      <a:prstDash val="solid"/>
+                      <a:round/>
+                      <a:headEnd type="none" w="med" len="med"/>
+                      <a:tailEnd type="none" w="med" len="med"/>
+                    </a:lnB>
+                    <a:noFill/>
+                  </a:tcPr>
+                </a:tc>
+                <a:tc>
+                  <a:txBody>
+                    <a:bodyPr/>
+                    <a:lstStyle/>
+                    <a:p>
+                      <a:pPr>
+                        <a:buNone/>
+                      </a:pPr>
+                      <a:r>
+                        <a:rPr lang="en-GB" dirty="0"/>
+                        <a:t>0.99</a:t>
+                      </a:r>
+                    </a:p>
+                  </a:txBody>
+                  <a:tcPr anchor="ctr">
+                    <a:lnL w="12700" cap="flat" cmpd="sng" algn="ctr">
+                      <a:solidFill>
+                        <a:schemeClr val="tx1"/>
+                      </a:solidFill>
+                      <a:prstDash val="solid"/>
+                      <a:round/>
+                      <a:headEnd type="none" w="med" len="med"/>
+                      <a:tailEnd type="none" w="med" len="med"/>
+                    </a:lnL>
+                    <a:lnR w="12700" cap="flat" cmpd="sng" algn="ctr">
+                      <a:solidFill>
+                        <a:schemeClr val="tx1"/>
+                      </a:solidFill>
+                      <a:prstDash val="solid"/>
+                      <a:round/>
+                      <a:headEnd type="none" w="med" len="med"/>
+                      <a:tailEnd type="none" w="med" len="med"/>
+                    </a:lnR>
+                    <a:lnT w="12700" cap="flat" cmpd="sng" algn="ctr">
+                      <a:solidFill>
+                        <a:schemeClr val="tx1"/>
+                      </a:solidFill>
+                      <a:prstDash val="solid"/>
+                      <a:round/>
+                      <a:headEnd type="none" w="med" len="med"/>
+                      <a:tailEnd type="none" w="med" len="med"/>
+                    </a:lnT>
+                    <a:lnB w="12700" cap="flat" cmpd="sng" algn="ctr">
+                      <a:solidFill>
+                        <a:schemeClr val="tx1"/>
+                      </a:solidFill>
+                      <a:prstDash val="solid"/>
+                      <a:round/>
+                      <a:headEnd type="none" w="med" len="med"/>
+                      <a:tailEnd type="none" w="med" len="med"/>
+                    </a:lnB>
+                    <a:noFill/>
+                  </a:tcPr>
+                </a:tc>
+                <a:tc>
+                  <a:txBody>
+                    <a:bodyPr/>
+                    <a:lstStyle/>
+                    <a:p>
+                      <a:pPr>
+                        <a:buNone/>
+                      </a:pPr>
+                      <a:r>
+                        <a:rPr lang="en-GB" dirty="0"/>
+                        <a:t>8980</a:t>
+                      </a:r>
+                    </a:p>
+                  </a:txBody>
+                  <a:tcPr anchor="ctr">
+                    <a:lnL w="12700" cap="flat" cmpd="sng" algn="ctr">
+                      <a:solidFill>
+                        <a:schemeClr val="tx1"/>
+                      </a:solidFill>
+                      <a:prstDash val="solid"/>
+                      <a:round/>
+                      <a:headEnd type="none" w="med" len="med"/>
+                      <a:tailEnd type="none" w="med" len="med"/>
+                    </a:lnL>
+                    <a:lnR w="12700" cap="flat" cmpd="sng" algn="ctr">
+                      <a:solidFill>
+                        <a:schemeClr val="tx1"/>
+                      </a:solidFill>
+                      <a:prstDash val="solid"/>
+                      <a:round/>
+                      <a:headEnd type="none" w="med" len="med"/>
+                      <a:tailEnd type="none" w="med" len="med"/>
+                    </a:lnR>
+                    <a:lnT w="12700" cap="flat" cmpd="sng" algn="ctr">
+                      <a:solidFill>
+                        <a:schemeClr val="tx1"/>
+                      </a:solidFill>
+                      <a:prstDash val="solid"/>
+                      <a:round/>
+                      <a:headEnd type="none" w="med" len="med"/>
+                      <a:tailEnd type="none" w="med" len="med"/>
+                    </a:lnT>
+                    <a:lnB w="12700" cap="flat" cmpd="sng" algn="ctr">
+                      <a:solidFill>
+                        <a:schemeClr val="tx1"/>
+                      </a:solidFill>
+                      <a:prstDash val="solid"/>
+                      <a:round/>
+                      <a:headEnd type="none" w="med" len="med"/>
+                      <a:tailEnd type="none" w="med" len="med"/>
+                    </a:lnB>
+                    <a:noFill/>
+                  </a:tcPr>
+                </a:tc>
+                <a:extLst>
+                  <a:ext uri="{0D108BD9-81ED-4DB2-BD59-A6C34878D82A}">
+                    <a16:rowId xmlns:a16="http://schemas.microsoft.com/office/drawing/2014/main" val="3625560076"/>
+                  </a:ext>
+                </a:extLst>
+              </a:tr>
+              <a:tr h="334707">
+                <a:tc>
+                  <a:txBody>
+                    <a:bodyPr/>
+                    <a:lstStyle/>
+                    <a:p>
+                      <a:pPr>
+                        <a:buNone/>
+                      </a:pPr>
+                      <a:r>
+                        <a:rPr lang="en-GB" b="1" dirty="0"/>
+                        <a:t>Weighted </a:t>
+                      </a:r>
+                      <a:r>
+                        <a:rPr lang="en-GB" b="1" dirty="0" err="1"/>
+                        <a:t>Avg</a:t>
+                      </a:r>
+                      <a:endParaRPr lang="en-GB" dirty="0"/>
+                    </a:p>
+                  </a:txBody>
+                  <a:tcPr anchor="ctr">
+                    <a:lnL w="12700" cap="flat" cmpd="sng" algn="ctr">
+                      <a:solidFill>
+                        <a:schemeClr val="tx1"/>
+                      </a:solidFill>
+                      <a:prstDash val="solid"/>
+                      <a:round/>
+                      <a:headEnd type="none" w="med" len="med"/>
+                      <a:tailEnd type="none" w="med" len="med"/>
+                    </a:lnL>
+                    <a:lnR w="12700" cap="flat" cmpd="sng" algn="ctr">
+                      <a:solidFill>
+                        <a:schemeClr val="tx1"/>
+                      </a:solidFill>
+                      <a:prstDash val="solid"/>
+                      <a:round/>
+                      <a:headEnd type="none" w="med" len="med"/>
+                      <a:tailEnd type="none" w="med" len="med"/>
+                    </a:lnR>
+                    <a:lnT w="12700" cap="flat" cmpd="sng" algn="ctr">
+                      <a:solidFill>
+                        <a:schemeClr val="tx1"/>
+                      </a:solidFill>
+                      <a:prstDash val="solid"/>
+                      <a:round/>
+                      <a:headEnd type="none" w="med" len="med"/>
+                      <a:tailEnd type="none" w="med" len="med"/>
+                    </a:lnT>
+                    <a:lnB w="12700" cap="flat" cmpd="sng" algn="ctr">
+                      <a:solidFill>
+                        <a:schemeClr val="tx1"/>
+                      </a:solidFill>
+                      <a:prstDash val="solid"/>
+                      <a:round/>
+                      <a:headEnd type="none" w="med" len="med"/>
+                      <a:tailEnd type="none" w="med" len="med"/>
+                    </a:lnB>
+                    <a:noFill/>
+                  </a:tcPr>
+                </a:tc>
+                <a:tc>
+                  <a:txBody>
+                    <a:bodyPr/>
+                    <a:lstStyle/>
+                    <a:p>
+                      <a:pPr>
+                        <a:buNone/>
+                      </a:pPr>
+                      <a:r>
+                        <a:rPr lang="en-GB" dirty="0"/>
+                        <a:t>0.99</a:t>
+                      </a:r>
+                    </a:p>
+                  </a:txBody>
+                  <a:tcPr anchor="ctr">
+                    <a:lnL w="12700" cap="flat" cmpd="sng" algn="ctr">
+                      <a:solidFill>
+                        <a:schemeClr val="tx1"/>
+                      </a:solidFill>
+                      <a:prstDash val="solid"/>
+                      <a:round/>
+                      <a:headEnd type="none" w="med" len="med"/>
+                      <a:tailEnd type="none" w="med" len="med"/>
+                    </a:lnL>
+                    <a:lnR w="12700" cap="flat" cmpd="sng" algn="ctr">
+                      <a:solidFill>
+                        <a:schemeClr val="tx1"/>
+                      </a:solidFill>
+                      <a:prstDash val="solid"/>
+                      <a:round/>
+                      <a:headEnd type="none" w="med" len="med"/>
+                      <a:tailEnd type="none" w="med" len="med"/>
+                    </a:lnR>
+                    <a:lnT w="12700" cap="flat" cmpd="sng" algn="ctr">
+                      <a:solidFill>
+                        <a:schemeClr val="tx1"/>
+                      </a:solidFill>
+                      <a:prstDash val="solid"/>
+                      <a:round/>
+                      <a:headEnd type="none" w="med" len="med"/>
+                      <a:tailEnd type="none" w="med" len="med"/>
+                    </a:lnT>
+                    <a:lnB w="12700" cap="flat" cmpd="sng" algn="ctr">
+                      <a:solidFill>
+                        <a:schemeClr val="tx1"/>
+                      </a:solidFill>
+                      <a:prstDash val="solid"/>
+                      <a:round/>
+                      <a:headEnd type="none" w="med" len="med"/>
+                      <a:tailEnd type="none" w="med" len="med"/>
+                    </a:lnB>
+                    <a:noFill/>
+                  </a:tcPr>
+                </a:tc>
+                <a:tc>
+                  <a:txBody>
+                    <a:bodyPr/>
+                    <a:lstStyle/>
+                    <a:p>
+                      <a:pPr>
+                        <a:buNone/>
+                      </a:pPr>
+                      <a:r>
+                        <a:rPr lang="en-GB" dirty="0"/>
+                        <a:t>0.99</a:t>
+                      </a:r>
+                    </a:p>
+                  </a:txBody>
+                  <a:tcPr anchor="ctr">
+                    <a:lnL w="12700" cap="flat" cmpd="sng" algn="ctr">
+                      <a:solidFill>
+                        <a:schemeClr val="tx1"/>
+                      </a:solidFill>
+                      <a:prstDash val="solid"/>
+                      <a:round/>
+                      <a:headEnd type="none" w="med" len="med"/>
+                      <a:tailEnd type="none" w="med" len="med"/>
+                    </a:lnL>
+                    <a:lnR w="12700" cap="flat" cmpd="sng" algn="ctr">
+                      <a:solidFill>
+                        <a:schemeClr val="tx1"/>
+                      </a:solidFill>
+                      <a:prstDash val="solid"/>
+                      <a:round/>
+                      <a:headEnd type="none" w="med" len="med"/>
+                      <a:tailEnd type="none" w="med" len="med"/>
+                    </a:lnR>
+                    <a:lnT w="12700" cap="flat" cmpd="sng" algn="ctr">
+                      <a:solidFill>
+                        <a:schemeClr val="tx1"/>
+                      </a:solidFill>
+                      <a:prstDash val="solid"/>
+                      <a:round/>
+                      <a:headEnd type="none" w="med" len="med"/>
+                      <a:tailEnd type="none" w="med" len="med"/>
+                    </a:lnT>
+                    <a:lnB w="12700" cap="flat" cmpd="sng" algn="ctr">
+                      <a:solidFill>
+                        <a:schemeClr val="tx1"/>
+                      </a:solidFill>
+                      <a:prstDash val="solid"/>
+                      <a:round/>
+                      <a:headEnd type="none" w="med" len="med"/>
+                      <a:tailEnd type="none" w="med" len="med"/>
+                    </a:lnB>
+                    <a:noFill/>
+                  </a:tcPr>
+                </a:tc>
+                <a:tc>
+                  <a:txBody>
+                    <a:bodyPr/>
+                    <a:lstStyle/>
+                    <a:p>
+                      <a:pPr>
+                        <a:buNone/>
+                      </a:pPr>
+                      <a:r>
+                        <a:rPr lang="en-GB" dirty="0"/>
+                        <a:t>0.99</a:t>
+                      </a:r>
+                    </a:p>
+                  </a:txBody>
+                  <a:tcPr anchor="ctr">
+                    <a:lnL w="12700" cap="flat" cmpd="sng" algn="ctr">
+                      <a:solidFill>
+                        <a:schemeClr val="tx1"/>
+                      </a:solidFill>
+                      <a:prstDash val="solid"/>
+                      <a:round/>
+                      <a:headEnd type="none" w="med" len="med"/>
+                      <a:tailEnd type="none" w="med" len="med"/>
+                    </a:lnL>
+                    <a:lnR w="12700" cap="flat" cmpd="sng" algn="ctr">
+                      <a:solidFill>
+                        <a:schemeClr val="tx1"/>
+                      </a:solidFill>
+                      <a:prstDash val="solid"/>
+                      <a:round/>
+                      <a:headEnd type="none" w="med" len="med"/>
+                      <a:tailEnd type="none" w="med" len="med"/>
+                    </a:lnR>
+                    <a:lnT w="12700" cap="flat" cmpd="sng" algn="ctr">
+                      <a:solidFill>
+                        <a:schemeClr val="tx1"/>
+                      </a:solidFill>
+                      <a:prstDash val="solid"/>
+                      <a:round/>
+                      <a:headEnd type="none" w="med" len="med"/>
+                      <a:tailEnd type="none" w="med" len="med"/>
+                    </a:lnT>
+                    <a:lnB w="12700" cap="flat" cmpd="sng" algn="ctr">
+                      <a:solidFill>
+                        <a:schemeClr val="tx1"/>
+                      </a:solidFill>
+                      <a:prstDash val="solid"/>
+                      <a:round/>
+                      <a:headEnd type="none" w="med" len="med"/>
+                      <a:tailEnd type="none" w="med" len="med"/>
+                    </a:lnB>
+                    <a:noFill/>
+                  </a:tcPr>
+                </a:tc>
+                <a:tc>
+                  <a:txBody>
+                    <a:bodyPr/>
+                    <a:lstStyle/>
+                    <a:p>
+                      <a:pPr>
+                        <a:buNone/>
+                      </a:pPr>
+                      <a:r>
+                        <a:rPr lang="en-GB" dirty="0"/>
+                        <a:t>8980</a:t>
+                      </a:r>
+                    </a:p>
+                  </a:txBody>
+                  <a:tcPr anchor="ctr">
+                    <a:lnL w="12700" cap="flat" cmpd="sng" algn="ctr">
+                      <a:solidFill>
+                        <a:schemeClr val="tx1"/>
+                      </a:solidFill>
+                      <a:prstDash val="solid"/>
+                      <a:round/>
+                      <a:headEnd type="none" w="med" len="med"/>
+                      <a:tailEnd type="none" w="med" len="med"/>
+                    </a:lnL>
+                    <a:lnR w="12700" cap="flat" cmpd="sng" algn="ctr">
+                      <a:solidFill>
+                        <a:schemeClr val="tx1"/>
+                      </a:solidFill>
+                      <a:prstDash val="solid"/>
+                      <a:round/>
+                      <a:headEnd type="none" w="med" len="med"/>
+                      <a:tailEnd type="none" w="med" len="med"/>
+                    </a:lnR>
+                    <a:lnT w="12700" cap="flat" cmpd="sng" algn="ctr">
+                      <a:solidFill>
+                        <a:schemeClr val="tx1"/>
+                      </a:solidFill>
+                      <a:prstDash val="solid"/>
+                      <a:round/>
+                      <a:headEnd type="none" w="med" len="med"/>
+                      <a:tailEnd type="none" w="med" len="med"/>
+                    </a:lnT>
+                    <a:lnB w="12700" cap="flat" cmpd="sng" algn="ctr">
+                      <a:solidFill>
+                        <a:schemeClr val="tx1"/>
+                      </a:solidFill>
+                      <a:prstDash val="solid"/>
+                      <a:round/>
+                      <a:headEnd type="none" w="med" len="med"/>
+                      <a:tailEnd type="none" w="med" len="med"/>
+                    </a:lnB>
+                    <a:noFill/>
+                  </a:tcPr>
+                </a:tc>
+                <a:extLst>
+                  <a:ext uri="{0D108BD9-81ED-4DB2-BD59-A6C34878D82A}">
+                    <a16:rowId xmlns:a16="http://schemas.microsoft.com/office/drawing/2014/main" val="4085293771"/>
+                  </a:ext>
+                </a:extLst>
+              </a:tr>
+            </a:tbl>
+          </a:graphicData>
+        </a:graphic>
+      </p:graphicFrame>
+    </p:spTree>
+    <p:extLst>
+      <p:ext uri="{BB962C8B-B14F-4D97-AF65-F5344CB8AC3E}">
+        <p14:creationId xmlns:p14="http://schemas.microsoft.com/office/powerpoint/2010/main" val="145002764"/>
+      </p:ext>
+    </p:extLst>
+  </p:cSld>
+  <p:clrMapOvr>
+    <a:masterClrMapping/>
+  </p:clrMapOvr>
+</p:sld>
+</file>
+
+<file path=ppt/slides/slide15.xml><?xml version="1.0" encoding="utf-8"?>
+<p:sld xmlns:a="http://schemas.openxmlformats.org/drawingml/2006/main" xmlns:r="http://schemas.openxmlformats.org/officeDocument/2006/relationships" xmlns:p="http://schemas.openxmlformats.org/presentationml/2006/main">
+  <p:cSld>
+    <p:spTree>
+      <p:nvGrpSpPr>
+        <p:cNvPr id="1" name="">
+          <a:extLst>
+            <a:ext uri="{FF2B5EF4-FFF2-40B4-BE49-F238E27FC236}">
+              <a16:creationId xmlns:a16="http://schemas.microsoft.com/office/drawing/2014/main" id="{290DD34F-17FD-16E0-77D1-695A8D4978B9}"/>
+            </a:ext>
+          </a:extLst>
+        </p:cNvPr>
+        <p:cNvGrpSpPr/>
+        <p:nvPr/>
+      </p:nvGrpSpPr>
+      <p:grpSpPr>
+        <a:xfrm>
+          <a:off x="0" y="0"/>
+          <a:ext cx="0" cy="0"/>
+          <a:chOff x="0" y="0"/>
+          <a:chExt cx="0" cy="0"/>
+        </a:xfrm>
+      </p:grpSpPr>
+      <p:sp>
+        <p:nvSpPr>
+          <p:cNvPr id="4" name="Título 1">
+            <a:extLst>
+              <a:ext uri="{FF2B5EF4-FFF2-40B4-BE49-F238E27FC236}">
+                <a16:creationId xmlns:a16="http://schemas.microsoft.com/office/drawing/2014/main" id="{E991D3E0-E845-AB71-8EC1-7AD33C038EE7}"/>
+              </a:ext>
+            </a:extLst>
+          </p:cNvPr>
+          <p:cNvSpPr>
+            <a:spLocks noGrp="1"/>
+          </p:cNvSpPr>
+          <p:nvPr>
+            <p:ph type="title"/>
+          </p:nvPr>
+        </p:nvSpPr>
+        <p:spPr>
+          <a:xfrm>
+            <a:off x="110612" y="355293"/>
+            <a:ext cx="8590936" cy="1325563"/>
+          </a:xfrm>
+        </p:spPr>
+        <p:txBody>
+          <a:bodyPr/>
+          <a:lstStyle/>
+          <a:p>
+            <a:r>
+              <a:rPr lang="en-US" dirty="0"/>
+              <a:t>SVM results</a:t>
+            </a:r>
+            <a:endParaRPr lang="en-GB" dirty="0"/>
+          </a:p>
+        </p:txBody>
+      </p:sp>
+      <p:sp>
+        <p:nvSpPr>
+          <p:cNvPr id="6" name="CuadroTexto 5">
+            <a:extLst>
+              <a:ext uri="{FF2B5EF4-FFF2-40B4-BE49-F238E27FC236}">
+                <a16:creationId xmlns:a16="http://schemas.microsoft.com/office/drawing/2014/main" id="{938257A2-2EE3-563E-6C19-34AE142DE275}"/>
+              </a:ext>
+            </a:extLst>
+          </p:cNvPr>
+          <p:cNvSpPr txBox="1"/>
+          <p:nvPr/>
+        </p:nvSpPr>
+        <p:spPr>
+          <a:xfrm>
+            <a:off x="688260" y="1577759"/>
+            <a:ext cx="2861185" cy="523220"/>
+          </a:xfrm>
+          <a:prstGeom prst="rect">
+            <a:avLst/>
+          </a:prstGeom>
+          <a:noFill/>
+        </p:spPr>
+        <p:txBody>
+          <a:bodyPr wrap="square" rtlCol="0">
+            <a:spAutoFit/>
+          </a:bodyPr>
+          <a:lstStyle/>
+          <a:p>
+            <a:r>
+              <a:rPr lang="en-US" sz="2800" dirty="0"/>
+              <a:t>SVM with tuning</a:t>
+            </a:r>
+            <a:endParaRPr lang="en-GB" sz="2800" dirty="0"/>
+          </a:p>
+        </p:txBody>
+      </p:sp>
+      <p:graphicFrame>
+        <p:nvGraphicFramePr>
+          <p:cNvPr id="8" name="Tabla 7">
+            <a:extLst>
+              <a:ext uri="{FF2B5EF4-FFF2-40B4-BE49-F238E27FC236}">
+                <a16:creationId xmlns:a16="http://schemas.microsoft.com/office/drawing/2014/main" id="{E3C27232-EBDA-0439-D729-EBD428DBFBFC}"/>
+              </a:ext>
+            </a:extLst>
+          </p:cNvPr>
+          <p:cNvGraphicFramePr>
+            <a:graphicFrameLocks noGrp="1"/>
+          </p:cNvGraphicFramePr>
+          <p:nvPr>
+            <p:extLst>
+              <p:ext uri="{D42A27DB-BD31-4B8C-83A1-F6EECF244321}">
+                <p14:modId xmlns:p14="http://schemas.microsoft.com/office/powerpoint/2010/main" val="1097060912"/>
+              </p:ext>
+            </p:extLst>
+          </p:nvPr>
+        </p:nvGraphicFramePr>
+        <p:xfrm>
+          <a:off x="2814480" y="3214346"/>
+          <a:ext cx="5641260" cy="2468880"/>
+        </p:xfrm>
+        <a:graphic>
+          <a:graphicData uri="http://schemas.openxmlformats.org/drawingml/2006/table">
+            <a:tbl>
+              <a:tblPr/>
+              <a:tblGrid>
+                <a:gridCol w="1256072">
+                  <a:extLst>
+                    <a:ext uri="{9D8B030D-6E8A-4147-A177-3AD203B41FA5}">
+                      <a16:colId xmlns:a16="http://schemas.microsoft.com/office/drawing/2014/main" val="2529616538"/>
+                    </a:ext>
+                  </a:extLst>
+                </a:gridCol>
+                <a:gridCol w="1101213">
+                  <a:extLst>
+                    <a:ext uri="{9D8B030D-6E8A-4147-A177-3AD203B41FA5}">
+                      <a16:colId xmlns:a16="http://schemas.microsoft.com/office/drawing/2014/main" val="300941870"/>
+                    </a:ext>
+                  </a:extLst>
+                </a:gridCol>
+                <a:gridCol w="1027471">
+                  <a:extLst>
+                    <a:ext uri="{9D8B030D-6E8A-4147-A177-3AD203B41FA5}">
+                      <a16:colId xmlns:a16="http://schemas.microsoft.com/office/drawing/2014/main" val="1070201705"/>
+                    </a:ext>
+                  </a:extLst>
+                </a:gridCol>
+                <a:gridCol w="1128252">
+                  <a:extLst>
+                    <a:ext uri="{9D8B030D-6E8A-4147-A177-3AD203B41FA5}">
+                      <a16:colId xmlns:a16="http://schemas.microsoft.com/office/drawing/2014/main" val="417569215"/>
+                    </a:ext>
+                  </a:extLst>
+                </a:gridCol>
+                <a:gridCol w="1128252">
+                  <a:extLst>
+                    <a:ext uri="{9D8B030D-6E8A-4147-A177-3AD203B41FA5}">
+                      <a16:colId xmlns:a16="http://schemas.microsoft.com/office/drawing/2014/main" val="2682234863"/>
+                    </a:ext>
+                  </a:extLst>
+                </a:gridCol>
+              </a:tblGrid>
+              <a:tr h="334707">
+                <a:tc>
+                  <a:txBody>
+                    <a:bodyPr/>
+                    <a:lstStyle/>
+                    <a:p>
+                      <a:pPr>
+                        <a:buNone/>
+                      </a:pPr>
+                      <a:r>
+                        <a:rPr lang="en-GB" dirty="0"/>
+                        <a:t>Class</a:t>
+                      </a:r>
+                    </a:p>
+                  </a:txBody>
+                  <a:tcPr anchor="ctr">
+                    <a:lnL w="12700" cap="flat" cmpd="sng" algn="ctr">
+                      <a:solidFill>
+                        <a:schemeClr val="tx1"/>
+                      </a:solidFill>
+                      <a:prstDash val="solid"/>
+                      <a:round/>
+                      <a:headEnd type="none" w="med" len="med"/>
+                      <a:tailEnd type="none" w="med" len="med"/>
+                    </a:lnL>
+                    <a:lnR w="12700" cap="flat" cmpd="sng" algn="ctr">
+                      <a:solidFill>
+                        <a:schemeClr val="tx1"/>
+                      </a:solidFill>
+                      <a:prstDash val="solid"/>
+                      <a:round/>
+                      <a:headEnd type="none" w="med" len="med"/>
+                      <a:tailEnd type="none" w="med" len="med"/>
+                    </a:lnR>
+                    <a:lnT w="12700" cap="flat" cmpd="sng" algn="ctr">
+                      <a:solidFill>
+                        <a:schemeClr val="tx1"/>
+                      </a:solidFill>
+                      <a:prstDash val="solid"/>
+                      <a:round/>
+                      <a:headEnd type="none" w="med" len="med"/>
+                      <a:tailEnd type="none" w="med" len="med"/>
+                    </a:lnT>
+                    <a:lnB w="12700" cap="flat" cmpd="sng" algn="ctr">
+                      <a:solidFill>
+                        <a:schemeClr val="tx1"/>
+                      </a:solidFill>
+                      <a:prstDash val="solid"/>
+                      <a:round/>
+                      <a:headEnd type="none" w="med" len="med"/>
+                      <a:tailEnd type="none" w="med" len="med"/>
+                    </a:lnB>
+                    <a:noFill/>
+                  </a:tcPr>
+                </a:tc>
+                <a:tc>
+                  <a:txBody>
+                    <a:bodyPr/>
+                    <a:lstStyle/>
+                    <a:p>
+                      <a:pPr>
+                        <a:buNone/>
+                      </a:pPr>
+                      <a:r>
+                        <a:rPr lang="en-GB" dirty="0"/>
+                        <a:t>Precision</a:t>
+                      </a:r>
                     </a:p>
                   </a:txBody>
                   <a:tcPr anchor="ctr">
@@ -5106,7 +5863,61 @@
                       </a:pPr>
                       <a:r>
                         <a:rPr lang="en-GB"/>
-                        <a:t>1.00</a:t>
+                        <a:t>Recall</a:t>
+                      </a:r>
+                    </a:p>
+                  </a:txBody>
+                  <a:tcPr anchor="ctr">
+                    <a:lnL w="12700" cap="flat" cmpd="sng" algn="ctr">
+                      <a:solidFill>
+                        <a:schemeClr val="tx1"/>
+                      </a:solidFill>
+                      <a:prstDash val="solid"/>
+                      <a:round/>
+                      <a:headEnd type="none" w="med" len="med"/>
+                      <a:tailEnd type="none" w="med" len="med"/>
+                    </a:lnL>
+                    <a:lnR w="12700" cap="flat" cmpd="sng" algn="ctr">
+                      <a:solidFill>
+                        <a:schemeClr val="tx1"/>
+                      </a:solidFill>
+                      <a:prstDash val="solid"/>
+                      <a:round/>
+                      <a:headEnd type="none" w="med" len="med"/>
+                      <a:tailEnd type="none" w="med" len="med"/>
+                    </a:lnR>
+                    <a:lnT w="12700" cap="flat" cmpd="sng" algn="ctr">
+                      <a:solidFill>
+                        <a:schemeClr val="tx1"/>
+                      </a:solidFill>
+                      <a:prstDash val="solid"/>
+                      <a:round/>
+                      <a:headEnd type="none" w="med" len="med"/>
+                      <a:tailEnd type="none" w="med" len="med"/>
+                    </a:lnT>
+                    <a:lnB w="12700" cap="flat" cmpd="sng" algn="ctr">
+                      <a:solidFill>
+                        <a:schemeClr val="tx1"/>
+                      </a:solidFill>
+                      <a:prstDash val="solid"/>
+                      <a:round/>
+                      <a:headEnd type="none" w="med" len="med"/>
+                      <a:tailEnd type="none" w="med" len="med"/>
+                    </a:lnB>
+                    <a:noFill/>
+                  </a:tcPr>
+                </a:tc>
+                <a:tc>
+                  <a:txBody>
+                    <a:bodyPr/>
+                    <a:lstStyle/>
+                    <a:p>
+                      <a:pPr>
+                        <a:buNone/>
+                      </a:pPr>
+                      <a:r>
+                        <a:rPr lang="en-GB" dirty="0"/>
+                        <a:t>F1-score</a:t>
                       </a:r>
                     </a:p>
                   </a:txBody>
@@ -5160,7 +5971,68 @@
                       </a:pPr>
                       <a:r>
                         <a:rPr lang="en-GB"/>
-                        <a:t>1.00</a:t>
+                        <a:t>Support</a:t>
+                      </a:r>
+                    </a:p>
+                  </a:txBody>
+                  <a:tcPr anchor="ctr">
+                    <a:lnL w="12700" cap="flat" cmpd="sng" algn="ctr">
+                      <a:solidFill>
+                        <a:schemeClr val="tx1"/>
+                      </a:solidFill>
+                      <a:prstDash val="solid"/>
+                      <a:round/>
+                      <a:headEnd type="none" w="med" len="med"/>
+                      <a:tailEnd type="none" w="med" len="med"/>
+                    </a:lnL>
+                    <a:lnR w="12700" cap="flat" cmpd="sng" algn="ctr">
+                      <a:solidFill>
+                        <a:schemeClr val="tx1"/>
+                      </a:solidFill>
+                      <a:prstDash val="solid"/>
+                      <a:round/>
+                      <a:headEnd type="none" w="med" len="med"/>
+                      <a:tailEnd type="none" w="med" len="med"/>
+                    </a:lnR>
+                    <a:lnT w="12700" cap="flat" cmpd="sng" algn="ctr">
+                      <a:solidFill>
+                        <a:schemeClr val="tx1"/>
+                      </a:solidFill>
+                      <a:prstDash val="solid"/>
+                      <a:round/>
+                      <a:headEnd type="none" w="med" len="med"/>
+                      <a:tailEnd type="none" w="med" len="med"/>
+                    </a:lnT>
+                    <a:lnB w="12700" cap="flat" cmpd="sng" algn="ctr">
+                      <a:solidFill>
+                        <a:schemeClr val="tx1"/>
+                      </a:solidFill>
+                      <a:prstDash val="solid"/>
+                      <a:round/>
+                      <a:headEnd type="none" w="med" len="med"/>
+                      <a:tailEnd type="none" w="med" len="med"/>
+                    </a:lnB>
+                    <a:noFill/>
+                  </a:tcPr>
+                </a:tc>
+                <a:extLst>
+                  <a:ext uri="{0D108BD9-81ED-4DB2-BD59-A6C34878D82A}">
+                    <a16:rowId xmlns:a16="http://schemas.microsoft.com/office/drawing/2014/main" val="618331434"/>
+                  </a:ext>
+                </a:extLst>
+              </a:tr>
+              <a:tr h="334707">
+                <a:tc>
+                  <a:txBody>
+                    <a:bodyPr/>
+                    <a:lstStyle/>
+                    <a:p>
+                      <a:pPr>
+                        <a:buNone/>
+                      </a:pPr>
+                      <a:r>
+                        <a:rPr lang="en-GB" dirty="0"/>
+                        <a:t>Real</a:t>
                       </a:r>
                     </a:p>
                   </a:txBody>
@@ -5268,6 +6140,951 @@
                       </a:pPr>
                       <a:r>
                         <a:rPr lang="en-GB" dirty="0"/>
+                        <a:t>1.00</a:t>
+                      </a:r>
+                    </a:p>
+                  </a:txBody>
+                  <a:tcPr anchor="ctr">
+                    <a:lnL w="12700" cap="flat" cmpd="sng" algn="ctr">
+                      <a:solidFill>
+                        <a:schemeClr val="tx1"/>
+                      </a:solidFill>
+                      <a:prstDash val="solid"/>
+                      <a:round/>
+                      <a:headEnd type="none" w="med" len="med"/>
+                      <a:tailEnd type="none" w="med" len="med"/>
+                    </a:lnL>
+                    <a:lnR w="12700" cap="flat" cmpd="sng" algn="ctr">
+                      <a:solidFill>
+                        <a:schemeClr val="tx1"/>
+                      </a:solidFill>
+                      <a:prstDash val="solid"/>
+                      <a:round/>
+                      <a:headEnd type="none" w="med" len="med"/>
+                      <a:tailEnd type="none" w="med" len="med"/>
+                    </a:lnR>
+                    <a:lnT w="12700" cap="flat" cmpd="sng" algn="ctr">
+                      <a:solidFill>
+                        <a:schemeClr val="tx1"/>
+                      </a:solidFill>
+                      <a:prstDash val="solid"/>
+                      <a:round/>
+                      <a:headEnd type="none" w="med" len="med"/>
+                      <a:tailEnd type="none" w="med" len="med"/>
+                    </a:lnT>
+                    <a:lnB w="12700" cap="flat" cmpd="sng" algn="ctr">
+                      <a:solidFill>
+                        <a:schemeClr val="tx1"/>
+                      </a:solidFill>
+                      <a:prstDash val="solid"/>
+                      <a:round/>
+                      <a:headEnd type="none" w="med" len="med"/>
+                      <a:tailEnd type="none" w="med" len="med"/>
+                    </a:lnB>
+                    <a:noFill/>
+                  </a:tcPr>
+                </a:tc>
+                <a:tc>
+                  <a:txBody>
+                    <a:bodyPr/>
+                    <a:lstStyle/>
+                    <a:p>
+                      <a:pPr>
+                        <a:buNone/>
+                      </a:pPr>
+                      <a:r>
+                        <a:rPr lang="en-GB" dirty="0"/>
+                        <a:t>1.00</a:t>
+                      </a:r>
+                    </a:p>
+                  </a:txBody>
+                  <a:tcPr anchor="ctr">
+                    <a:lnL w="12700" cap="flat" cmpd="sng" algn="ctr">
+                      <a:solidFill>
+                        <a:schemeClr val="tx1"/>
+                      </a:solidFill>
+                      <a:prstDash val="solid"/>
+                      <a:round/>
+                      <a:headEnd type="none" w="med" len="med"/>
+                      <a:tailEnd type="none" w="med" len="med"/>
+                    </a:lnL>
+                    <a:lnR w="12700" cap="flat" cmpd="sng" algn="ctr">
+                      <a:solidFill>
+                        <a:schemeClr val="tx1"/>
+                      </a:solidFill>
+                      <a:prstDash val="solid"/>
+                      <a:round/>
+                      <a:headEnd type="none" w="med" len="med"/>
+                      <a:tailEnd type="none" w="med" len="med"/>
+                    </a:lnR>
+                    <a:lnT w="12700" cap="flat" cmpd="sng" algn="ctr">
+                      <a:solidFill>
+                        <a:schemeClr val="tx1"/>
+                      </a:solidFill>
+                      <a:prstDash val="solid"/>
+                      <a:round/>
+                      <a:headEnd type="none" w="med" len="med"/>
+                      <a:tailEnd type="none" w="med" len="med"/>
+                    </a:lnT>
+                    <a:lnB w="12700" cap="flat" cmpd="sng" algn="ctr">
+                      <a:solidFill>
+                        <a:schemeClr val="tx1"/>
+                      </a:solidFill>
+                      <a:prstDash val="solid"/>
+                      <a:round/>
+                      <a:headEnd type="none" w="med" len="med"/>
+                      <a:tailEnd type="none" w="med" len="med"/>
+                    </a:lnB>
+                    <a:noFill/>
+                  </a:tcPr>
+                </a:tc>
+                <a:tc>
+                  <a:txBody>
+                    <a:bodyPr/>
+                    <a:lstStyle/>
+                    <a:p>
+                      <a:pPr>
+                        <a:buNone/>
+                      </a:pPr>
+                      <a:r>
+                        <a:rPr lang="en-GB" dirty="0"/>
+                        <a:t>4284</a:t>
+                      </a:r>
+                    </a:p>
+                  </a:txBody>
+                  <a:tcPr anchor="ctr">
+                    <a:lnL w="12700" cap="flat" cmpd="sng" algn="ctr">
+                      <a:solidFill>
+                        <a:schemeClr val="tx1"/>
+                      </a:solidFill>
+                      <a:prstDash val="solid"/>
+                      <a:round/>
+                      <a:headEnd type="none" w="med" len="med"/>
+                      <a:tailEnd type="none" w="med" len="med"/>
+                    </a:lnL>
+                    <a:lnR w="12700" cap="flat" cmpd="sng" algn="ctr">
+                      <a:solidFill>
+                        <a:schemeClr val="tx1"/>
+                      </a:solidFill>
+                      <a:prstDash val="solid"/>
+                      <a:round/>
+                      <a:headEnd type="none" w="med" len="med"/>
+                      <a:tailEnd type="none" w="med" len="med"/>
+                    </a:lnR>
+                    <a:lnT w="12700" cap="flat" cmpd="sng" algn="ctr">
+                      <a:solidFill>
+                        <a:schemeClr val="tx1"/>
+                      </a:solidFill>
+                      <a:prstDash val="solid"/>
+                      <a:round/>
+                      <a:headEnd type="none" w="med" len="med"/>
+                      <a:tailEnd type="none" w="med" len="med"/>
+                    </a:lnT>
+                    <a:lnB w="12700" cap="flat" cmpd="sng" algn="ctr">
+                      <a:solidFill>
+                        <a:schemeClr val="tx1"/>
+                      </a:solidFill>
+                      <a:prstDash val="solid"/>
+                      <a:round/>
+                      <a:headEnd type="none" w="med" len="med"/>
+                      <a:tailEnd type="none" w="med" len="med"/>
+                    </a:lnB>
+                    <a:noFill/>
+                  </a:tcPr>
+                </a:tc>
+                <a:extLst>
+                  <a:ext uri="{0D108BD9-81ED-4DB2-BD59-A6C34878D82A}">
+                    <a16:rowId xmlns:a16="http://schemas.microsoft.com/office/drawing/2014/main" val="1867091066"/>
+                  </a:ext>
+                </a:extLst>
+              </a:tr>
+              <a:tr h="334707">
+                <a:tc>
+                  <a:txBody>
+                    <a:bodyPr/>
+                    <a:lstStyle/>
+                    <a:p>
+                      <a:pPr>
+                        <a:buNone/>
+                      </a:pPr>
+                      <a:r>
+                        <a:rPr lang="en-GB" dirty="0"/>
+                        <a:t>Fake</a:t>
+                      </a:r>
+                    </a:p>
+                  </a:txBody>
+                  <a:tcPr anchor="ctr">
+                    <a:lnL w="12700" cap="flat" cmpd="sng" algn="ctr">
+                      <a:solidFill>
+                        <a:schemeClr val="tx1"/>
+                      </a:solidFill>
+                      <a:prstDash val="solid"/>
+                      <a:round/>
+                      <a:headEnd type="none" w="med" len="med"/>
+                      <a:tailEnd type="none" w="med" len="med"/>
+                    </a:lnL>
+                    <a:lnR w="12700" cap="flat" cmpd="sng" algn="ctr">
+                      <a:solidFill>
+                        <a:schemeClr val="tx1"/>
+                      </a:solidFill>
+                      <a:prstDash val="solid"/>
+                      <a:round/>
+                      <a:headEnd type="none" w="med" len="med"/>
+                      <a:tailEnd type="none" w="med" len="med"/>
+                    </a:lnR>
+                    <a:lnT w="12700" cap="flat" cmpd="sng" algn="ctr">
+                      <a:solidFill>
+                        <a:schemeClr val="tx1"/>
+                      </a:solidFill>
+                      <a:prstDash val="solid"/>
+                      <a:round/>
+                      <a:headEnd type="none" w="med" len="med"/>
+                      <a:tailEnd type="none" w="med" len="med"/>
+                    </a:lnT>
+                    <a:lnB w="12700" cap="flat" cmpd="sng" algn="ctr">
+                      <a:solidFill>
+                        <a:schemeClr val="tx1"/>
+                      </a:solidFill>
+                      <a:prstDash val="solid"/>
+                      <a:round/>
+                      <a:headEnd type="none" w="med" len="med"/>
+                      <a:tailEnd type="none" w="med" len="med"/>
+                    </a:lnB>
+                    <a:noFill/>
+                  </a:tcPr>
+                </a:tc>
+                <a:tc>
+                  <a:txBody>
+                    <a:bodyPr/>
+                    <a:lstStyle/>
+                    <a:p>
+                      <a:pPr>
+                        <a:buNone/>
+                      </a:pPr>
+                      <a:r>
+                        <a:rPr lang="en-GB" dirty="0"/>
+                        <a:t>1.00</a:t>
+                      </a:r>
+                    </a:p>
+                  </a:txBody>
+                  <a:tcPr anchor="ctr">
+                    <a:lnL w="12700" cap="flat" cmpd="sng" algn="ctr">
+                      <a:solidFill>
+                        <a:schemeClr val="tx1"/>
+                      </a:solidFill>
+                      <a:prstDash val="solid"/>
+                      <a:round/>
+                      <a:headEnd type="none" w="med" len="med"/>
+                      <a:tailEnd type="none" w="med" len="med"/>
+                    </a:lnL>
+                    <a:lnR w="12700" cap="flat" cmpd="sng" algn="ctr">
+                      <a:solidFill>
+                        <a:schemeClr val="tx1"/>
+                      </a:solidFill>
+                      <a:prstDash val="solid"/>
+                      <a:round/>
+                      <a:headEnd type="none" w="med" len="med"/>
+                      <a:tailEnd type="none" w="med" len="med"/>
+                    </a:lnR>
+                    <a:lnT w="12700" cap="flat" cmpd="sng" algn="ctr">
+                      <a:solidFill>
+                        <a:schemeClr val="tx1"/>
+                      </a:solidFill>
+                      <a:prstDash val="solid"/>
+                      <a:round/>
+                      <a:headEnd type="none" w="med" len="med"/>
+                      <a:tailEnd type="none" w="med" len="med"/>
+                    </a:lnT>
+                    <a:lnB w="12700" cap="flat" cmpd="sng" algn="ctr">
+                      <a:solidFill>
+                        <a:schemeClr val="tx1"/>
+                      </a:solidFill>
+                      <a:prstDash val="solid"/>
+                      <a:round/>
+                      <a:headEnd type="none" w="med" len="med"/>
+                      <a:tailEnd type="none" w="med" len="med"/>
+                    </a:lnB>
+                    <a:noFill/>
+                  </a:tcPr>
+                </a:tc>
+                <a:tc>
+                  <a:txBody>
+                    <a:bodyPr/>
+                    <a:lstStyle/>
+                    <a:p>
+                      <a:pPr>
+                        <a:buNone/>
+                      </a:pPr>
+                      <a:r>
+                        <a:rPr lang="en-GB" dirty="0"/>
+                        <a:t>1.00</a:t>
+                      </a:r>
+                    </a:p>
+                  </a:txBody>
+                  <a:tcPr anchor="ctr">
+                    <a:lnL w="12700" cap="flat" cmpd="sng" algn="ctr">
+                      <a:solidFill>
+                        <a:schemeClr val="tx1"/>
+                      </a:solidFill>
+                      <a:prstDash val="solid"/>
+                      <a:round/>
+                      <a:headEnd type="none" w="med" len="med"/>
+                      <a:tailEnd type="none" w="med" len="med"/>
+                    </a:lnL>
+                    <a:lnR w="12700" cap="flat" cmpd="sng" algn="ctr">
+                      <a:solidFill>
+                        <a:schemeClr val="tx1"/>
+                      </a:solidFill>
+                      <a:prstDash val="solid"/>
+                      <a:round/>
+                      <a:headEnd type="none" w="med" len="med"/>
+                      <a:tailEnd type="none" w="med" len="med"/>
+                    </a:lnR>
+                    <a:lnT w="12700" cap="flat" cmpd="sng" algn="ctr">
+                      <a:solidFill>
+                        <a:schemeClr val="tx1"/>
+                      </a:solidFill>
+                      <a:prstDash val="solid"/>
+                      <a:round/>
+                      <a:headEnd type="none" w="med" len="med"/>
+                      <a:tailEnd type="none" w="med" len="med"/>
+                    </a:lnT>
+                    <a:lnB w="12700" cap="flat" cmpd="sng" algn="ctr">
+                      <a:solidFill>
+                        <a:schemeClr val="tx1"/>
+                      </a:solidFill>
+                      <a:prstDash val="solid"/>
+                      <a:round/>
+                      <a:headEnd type="none" w="med" len="med"/>
+                      <a:tailEnd type="none" w="med" len="med"/>
+                    </a:lnB>
+                    <a:noFill/>
+                  </a:tcPr>
+                </a:tc>
+                <a:tc>
+                  <a:txBody>
+                    <a:bodyPr/>
+                    <a:lstStyle/>
+                    <a:p>
+                      <a:pPr>
+                        <a:buNone/>
+                      </a:pPr>
+                      <a:r>
+                        <a:rPr lang="en-GB" dirty="0"/>
+                        <a:t>1.00</a:t>
+                      </a:r>
+                    </a:p>
+                  </a:txBody>
+                  <a:tcPr anchor="ctr">
+                    <a:lnL w="12700" cap="flat" cmpd="sng" algn="ctr">
+                      <a:solidFill>
+                        <a:schemeClr val="tx1"/>
+                      </a:solidFill>
+                      <a:prstDash val="solid"/>
+                      <a:round/>
+                      <a:headEnd type="none" w="med" len="med"/>
+                      <a:tailEnd type="none" w="med" len="med"/>
+                    </a:lnL>
+                    <a:lnR w="12700" cap="flat" cmpd="sng" algn="ctr">
+                      <a:solidFill>
+                        <a:schemeClr val="tx1"/>
+                      </a:solidFill>
+                      <a:prstDash val="solid"/>
+                      <a:round/>
+                      <a:headEnd type="none" w="med" len="med"/>
+                      <a:tailEnd type="none" w="med" len="med"/>
+                    </a:lnR>
+                    <a:lnT w="12700" cap="flat" cmpd="sng" algn="ctr">
+                      <a:solidFill>
+                        <a:schemeClr val="tx1"/>
+                      </a:solidFill>
+                      <a:prstDash val="solid"/>
+                      <a:round/>
+                      <a:headEnd type="none" w="med" len="med"/>
+                      <a:tailEnd type="none" w="med" len="med"/>
+                    </a:lnT>
+                    <a:lnB w="12700" cap="flat" cmpd="sng" algn="ctr">
+                      <a:solidFill>
+                        <a:schemeClr val="tx1"/>
+                      </a:solidFill>
+                      <a:prstDash val="solid"/>
+                      <a:round/>
+                      <a:headEnd type="none" w="med" len="med"/>
+                      <a:tailEnd type="none" w="med" len="med"/>
+                    </a:lnB>
+                    <a:noFill/>
+                  </a:tcPr>
+                </a:tc>
+                <a:tc>
+                  <a:txBody>
+                    <a:bodyPr/>
+                    <a:lstStyle/>
+                    <a:p>
+                      <a:pPr>
+                        <a:buNone/>
+                      </a:pPr>
+                      <a:r>
+                        <a:rPr lang="en-GB" dirty="0"/>
+                        <a:t>4696</a:t>
+                      </a:r>
+                    </a:p>
+                  </a:txBody>
+                  <a:tcPr anchor="ctr">
+                    <a:lnL w="12700" cap="flat" cmpd="sng" algn="ctr">
+                      <a:solidFill>
+                        <a:schemeClr val="tx1"/>
+                      </a:solidFill>
+                      <a:prstDash val="solid"/>
+                      <a:round/>
+                      <a:headEnd type="none" w="med" len="med"/>
+                      <a:tailEnd type="none" w="med" len="med"/>
+                    </a:lnL>
+                    <a:lnR w="12700" cap="flat" cmpd="sng" algn="ctr">
+                      <a:solidFill>
+                        <a:schemeClr val="tx1"/>
+                      </a:solidFill>
+                      <a:prstDash val="solid"/>
+                      <a:round/>
+                      <a:headEnd type="none" w="med" len="med"/>
+                      <a:tailEnd type="none" w="med" len="med"/>
+                    </a:lnR>
+                    <a:lnT w="12700" cap="flat" cmpd="sng" algn="ctr">
+                      <a:solidFill>
+                        <a:schemeClr val="tx1"/>
+                      </a:solidFill>
+                      <a:prstDash val="solid"/>
+                      <a:round/>
+                      <a:headEnd type="none" w="med" len="med"/>
+                      <a:tailEnd type="none" w="med" len="med"/>
+                    </a:lnT>
+                    <a:lnB w="12700" cap="flat" cmpd="sng" algn="ctr">
+                      <a:solidFill>
+                        <a:schemeClr val="tx1"/>
+                      </a:solidFill>
+                      <a:prstDash val="solid"/>
+                      <a:round/>
+                      <a:headEnd type="none" w="med" len="med"/>
+                      <a:tailEnd type="none" w="med" len="med"/>
+                    </a:lnB>
+                    <a:noFill/>
+                  </a:tcPr>
+                </a:tc>
+                <a:extLst>
+                  <a:ext uri="{0D108BD9-81ED-4DB2-BD59-A6C34878D82A}">
+                    <a16:rowId xmlns:a16="http://schemas.microsoft.com/office/drawing/2014/main" val="678278828"/>
+                  </a:ext>
+                </a:extLst>
+              </a:tr>
+              <a:tr h="334707">
+                <a:tc>
+                  <a:txBody>
+                    <a:bodyPr/>
+                    <a:lstStyle/>
+                    <a:p>
+                      <a:pPr>
+                        <a:buNone/>
+                      </a:pPr>
+                      <a:r>
+                        <a:rPr lang="en-GB" b="1" dirty="0"/>
+                        <a:t>Accuracy</a:t>
+                      </a:r>
+                      <a:endParaRPr lang="en-GB" dirty="0"/>
+                    </a:p>
+                  </a:txBody>
+                  <a:tcPr anchor="ctr">
+                    <a:lnL w="12700" cap="flat" cmpd="sng" algn="ctr">
+                      <a:solidFill>
+                        <a:schemeClr val="tx1"/>
+                      </a:solidFill>
+                      <a:prstDash val="solid"/>
+                      <a:round/>
+                      <a:headEnd type="none" w="med" len="med"/>
+                      <a:tailEnd type="none" w="med" len="med"/>
+                    </a:lnL>
+                    <a:lnR w="12700" cap="flat" cmpd="sng" algn="ctr">
+                      <a:solidFill>
+                        <a:schemeClr val="tx1"/>
+                      </a:solidFill>
+                      <a:prstDash val="solid"/>
+                      <a:round/>
+                      <a:headEnd type="none" w="med" len="med"/>
+                      <a:tailEnd type="none" w="med" len="med"/>
+                    </a:lnR>
+                    <a:lnT w="12700" cap="flat" cmpd="sng" algn="ctr">
+                      <a:solidFill>
+                        <a:schemeClr val="tx1"/>
+                      </a:solidFill>
+                      <a:prstDash val="solid"/>
+                      <a:round/>
+                      <a:headEnd type="none" w="med" len="med"/>
+                      <a:tailEnd type="none" w="med" len="med"/>
+                    </a:lnT>
+                    <a:lnB w="12700" cap="flat" cmpd="sng" algn="ctr">
+                      <a:solidFill>
+                        <a:schemeClr val="tx1"/>
+                      </a:solidFill>
+                      <a:prstDash val="solid"/>
+                      <a:round/>
+                      <a:headEnd type="none" w="med" len="med"/>
+                      <a:tailEnd type="none" w="med" len="med"/>
+                    </a:lnB>
+                    <a:noFill/>
+                  </a:tcPr>
+                </a:tc>
+                <a:tc>
+                  <a:txBody>
+                    <a:bodyPr/>
+                    <a:lstStyle/>
+                    <a:p>
+                      <a:pPr>
+                        <a:buNone/>
+                      </a:pPr>
+                      <a:r>
+                        <a:rPr lang="en-GB" dirty="0"/>
+                        <a:t>-</a:t>
+                      </a:r>
+                    </a:p>
+                  </a:txBody>
+                  <a:tcPr anchor="ctr">
+                    <a:lnL w="12700" cap="flat" cmpd="sng" algn="ctr">
+                      <a:solidFill>
+                        <a:schemeClr val="tx1"/>
+                      </a:solidFill>
+                      <a:prstDash val="solid"/>
+                      <a:round/>
+                      <a:headEnd type="none" w="med" len="med"/>
+                      <a:tailEnd type="none" w="med" len="med"/>
+                    </a:lnL>
+                    <a:lnR w="12700" cap="flat" cmpd="sng" algn="ctr">
+                      <a:solidFill>
+                        <a:schemeClr val="tx1"/>
+                      </a:solidFill>
+                      <a:prstDash val="solid"/>
+                      <a:round/>
+                      <a:headEnd type="none" w="med" len="med"/>
+                      <a:tailEnd type="none" w="med" len="med"/>
+                    </a:lnR>
+                    <a:lnT w="12700" cap="flat" cmpd="sng" algn="ctr">
+                      <a:solidFill>
+                        <a:schemeClr val="tx1"/>
+                      </a:solidFill>
+                      <a:prstDash val="solid"/>
+                      <a:round/>
+                      <a:headEnd type="none" w="med" len="med"/>
+                      <a:tailEnd type="none" w="med" len="med"/>
+                    </a:lnT>
+                    <a:lnB w="12700" cap="flat" cmpd="sng" algn="ctr">
+                      <a:solidFill>
+                        <a:schemeClr val="tx1"/>
+                      </a:solidFill>
+                      <a:prstDash val="solid"/>
+                      <a:round/>
+                      <a:headEnd type="none" w="med" len="med"/>
+                      <a:tailEnd type="none" w="med" len="med"/>
+                    </a:lnB>
+                    <a:noFill/>
+                  </a:tcPr>
+                </a:tc>
+                <a:tc>
+                  <a:txBody>
+                    <a:bodyPr/>
+                    <a:lstStyle/>
+                    <a:p>
+                      <a:pPr>
+                        <a:buNone/>
+                      </a:pPr>
+                      <a:r>
+                        <a:rPr lang="en-GB" dirty="0"/>
+                        <a:t>-</a:t>
+                      </a:r>
+                    </a:p>
+                  </a:txBody>
+                  <a:tcPr anchor="ctr">
+                    <a:lnL w="12700" cap="flat" cmpd="sng" algn="ctr">
+                      <a:solidFill>
+                        <a:schemeClr val="tx1"/>
+                      </a:solidFill>
+                      <a:prstDash val="solid"/>
+                      <a:round/>
+                      <a:headEnd type="none" w="med" len="med"/>
+                      <a:tailEnd type="none" w="med" len="med"/>
+                    </a:lnL>
+                    <a:lnR w="12700" cap="flat" cmpd="sng" algn="ctr">
+                      <a:solidFill>
+                        <a:schemeClr val="tx1"/>
+                      </a:solidFill>
+                      <a:prstDash val="solid"/>
+                      <a:round/>
+                      <a:headEnd type="none" w="med" len="med"/>
+                      <a:tailEnd type="none" w="med" len="med"/>
+                    </a:lnR>
+                    <a:lnT w="12700" cap="flat" cmpd="sng" algn="ctr">
+                      <a:solidFill>
+                        <a:schemeClr val="tx1"/>
+                      </a:solidFill>
+                      <a:prstDash val="solid"/>
+                      <a:round/>
+                      <a:headEnd type="none" w="med" len="med"/>
+                      <a:tailEnd type="none" w="med" len="med"/>
+                    </a:lnT>
+                    <a:lnB w="12700" cap="flat" cmpd="sng" algn="ctr">
+                      <a:solidFill>
+                        <a:schemeClr val="tx1"/>
+                      </a:solidFill>
+                      <a:prstDash val="solid"/>
+                      <a:round/>
+                      <a:headEnd type="none" w="med" len="med"/>
+                      <a:tailEnd type="none" w="med" len="med"/>
+                    </a:lnB>
+                    <a:noFill/>
+                  </a:tcPr>
+                </a:tc>
+                <a:tc>
+                  <a:txBody>
+                    <a:bodyPr/>
+                    <a:lstStyle/>
+                    <a:p>
+                      <a:pPr>
+                        <a:buNone/>
+                      </a:pPr>
+                      <a:r>
+                        <a:rPr lang="en-GB" dirty="0"/>
+                        <a:t>1.00</a:t>
+                      </a:r>
+                    </a:p>
+                  </a:txBody>
+                  <a:tcPr anchor="ctr">
+                    <a:lnL w="12700" cap="flat" cmpd="sng" algn="ctr">
+                      <a:solidFill>
+                        <a:schemeClr val="tx1"/>
+                      </a:solidFill>
+                      <a:prstDash val="solid"/>
+                      <a:round/>
+                      <a:headEnd type="none" w="med" len="med"/>
+                      <a:tailEnd type="none" w="med" len="med"/>
+                    </a:lnL>
+                    <a:lnR w="12700" cap="flat" cmpd="sng" algn="ctr">
+                      <a:solidFill>
+                        <a:schemeClr val="tx1"/>
+                      </a:solidFill>
+                      <a:prstDash val="solid"/>
+                      <a:round/>
+                      <a:headEnd type="none" w="med" len="med"/>
+                      <a:tailEnd type="none" w="med" len="med"/>
+                    </a:lnR>
+                    <a:lnT w="12700" cap="flat" cmpd="sng" algn="ctr">
+                      <a:solidFill>
+                        <a:schemeClr val="tx1"/>
+                      </a:solidFill>
+                      <a:prstDash val="solid"/>
+                      <a:round/>
+                      <a:headEnd type="none" w="med" len="med"/>
+                      <a:tailEnd type="none" w="med" len="med"/>
+                    </a:lnT>
+                    <a:lnB w="12700" cap="flat" cmpd="sng" algn="ctr">
+                      <a:solidFill>
+                        <a:schemeClr val="tx1"/>
+                      </a:solidFill>
+                      <a:prstDash val="solid"/>
+                      <a:round/>
+                      <a:headEnd type="none" w="med" len="med"/>
+                      <a:tailEnd type="none" w="med" len="med"/>
+                    </a:lnB>
+                    <a:noFill/>
+                  </a:tcPr>
+                </a:tc>
+                <a:tc>
+                  <a:txBody>
+                    <a:bodyPr/>
+                    <a:lstStyle/>
+                    <a:p>
+                      <a:pPr>
+                        <a:buNone/>
+                      </a:pPr>
+                      <a:r>
+                        <a:rPr lang="en-GB" dirty="0"/>
+                        <a:t>8980</a:t>
+                      </a:r>
+                    </a:p>
+                  </a:txBody>
+                  <a:tcPr anchor="ctr">
+                    <a:lnL w="12700" cap="flat" cmpd="sng" algn="ctr">
+                      <a:solidFill>
+                        <a:schemeClr val="tx1"/>
+                      </a:solidFill>
+                      <a:prstDash val="solid"/>
+                      <a:round/>
+                      <a:headEnd type="none" w="med" len="med"/>
+                      <a:tailEnd type="none" w="med" len="med"/>
+                    </a:lnL>
+                    <a:lnR w="12700" cap="flat" cmpd="sng" algn="ctr">
+                      <a:solidFill>
+                        <a:schemeClr val="tx1"/>
+                      </a:solidFill>
+                      <a:prstDash val="solid"/>
+                      <a:round/>
+                      <a:headEnd type="none" w="med" len="med"/>
+                      <a:tailEnd type="none" w="med" len="med"/>
+                    </a:lnR>
+                    <a:lnT w="12700" cap="flat" cmpd="sng" algn="ctr">
+                      <a:solidFill>
+                        <a:schemeClr val="tx1"/>
+                      </a:solidFill>
+                      <a:prstDash val="solid"/>
+                      <a:round/>
+                      <a:headEnd type="none" w="med" len="med"/>
+                      <a:tailEnd type="none" w="med" len="med"/>
+                    </a:lnT>
+                    <a:lnB w="12700" cap="flat" cmpd="sng" algn="ctr">
+                      <a:solidFill>
+                        <a:schemeClr val="tx1"/>
+                      </a:solidFill>
+                      <a:prstDash val="solid"/>
+                      <a:round/>
+                      <a:headEnd type="none" w="med" len="med"/>
+                      <a:tailEnd type="none" w="med" len="med"/>
+                    </a:lnB>
+                    <a:noFill/>
+                  </a:tcPr>
+                </a:tc>
+                <a:extLst>
+                  <a:ext uri="{0D108BD9-81ED-4DB2-BD59-A6C34878D82A}">
+                    <a16:rowId xmlns:a16="http://schemas.microsoft.com/office/drawing/2014/main" val="3442233651"/>
+                  </a:ext>
+                </a:extLst>
+              </a:tr>
+              <a:tr h="334707">
+                <a:tc>
+                  <a:txBody>
+                    <a:bodyPr/>
+                    <a:lstStyle/>
+                    <a:p>
+                      <a:pPr>
+                        <a:buNone/>
+                      </a:pPr>
+                      <a:r>
+                        <a:rPr lang="en-GB" b="1" dirty="0"/>
+                        <a:t>Macro </a:t>
+                      </a:r>
+                      <a:r>
+                        <a:rPr lang="en-GB" b="1" dirty="0" err="1"/>
+                        <a:t>Avg</a:t>
+                      </a:r>
+                      <a:endParaRPr lang="en-GB" dirty="0"/>
+                    </a:p>
+                  </a:txBody>
+                  <a:tcPr anchor="ctr">
+                    <a:lnL w="12700" cap="flat" cmpd="sng" algn="ctr">
+                      <a:solidFill>
+                        <a:schemeClr val="tx1"/>
+                      </a:solidFill>
+                      <a:prstDash val="solid"/>
+                      <a:round/>
+                      <a:headEnd type="none" w="med" len="med"/>
+                      <a:tailEnd type="none" w="med" len="med"/>
+                    </a:lnL>
+                    <a:lnR w="12700" cap="flat" cmpd="sng" algn="ctr">
+                      <a:solidFill>
+                        <a:schemeClr val="tx1"/>
+                      </a:solidFill>
+                      <a:prstDash val="solid"/>
+                      <a:round/>
+                      <a:headEnd type="none" w="med" len="med"/>
+                      <a:tailEnd type="none" w="med" len="med"/>
+                    </a:lnR>
+                    <a:lnT w="12700" cap="flat" cmpd="sng" algn="ctr">
+                      <a:solidFill>
+                        <a:schemeClr val="tx1"/>
+                      </a:solidFill>
+                      <a:prstDash val="solid"/>
+                      <a:round/>
+                      <a:headEnd type="none" w="med" len="med"/>
+                      <a:tailEnd type="none" w="med" len="med"/>
+                    </a:lnT>
+                    <a:lnB w="12700" cap="flat" cmpd="sng" algn="ctr">
+                      <a:solidFill>
+                        <a:schemeClr val="tx1"/>
+                      </a:solidFill>
+                      <a:prstDash val="solid"/>
+                      <a:round/>
+                      <a:headEnd type="none" w="med" len="med"/>
+                      <a:tailEnd type="none" w="med" len="med"/>
+                    </a:lnB>
+                    <a:noFill/>
+                  </a:tcPr>
+                </a:tc>
+                <a:tc>
+                  <a:txBody>
+                    <a:bodyPr/>
+                    <a:lstStyle/>
+                    <a:p>
+                      <a:pPr>
+                        <a:buNone/>
+                      </a:pPr>
+                      <a:r>
+                        <a:rPr lang="en-GB" dirty="0"/>
+                        <a:t>1.00</a:t>
+                      </a:r>
+                    </a:p>
+                  </a:txBody>
+                  <a:tcPr anchor="ctr">
+                    <a:lnL w="12700" cap="flat" cmpd="sng" algn="ctr">
+                      <a:solidFill>
+                        <a:schemeClr val="tx1"/>
+                      </a:solidFill>
+                      <a:prstDash val="solid"/>
+                      <a:round/>
+                      <a:headEnd type="none" w="med" len="med"/>
+                      <a:tailEnd type="none" w="med" len="med"/>
+                    </a:lnL>
+                    <a:lnR w="12700" cap="flat" cmpd="sng" algn="ctr">
+                      <a:solidFill>
+                        <a:schemeClr val="tx1"/>
+                      </a:solidFill>
+                      <a:prstDash val="solid"/>
+                      <a:round/>
+                      <a:headEnd type="none" w="med" len="med"/>
+                      <a:tailEnd type="none" w="med" len="med"/>
+                    </a:lnR>
+                    <a:lnT w="12700" cap="flat" cmpd="sng" algn="ctr">
+                      <a:solidFill>
+                        <a:schemeClr val="tx1"/>
+                      </a:solidFill>
+                      <a:prstDash val="solid"/>
+                      <a:round/>
+                      <a:headEnd type="none" w="med" len="med"/>
+                      <a:tailEnd type="none" w="med" len="med"/>
+                    </a:lnT>
+                    <a:lnB w="12700" cap="flat" cmpd="sng" algn="ctr">
+                      <a:solidFill>
+                        <a:schemeClr val="tx1"/>
+                      </a:solidFill>
+                      <a:prstDash val="solid"/>
+                      <a:round/>
+                      <a:headEnd type="none" w="med" len="med"/>
+                      <a:tailEnd type="none" w="med" len="med"/>
+                    </a:lnB>
+                    <a:noFill/>
+                  </a:tcPr>
+                </a:tc>
+                <a:tc>
+                  <a:txBody>
+                    <a:bodyPr/>
+                    <a:lstStyle/>
+                    <a:p>
+                      <a:pPr>
+                        <a:buNone/>
+                      </a:pPr>
+                      <a:r>
+                        <a:rPr lang="en-GB" dirty="0"/>
+                        <a:t>1.00</a:t>
+                      </a:r>
+                    </a:p>
+                  </a:txBody>
+                  <a:tcPr anchor="ctr">
+                    <a:lnL w="12700" cap="flat" cmpd="sng" algn="ctr">
+                      <a:solidFill>
+                        <a:schemeClr val="tx1"/>
+                      </a:solidFill>
+                      <a:prstDash val="solid"/>
+                      <a:round/>
+                      <a:headEnd type="none" w="med" len="med"/>
+                      <a:tailEnd type="none" w="med" len="med"/>
+                    </a:lnL>
+                    <a:lnR w="12700" cap="flat" cmpd="sng" algn="ctr">
+                      <a:solidFill>
+                        <a:schemeClr val="tx1"/>
+                      </a:solidFill>
+                      <a:prstDash val="solid"/>
+                      <a:round/>
+                      <a:headEnd type="none" w="med" len="med"/>
+                      <a:tailEnd type="none" w="med" len="med"/>
+                    </a:lnR>
+                    <a:lnT w="12700" cap="flat" cmpd="sng" algn="ctr">
+                      <a:solidFill>
+                        <a:schemeClr val="tx1"/>
+                      </a:solidFill>
+                      <a:prstDash val="solid"/>
+                      <a:round/>
+                      <a:headEnd type="none" w="med" len="med"/>
+                      <a:tailEnd type="none" w="med" len="med"/>
+                    </a:lnT>
+                    <a:lnB w="12700" cap="flat" cmpd="sng" algn="ctr">
+                      <a:solidFill>
+                        <a:schemeClr val="tx1"/>
+                      </a:solidFill>
+                      <a:prstDash val="solid"/>
+                      <a:round/>
+                      <a:headEnd type="none" w="med" len="med"/>
+                      <a:tailEnd type="none" w="med" len="med"/>
+                    </a:lnB>
+                    <a:noFill/>
+                  </a:tcPr>
+                </a:tc>
+                <a:tc>
+                  <a:txBody>
+                    <a:bodyPr/>
+                    <a:lstStyle/>
+                    <a:p>
+                      <a:pPr>
+                        <a:buNone/>
+                      </a:pPr>
+                      <a:r>
+                        <a:rPr lang="en-GB" dirty="0"/>
+                        <a:t>1.00</a:t>
+                      </a:r>
+                    </a:p>
+                  </a:txBody>
+                  <a:tcPr anchor="ctr">
+                    <a:lnL w="12700" cap="flat" cmpd="sng" algn="ctr">
+                      <a:solidFill>
+                        <a:schemeClr val="tx1"/>
+                      </a:solidFill>
+                      <a:prstDash val="solid"/>
+                      <a:round/>
+                      <a:headEnd type="none" w="med" len="med"/>
+                      <a:tailEnd type="none" w="med" len="med"/>
+                    </a:lnL>
+                    <a:lnR w="12700" cap="flat" cmpd="sng" algn="ctr">
+                      <a:solidFill>
+                        <a:schemeClr val="tx1"/>
+                      </a:solidFill>
+                      <a:prstDash val="solid"/>
+                      <a:round/>
+                      <a:headEnd type="none" w="med" len="med"/>
+                      <a:tailEnd type="none" w="med" len="med"/>
+                    </a:lnR>
+                    <a:lnT w="12700" cap="flat" cmpd="sng" algn="ctr">
+                      <a:solidFill>
+                        <a:schemeClr val="tx1"/>
+                      </a:solidFill>
+                      <a:prstDash val="solid"/>
+                      <a:round/>
+                      <a:headEnd type="none" w="med" len="med"/>
+                      <a:tailEnd type="none" w="med" len="med"/>
+                    </a:lnT>
+                    <a:lnB w="12700" cap="flat" cmpd="sng" algn="ctr">
+                      <a:solidFill>
+                        <a:schemeClr val="tx1"/>
+                      </a:solidFill>
+                      <a:prstDash val="solid"/>
+                      <a:round/>
+                      <a:headEnd type="none" w="med" len="med"/>
+                      <a:tailEnd type="none" w="med" len="med"/>
+                    </a:lnB>
+                    <a:noFill/>
+                  </a:tcPr>
+                </a:tc>
+                <a:tc>
+                  <a:txBody>
+                    <a:bodyPr/>
+                    <a:lstStyle/>
+                    <a:p>
+                      <a:pPr>
+                        <a:buNone/>
+                      </a:pPr>
+                      <a:r>
+                        <a:rPr lang="en-GB" dirty="0"/>
                         <a:t>8980</a:t>
                       </a:r>
                     </a:p>
@@ -5328,118 +7145,14 @@
                         <a:buNone/>
                       </a:pPr>
                       <a:r>
-                        <a:rPr lang="en-GB" b="1"/>
-                        <a:t>Weighted Avg</a:t>
+                        <a:rPr lang="en-GB" b="1" dirty="0"/>
+                        <a:t>Weighted </a:t>
                       </a:r>
-                      <a:endParaRPr lang="en-GB"/>
-                    </a:p>
-                  </a:txBody>
-                  <a:tcPr anchor="ctr">
-                    <a:lnL w="12700" cap="flat" cmpd="sng" algn="ctr">
-                      <a:solidFill>
-                        <a:schemeClr val="tx1"/>
-                      </a:solidFill>
-                      <a:prstDash val="solid"/>
-                      <a:round/>
-                      <a:headEnd type="none" w="med" len="med"/>
-                      <a:tailEnd type="none" w="med" len="med"/>
-                    </a:lnL>
-                    <a:lnR w="12700" cap="flat" cmpd="sng" algn="ctr">
-                      <a:solidFill>
-                        <a:schemeClr val="tx1"/>
-                      </a:solidFill>
-                      <a:prstDash val="solid"/>
-                      <a:round/>
-                      <a:headEnd type="none" w="med" len="med"/>
-                      <a:tailEnd type="none" w="med" len="med"/>
-                    </a:lnR>
-                    <a:lnT w="12700" cap="flat" cmpd="sng" algn="ctr">
-                      <a:solidFill>
-                        <a:schemeClr val="tx1"/>
-                      </a:solidFill>
-                      <a:prstDash val="solid"/>
-                      <a:round/>
-                      <a:headEnd type="none" w="med" len="med"/>
-                      <a:tailEnd type="none" w="med" len="med"/>
-                    </a:lnT>
-                    <a:lnB w="12700" cap="flat" cmpd="sng" algn="ctr">
-                      <a:solidFill>
-                        <a:schemeClr val="tx1"/>
-                      </a:solidFill>
-                      <a:prstDash val="solid"/>
-                      <a:round/>
-                      <a:headEnd type="none" w="med" len="med"/>
-                      <a:tailEnd type="none" w="med" len="med"/>
-                    </a:lnB>
-                    <a:noFill/>
-                  </a:tcPr>
-                </a:tc>
-                <a:tc>
-                  <a:txBody>
-                    <a:bodyPr/>
-                    <a:lstStyle/>
-                    <a:p>
-                      <a:pPr>
-                        <a:buNone/>
-                      </a:pPr>
                       <a:r>
-                        <a:rPr lang="en-GB"/>
-                        <a:t>1.00</a:t>
+                        <a:rPr lang="en-GB" b="1" dirty="0" err="1"/>
+                        <a:t>Avg</a:t>
                       </a:r>
-                    </a:p>
-                  </a:txBody>
-                  <a:tcPr anchor="ctr">
-                    <a:lnL w="12700" cap="flat" cmpd="sng" algn="ctr">
-                      <a:solidFill>
-                        <a:schemeClr val="tx1"/>
-                      </a:solidFill>
-                      <a:prstDash val="solid"/>
-                      <a:round/>
-                      <a:headEnd type="none" w="med" len="med"/>
-                      <a:tailEnd type="none" w="med" len="med"/>
-                    </a:lnL>
-                    <a:lnR w="12700" cap="flat" cmpd="sng" algn="ctr">
-                      <a:solidFill>
-                        <a:schemeClr val="tx1"/>
-                      </a:solidFill>
-                      <a:prstDash val="solid"/>
-                      <a:round/>
-                      <a:headEnd type="none" w="med" len="med"/>
-                      <a:tailEnd type="none" w="med" len="med"/>
-                    </a:lnR>
-                    <a:lnT w="12700" cap="flat" cmpd="sng" algn="ctr">
-                      <a:solidFill>
-                        <a:schemeClr val="tx1"/>
-                      </a:solidFill>
-                      <a:prstDash val="solid"/>
-                      <a:round/>
-                      <a:headEnd type="none" w="med" len="med"/>
-                      <a:tailEnd type="none" w="med" len="med"/>
-                    </a:lnT>
-                    <a:lnB w="12700" cap="flat" cmpd="sng" algn="ctr">
-                      <a:solidFill>
-                        <a:schemeClr val="tx1"/>
-                      </a:solidFill>
-                      <a:prstDash val="solid"/>
-                      <a:round/>
-                      <a:headEnd type="none" w="med" len="med"/>
-                      <a:tailEnd type="none" w="med" len="med"/>
-                    </a:lnB>
-                    <a:noFill/>
-                  </a:tcPr>
-                </a:tc>
-                <a:tc>
-                  <a:txBody>
-                    <a:bodyPr/>
-                    <a:lstStyle/>
-                    <a:p>
-                      <a:pPr>
-                        <a:buNone/>
-                      </a:pPr>
-                      <a:r>
-                        <a:rPr lang="en-GB"/>
-                        <a:t>1.00</a:t>
-                      </a:r>
+                      <a:endParaRPr lang="en-GB" dirty="0"/>
                     </a:p>
                   </a:txBody>
                   <a:tcPr anchor="ctr">
@@ -5546,6 +7259,114 @@
                       </a:pPr>
                       <a:r>
                         <a:rPr lang="en-GB" dirty="0"/>
+                        <a:t>1.00</a:t>
+                      </a:r>
+                    </a:p>
+                  </a:txBody>
+                  <a:tcPr anchor="ctr">
+                    <a:lnL w="12700" cap="flat" cmpd="sng" algn="ctr">
+                      <a:solidFill>
+                        <a:schemeClr val="tx1"/>
+                      </a:solidFill>
+                      <a:prstDash val="solid"/>
+                      <a:round/>
+                      <a:headEnd type="none" w="med" len="med"/>
+                      <a:tailEnd type="none" w="med" len="med"/>
+                    </a:lnL>
+                    <a:lnR w="12700" cap="flat" cmpd="sng" algn="ctr">
+                      <a:solidFill>
+                        <a:schemeClr val="tx1"/>
+                      </a:solidFill>
+                      <a:prstDash val="solid"/>
+                      <a:round/>
+                      <a:headEnd type="none" w="med" len="med"/>
+                      <a:tailEnd type="none" w="med" len="med"/>
+                    </a:lnR>
+                    <a:lnT w="12700" cap="flat" cmpd="sng" algn="ctr">
+                      <a:solidFill>
+                        <a:schemeClr val="tx1"/>
+                      </a:solidFill>
+                      <a:prstDash val="solid"/>
+                      <a:round/>
+                      <a:headEnd type="none" w="med" len="med"/>
+                      <a:tailEnd type="none" w="med" len="med"/>
+                    </a:lnT>
+                    <a:lnB w="12700" cap="flat" cmpd="sng" algn="ctr">
+                      <a:solidFill>
+                        <a:schemeClr val="tx1"/>
+                      </a:solidFill>
+                      <a:prstDash val="solid"/>
+                      <a:round/>
+                      <a:headEnd type="none" w="med" len="med"/>
+                      <a:tailEnd type="none" w="med" len="med"/>
+                    </a:lnB>
+                    <a:noFill/>
+                  </a:tcPr>
+                </a:tc>
+                <a:tc>
+                  <a:txBody>
+                    <a:bodyPr/>
+                    <a:lstStyle/>
+                    <a:p>
+                      <a:pPr>
+                        <a:buNone/>
+                      </a:pPr>
+                      <a:r>
+                        <a:rPr lang="en-GB" dirty="0"/>
+                        <a:t>1.00</a:t>
+                      </a:r>
+                    </a:p>
+                  </a:txBody>
+                  <a:tcPr anchor="ctr">
+                    <a:lnL w="12700" cap="flat" cmpd="sng" algn="ctr">
+                      <a:solidFill>
+                        <a:schemeClr val="tx1"/>
+                      </a:solidFill>
+                      <a:prstDash val="solid"/>
+                      <a:round/>
+                      <a:headEnd type="none" w="med" len="med"/>
+                      <a:tailEnd type="none" w="med" len="med"/>
+                    </a:lnL>
+                    <a:lnR w="12700" cap="flat" cmpd="sng" algn="ctr">
+                      <a:solidFill>
+                        <a:schemeClr val="tx1"/>
+                      </a:solidFill>
+                      <a:prstDash val="solid"/>
+                      <a:round/>
+                      <a:headEnd type="none" w="med" len="med"/>
+                      <a:tailEnd type="none" w="med" len="med"/>
+                    </a:lnR>
+                    <a:lnT w="12700" cap="flat" cmpd="sng" algn="ctr">
+                      <a:solidFill>
+                        <a:schemeClr val="tx1"/>
+                      </a:solidFill>
+                      <a:prstDash val="solid"/>
+                      <a:round/>
+                      <a:headEnd type="none" w="med" len="med"/>
+                      <a:tailEnd type="none" w="med" len="med"/>
+                    </a:lnT>
+                    <a:lnB w="12700" cap="flat" cmpd="sng" algn="ctr">
+                      <a:solidFill>
+                        <a:schemeClr val="tx1"/>
+                      </a:solidFill>
+                      <a:prstDash val="solid"/>
+                      <a:round/>
+                      <a:headEnd type="none" w="med" len="med"/>
+                      <a:tailEnd type="none" w="med" len="med"/>
+                    </a:lnB>
+                    <a:noFill/>
+                  </a:tcPr>
+                </a:tc>
+                <a:tc>
+                  <a:txBody>
+                    <a:bodyPr/>
+                    <a:lstStyle/>
+                    <a:p>
+                      <a:pPr>
+                        <a:buNone/>
+                      </a:pPr>
+                      <a:r>
+                        <a:rPr lang="en-GB" dirty="0"/>
                         <a:t>8980</a:t>
                       </a:r>
                     </a:p>
@@ -5605,7 +7426,7 @@
           <p:cNvPr id="9" name="CuadroTexto 8">
             <a:extLst>
               <a:ext uri="{FF2B5EF4-FFF2-40B4-BE49-F238E27FC236}">
-                <a16:creationId xmlns:a16="http://schemas.microsoft.com/office/drawing/2014/main" id="{6820A762-A449-A673-EE00-36B54F6FBC27}"/>
+                <a16:creationId xmlns:a16="http://schemas.microsoft.com/office/drawing/2014/main" id="{32CD25FB-EE23-1E99-65B5-46A345D156CC}"/>
               </a:ext>
             </a:extLst>
           </p:cNvPr>
@@ -5614,7 +7435,7 @@
         </p:nvSpPr>
         <p:spPr>
           <a:xfrm>
-            <a:off x="4080389" y="2112805"/>
+            <a:off x="688260" y="2103103"/>
             <a:ext cx="4375357" cy="1323439"/>
           </a:xfrm>
           <a:prstGeom prst="rect">
@@ -5650,7 +7471,7 @@
     </p:spTree>
     <p:extLst>
       <p:ext uri="{BB962C8B-B14F-4D97-AF65-F5344CB8AC3E}">
-        <p14:creationId xmlns:p14="http://schemas.microsoft.com/office/powerpoint/2010/main" val="145002764"/>
+        <p14:creationId xmlns:p14="http://schemas.microsoft.com/office/powerpoint/2010/main" val="3129615861"/>
       </p:ext>
     </p:extLst>
   </p:cSld>
@@ -5660,7 +7481,7 @@
 </p:sld>
 </file>
 
-<file path=ppt/slides/slide15.xml><?xml version="1.0" encoding="utf-8"?>
+<file path=ppt/slides/slide16.xml><?xml version="1.0" encoding="utf-8"?>
 <p:sld xmlns:a="http://schemas.openxmlformats.org/drawingml/2006/main" xmlns:r="http://schemas.openxmlformats.org/officeDocument/2006/relationships" xmlns:p="http://schemas.openxmlformats.org/presentationml/2006/main">
   <p:cSld>
     <p:spTree>
@@ -5791,10 +7612,10 @@
       </p:sp>
       <p:pic>
         <p:nvPicPr>
-          <p:cNvPr id="10" name="Imagen 9">
+          <p:cNvPr id="6" name="Imagen 5">
             <a:extLst>
               <a:ext uri="{FF2B5EF4-FFF2-40B4-BE49-F238E27FC236}">
-                <a16:creationId xmlns:a16="http://schemas.microsoft.com/office/drawing/2014/main" id="{6A155973-C971-E855-899A-305D843CE584}"/>
+                <a16:creationId xmlns:a16="http://schemas.microsoft.com/office/drawing/2014/main" id="{64564A4B-B65C-5329-235D-C5CCC2713845}"/>
               </a:ext>
             </a:extLst>
           </p:cNvPr>
@@ -5804,21 +7625,15 @@
           <p:nvPr/>
         </p:nvPicPr>
         <p:blipFill>
-          <a:blip r:embed="rId2">
-            <a:extLst>
-              <a:ext uri="{28A0092B-C50C-407E-A947-70E740481C1C}">
-                <a14:useLocalDpi xmlns:a14="http://schemas.microsoft.com/office/drawing/2010/main" val="0"/>
-              </a:ext>
-            </a:extLst>
-          </a:blip>
+          <a:blip r:embed="rId2"/>
           <a:stretch>
             <a:fillRect/>
           </a:stretch>
         </p:blipFill>
         <p:spPr>
           <a:xfrm>
-            <a:off x="110612" y="2728255"/>
-            <a:ext cx="4528744" cy="3396557"/>
+            <a:off x="143929" y="2847965"/>
+            <a:ext cx="4462107" cy="3346580"/>
           </a:xfrm>
           <a:prstGeom prst="rect">
             <a:avLst/>
@@ -5827,10 +7642,10 @@
       </p:pic>
       <p:pic>
         <p:nvPicPr>
-          <p:cNvPr id="11" name="Imagen 10">
+          <p:cNvPr id="8" name="Imagen 7">
             <a:extLst>
               <a:ext uri="{FF2B5EF4-FFF2-40B4-BE49-F238E27FC236}">
-                <a16:creationId xmlns:a16="http://schemas.microsoft.com/office/drawing/2014/main" id="{CE48A6E2-6698-7891-E489-72FC59487F7D}"/>
+                <a16:creationId xmlns:a16="http://schemas.microsoft.com/office/drawing/2014/main" id="{31CCAA57-9947-5E63-EB6D-DF319016307C}"/>
               </a:ext>
             </a:extLst>
           </p:cNvPr>
@@ -5840,21 +7655,15 @@
           <p:nvPr/>
         </p:nvPicPr>
         <p:blipFill>
-          <a:blip r:embed="rId3">
-            <a:extLst>
-              <a:ext uri="{28A0092B-C50C-407E-A947-70E740481C1C}">
-                <a14:useLocalDpi xmlns:a14="http://schemas.microsoft.com/office/drawing/2010/main" val="0"/>
-              </a:ext>
-            </a:extLst>
-          </a:blip>
+          <a:blip r:embed="rId3"/>
           <a:stretch>
             <a:fillRect/>
           </a:stretch>
         </p:blipFill>
         <p:spPr>
           <a:xfrm>
-            <a:off x="4571281" y="2852815"/>
-            <a:ext cx="4462107" cy="3346581"/>
+            <a:off x="4572000" y="2847965"/>
+            <a:ext cx="4475041" cy="3356281"/>
           </a:xfrm>
           <a:prstGeom prst="rect">
             <a:avLst/>
@@ -5874,7 +7683,7 @@
 </p:sld>
 </file>
 
-<file path=ppt/slides/slide16.xml><?xml version="1.0" encoding="utf-8"?>
+<file path=ppt/slides/slide17.xml><?xml version="1.0" encoding="utf-8"?>
 <p:sld xmlns:a="http://schemas.openxmlformats.org/drawingml/2006/main" xmlns:r="http://schemas.openxmlformats.org/officeDocument/2006/relationships" xmlns:p="http://schemas.openxmlformats.org/presentationml/2006/main">
   <p:cSld>
     <p:spTree>
@@ -6158,7 +7967,7 @@
 </p:sld>
 </file>
 
-<file path=ppt/slides/slide17.xml><?xml version="1.0" encoding="utf-8"?>
+<file path=ppt/slides/slide18.xml><?xml version="1.0" encoding="utf-8"?>
 <p:sld xmlns:a="http://schemas.openxmlformats.org/drawingml/2006/main" xmlns:r="http://schemas.openxmlformats.org/officeDocument/2006/relationships" xmlns:p="http://schemas.openxmlformats.org/presentationml/2006/main">
   <p:cSld>
     <p:spTree>
@@ -6299,7 +8108,7 @@
 </p:sld>
 </file>
 
-<file path=ppt/slides/slide18.xml><?xml version="1.0" encoding="utf-8"?>
+<file path=ppt/slides/slide19.xml><?xml version="1.0" encoding="utf-8"?>
 <p:sld xmlns:a="http://schemas.openxmlformats.org/drawingml/2006/main" xmlns:r="http://schemas.openxmlformats.org/officeDocument/2006/relationships" xmlns:p="http://schemas.openxmlformats.org/presentationml/2006/main">
   <p:cSld>
     <p:spTree>
@@ -6332,7 +8141,7 @@
         </p:nvSpPr>
         <p:spPr>
           <a:xfrm>
-            <a:off x="1004119" y="2658063"/>
+            <a:off x="1004119" y="2766218"/>
             <a:ext cx="7135761" cy="1325563"/>
           </a:xfrm>
           <a:prstGeom prst="rect">
@@ -6359,10 +8168,9 @@
           </a:lstStyle>
           <a:p>
             <a:r>
-              <a:rPr lang="en-GB"/>
+              <a:rPr lang="en-GB" dirty="0"/>
               <a:t>Do you see anything strange?</a:t>
             </a:r>
-            <a:endParaRPr lang="en-GB" dirty="0"/>
           </a:p>
         </p:txBody>
       </p:sp>
@@ -6379,7 +8187,94 @@
 </p:sld>
 </file>
 
-<file path=ppt/slides/slide19.xml><?xml version="1.0" encoding="utf-8"?>
+<file path=ppt/slides/slide2.xml><?xml version="1.0" encoding="utf-8"?>
+<p:sld xmlns:a="http://schemas.openxmlformats.org/drawingml/2006/main" xmlns:r="http://schemas.openxmlformats.org/officeDocument/2006/relationships" xmlns:p="http://schemas.openxmlformats.org/presentationml/2006/main" show="0">
+  <p:cSld>
+    <p:spTree>
+      <p:nvGrpSpPr>
+        <p:cNvPr id="1" name=""/>
+        <p:cNvGrpSpPr/>
+        <p:nvPr/>
+      </p:nvGrpSpPr>
+      <p:grpSpPr>
+        <a:xfrm>
+          <a:off x="0" y="0"/>
+          <a:ext cx="0" cy="0"/>
+          <a:chOff x="0" y="0"/>
+          <a:chExt cx="0" cy="0"/>
+        </a:xfrm>
+      </p:grpSpPr>
+      <p:sp>
+        <p:nvSpPr>
+          <p:cNvPr id="2" name="Title 1"/>
+          <p:cNvSpPr>
+            <a:spLocks noGrp="1"/>
+          </p:cNvSpPr>
+          <p:nvPr>
+            <p:ph type="title"/>
+          </p:nvPr>
+        </p:nvSpPr>
+        <p:spPr/>
+        <p:txBody>
+          <a:bodyPr/>
+          <a:lstStyle/>
+          <a:p>
+            <a:r>
+              <a:t>Agenda</a:t>
+            </a:r>
+          </a:p>
+        </p:txBody>
+      </p:sp>
+      <p:sp>
+        <p:nvSpPr>
+          <p:cNvPr id="3" name="Content Placeholder 2"/>
+          <p:cNvSpPr>
+            <a:spLocks noGrp="1"/>
+          </p:cNvSpPr>
+          <p:nvPr>
+            <p:ph idx="1"/>
+          </p:nvPr>
+        </p:nvSpPr>
+        <p:spPr/>
+        <p:txBody>
+          <a:bodyPr/>
+          <a:lstStyle/>
+          <a:p>
+            <a:r>
+              <a:t>Task and dataset</a:t>
+            </a:r>
+          </a:p>
+          <a:p>
+            <a:r>
+              <a:t>Preprocessing and evaluation setup</a:t>
+            </a:r>
+          </a:p>
+          <a:p>
+            <a:r>
+              <a:t>Classic classifiers (simple, no SVM, no deep learning)</a:t>
+            </a:r>
+          </a:p>
+          <a:p>
+            <a:r>
+              <a:t>Results and interpretation</a:t>
+            </a:r>
+          </a:p>
+          <a:p>
+            <a:r>
+              <a:t>Subject leakage analysis</a:t>
+            </a:r>
+          </a:p>
+        </p:txBody>
+      </p:sp>
+    </p:spTree>
+  </p:cSld>
+  <p:clrMapOvr>
+    <a:masterClrMapping/>
+  </p:clrMapOvr>
+</p:sld>
+</file>
+
+<file path=ppt/slides/slide20.xml><?xml version="1.0" encoding="utf-8"?>
 <p:sld xmlns:a="http://schemas.openxmlformats.org/drawingml/2006/main" xmlns:r="http://schemas.openxmlformats.org/officeDocument/2006/relationships" xmlns:p="http://schemas.openxmlformats.org/presentationml/2006/main">
   <p:cSld>
     <p:spTree>
@@ -7014,94 +8909,7 @@
 </p:sld>
 </file>
 
-<file path=ppt/slides/slide2.xml><?xml version="1.0" encoding="utf-8"?>
-<p:sld xmlns:a="http://schemas.openxmlformats.org/drawingml/2006/main" xmlns:r="http://schemas.openxmlformats.org/officeDocument/2006/relationships" xmlns:p="http://schemas.openxmlformats.org/presentationml/2006/main" show="0">
-  <p:cSld>
-    <p:spTree>
-      <p:nvGrpSpPr>
-        <p:cNvPr id="1" name=""/>
-        <p:cNvGrpSpPr/>
-        <p:nvPr/>
-      </p:nvGrpSpPr>
-      <p:grpSpPr>
-        <a:xfrm>
-          <a:off x="0" y="0"/>
-          <a:ext cx="0" cy="0"/>
-          <a:chOff x="0" y="0"/>
-          <a:chExt cx="0" cy="0"/>
-        </a:xfrm>
-      </p:grpSpPr>
-      <p:sp>
-        <p:nvSpPr>
-          <p:cNvPr id="2" name="Title 1"/>
-          <p:cNvSpPr>
-            <a:spLocks noGrp="1"/>
-          </p:cNvSpPr>
-          <p:nvPr>
-            <p:ph type="title"/>
-          </p:nvPr>
-        </p:nvSpPr>
-        <p:spPr/>
-        <p:txBody>
-          <a:bodyPr/>
-          <a:lstStyle/>
-          <a:p>
-            <a:r>
-              <a:t>Agenda</a:t>
-            </a:r>
-          </a:p>
-        </p:txBody>
-      </p:sp>
-      <p:sp>
-        <p:nvSpPr>
-          <p:cNvPr id="3" name="Content Placeholder 2"/>
-          <p:cNvSpPr>
-            <a:spLocks noGrp="1"/>
-          </p:cNvSpPr>
-          <p:nvPr>
-            <p:ph idx="1"/>
-          </p:nvPr>
-        </p:nvSpPr>
-        <p:spPr/>
-        <p:txBody>
-          <a:bodyPr/>
-          <a:lstStyle/>
-          <a:p>
-            <a:r>
-              <a:t>Task and dataset</a:t>
-            </a:r>
-          </a:p>
-          <a:p>
-            <a:r>
-              <a:t>Preprocessing and evaluation setup</a:t>
-            </a:r>
-          </a:p>
-          <a:p>
-            <a:r>
-              <a:t>Classic classifiers (simple, no SVM, no deep learning)</a:t>
-            </a:r>
-          </a:p>
-          <a:p>
-            <a:r>
-              <a:t>Results and interpretation</a:t>
-            </a:r>
-          </a:p>
-          <a:p>
-            <a:r>
-              <a:t>Subject leakage analysis</a:t>
-            </a:r>
-          </a:p>
-        </p:txBody>
-      </p:sp>
-    </p:spTree>
-  </p:cSld>
-  <p:clrMapOvr>
-    <a:masterClrMapping/>
-  </p:clrMapOvr>
-</p:sld>
-</file>
-
-<file path=ppt/slides/slide20.xml><?xml version="1.0" encoding="utf-8"?>
+<file path=ppt/slides/slide21.xml><?xml version="1.0" encoding="utf-8"?>
 <p:sld xmlns:a="http://schemas.openxmlformats.org/drawingml/2006/main" xmlns:r="http://schemas.openxmlformats.org/officeDocument/2006/relationships" xmlns:p="http://schemas.openxmlformats.org/presentationml/2006/main">
   <p:cSld>
     <p:spTree>
@@ -7333,7 +9141,7 @@
 </p:sld>
 </file>
 
-<file path=ppt/slides/slide21.xml><?xml version="1.0" encoding="utf-8"?>
+<file path=ppt/slides/slide22.xml><?xml version="1.0" encoding="utf-8"?>
 <p:sld xmlns:a="http://schemas.openxmlformats.org/drawingml/2006/main" xmlns:r="http://schemas.openxmlformats.org/officeDocument/2006/relationships" xmlns:p="http://schemas.openxmlformats.org/presentationml/2006/main">
   <p:cSld>
     <p:spTree>
@@ -7449,8 +9257,8 @@
 </p:sld>
 </file>
 
-<file path=ppt/slides/slide22.xml><?xml version="1.0" encoding="utf-8"?>
-<p:sld xmlns:a="http://schemas.openxmlformats.org/drawingml/2006/main" xmlns:r="http://schemas.openxmlformats.org/officeDocument/2006/relationships" xmlns:p="http://schemas.openxmlformats.org/presentationml/2006/main" show="0">
+<file path=ppt/slides/slide23.xml><?xml version="1.0" encoding="utf-8"?>
+<p:sld xmlns:a="http://schemas.openxmlformats.org/drawingml/2006/main" xmlns:r="http://schemas.openxmlformats.org/officeDocument/2006/relationships" xmlns:p="http://schemas.openxmlformats.org/presentationml/2006/main">
   <p:cSld>
     <p:spTree>
       <p:nvGrpSpPr>

--- a/fake-news-classifier.pptx
+++ b/fake-news-classifier.pptx
@@ -324,7 +324,7 @@
           <a:p>
             <a:fld id="{5BCAD085-E8A6-8845-BD4E-CB4CCA059FC4}" type="datetimeFigureOut">
               <a:rPr lang="en-US" smtClean="0"/>
-              <a:t>1/21/2026</a:t>
+              <a:t>1/26/2026</a:t>
             </a:fld>
             <a:endParaRPr lang="en-US"/>
           </a:p>
@@ -492,7 +492,7 @@
           <a:p>
             <a:fld id="{5BCAD085-E8A6-8845-BD4E-CB4CCA059FC4}" type="datetimeFigureOut">
               <a:rPr lang="en-US" smtClean="0"/>
-              <a:t>1/21/2026</a:t>
+              <a:t>1/26/2026</a:t>
             </a:fld>
             <a:endParaRPr lang="en-US"/>
           </a:p>
@@ -670,7 +670,7 @@
           <a:p>
             <a:fld id="{5BCAD085-E8A6-8845-BD4E-CB4CCA059FC4}" type="datetimeFigureOut">
               <a:rPr lang="en-US" smtClean="0"/>
-              <a:t>1/21/2026</a:t>
+              <a:t>1/26/2026</a:t>
             </a:fld>
             <a:endParaRPr lang="en-US"/>
           </a:p>
@@ -838,7 +838,7 @@
           <a:p>
             <a:fld id="{5BCAD085-E8A6-8845-BD4E-CB4CCA059FC4}" type="datetimeFigureOut">
               <a:rPr lang="en-US" smtClean="0"/>
-              <a:t>1/21/2026</a:t>
+              <a:t>1/26/2026</a:t>
             </a:fld>
             <a:endParaRPr lang="en-US"/>
           </a:p>
@@ -1083,7 +1083,7 @@
           <a:p>
             <a:fld id="{5BCAD085-E8A6-8845-BD4E-CB4CCA059FC4}" type="datetimeFigureOut">
               <a:rPr lang="en-US" smtClean="0"/>
-              <a:t>1/21/2026</a:t>
+              <a:t>1/26/2026</a:t>
             </a:fld>
             <a:endParaRPr lang="en-US"/>
           </a:p>
@@ -1368,7 +1368,7 @@
           <a:p>
             <a:fld id="{5BCAD085-E8A6-8845-BD4E-CB4CCA059FC4}" type="datetimeFigureOut">
               <a:rPr lang="en-US" smtClean="0"/>
-              <a:t>1/21/2026</a:t>
+              <a:t>1/26/2026</a:t>
             </a:fld>
             <a:endParaRPr lang="en-US"/>
           </a:p>
@@ -1787,7 +1787,7 @@
           <a:p>
             <a:fld id="{5BCAD085-E8A6-8845-BD4E-CB4CCA059FC4}" type="datetimeFigureOut">
               <a:rPr lang="en-US" smtClean="0"/>
-              <a:t>1/21/2026</a:t>
+              <a:t>1/26/2026</a:t>
             </a:fld>
             <a:endParaRPr lang="en-US"/>
           </a:p>
@@ -1904,7 +1904,7 @@
           <a:p>
             <a:fld id="{5BCAD085-E8A6-8845-BD4E-CB4CCA059FC4}" type="datetimeFigureOut">
               <a:rPr lang="en-US" smtClean="0"/>
-              <a:t>1/21/2026</a:t>
+              <a:t>1/26/2026</a:t>
             </a:fld>
             <a:endParaRPr lang="en-US"/>
           </a:p>
@@ -1999,7 +1999,7 @@
           <a:p>
             <a:fld id="{5BCAD085-E8A6-8845-BD4E-CB4CCA059FC4}" type="datetimeFigureOut">
               <a:rPr lang="en-US" smtClean="0"/>
-              <a:t>1/21/2026</a:t>
+              <a:t>1/26/2026</a:t>
             </a:fld>
             <a:endParaRPr lang="en-US"/>
           </a:p>
@@ -2274,7 +2274,7 @@
           <a:p>
             <a:fld id="{5BCAD085-E8A6-8845-BD4E-CB4CCA059FC4}" type="datetimeFigureOut">
               <a:rPr lang="en-US" smtClean="0"/>
-              <a:t>1/21/2026</a:t>
+              <a:t>1/26/2026</a:t>
             </a:fld>
             <a:endParaRPr lang="en-US"/>
           </a:p>
@@ -2526,7 +2526,7 @@
           <a:p>
             <a:fld id="{5BCAD085-E8A6-8845-BD4E-CB4CCA059FC4}" type="datetimeFigureOut">
               <a:rPr lang="en-US" smtClean="0"/>
-              <a:t>1/21/2026</a:t>
+              <a:t>1/26/2026</a:t>
             </a:fld>
             <a:endParaRPr lang="en-US"/>
           </a:p>
@@ -2737,7 +2737,7 @@
           <a:p>
             <a:fld id="{5BCAD085-E8A6-8845-BD4E-CB4CCA059FC4}" type="datetimeFigureOut">
               <a:rPr lang="en-US" smtClean="0"/>
-              <a:t>1/21/2026</a:t>
+              <a:t>1/26/2026</a:t>
             </a:fld>
             <a:endParaRPr lang="en-US"/>
           </a:p>
@@ -9216,10 +9216,10 @@
       </p:sp>
       <p:pic>
         <p:nvPicPr>
-          <p:cNvPr id="18" name="Imagen 17">
+          <p:cNvPr id="8" name="Imagen 7">
             <a:extLst>
               <a:ext uri="{FF2B5EF4-FFF2-40B4-BE49-F238E27FC236}">
-                <a16:creationId xmlns:a16="http://schemas.microsoft.com/office/drawing/2014/main" id="{B8B4D22B-4DC1-6092-E162-9C415D362E89}"/>
+                <a16:creationId xmlns:a16="http://schemas.microsoft.com/office/drawing/2014/main" id="{1102549B-CD5C-F317-11FA-00ACF30D86E0}"/>
               </a:ext>
             </a:extLst>
           </p:cNvPr>
@@ -9236,8 +9236,8 @@
         </p:blipFill>
         <p:spPr>
           <a:xfrm>
-            <a:off x="0" y="1789490"/>
-            <a:ext cx="9144000" cy="4280598"/>
+            <a:off x="0" y="1880916"/>
+            <a:ext cx="9144000" cy="4294348"/>
           </a:xfrm>
           <a:prstGeom prst="rect">
             <a:avLst/>
